--- a/courses/his201/assets/en/HIS201_images_en.pptx
+++ b/courses/his201/assets/en/HIS201_images_en.pptx
@@ -203,7 +203,7 @@
       </p:grpSpPr>
       <p:sp>
         <p:nvSpPr>
-          <p:cNvPr id="1348045851" name="Header Placeholder 1"/>
+          <p:cNvPr id="39089058" name="Header Placeholder 1"/>
           <p:cNvSpPr>
             <a:spLocks noGrp="1"/>
           </p:cNvSpPr>
@@ -237,7 +237,7 @@
       </p:sp>
       <p:sp>
         <p:nvSpPr>
-          <p:cNvPr id="2039715982" name="Date Placeholder 2"/>
+          <p:cNvPr id="2099481301" name="Date Placeholder 2"/>
           <p:cNvSpPr>
             <a:spLocks noGrp="1"/>
           </p:cNvSpPr>
@@ -275,7 +275,7 @@
       </p:sp>
       <p:sp>
         <p:nvSpPr>
-          <p:cNvPr id="650864913" name="Slide Image Placeholder 3"/>
+          <p:cNvPr id="963331614" name="Slide Image Placeholder 3"/>
           <p:cNvSpPr>
             <a:spLocks noChangeAspect="1" noGrp="1" noRot="1"/>
           </p:cNvSpPr>
@@ -311,7 +311,7 @@
       </p:sp>
       <p:sp>
         <p:nvSpPr>
-          <p:cNvPr id="87739841" name="Notes Placeholder 4"/>
+          <p:cNvPr id="1994229746" name="Notes Placeholder 4"/>
           <p:cNvSpPr>
             <a:spLocks noGrp="1"/>
           </p:cNvSpPr>
@@ -385,7 +385,7 @@
       </p:sp>
       <p:sp>
         <p:nvSpPr>
-          <p:cNvPr id="1407924972" name="Footer Placeholder 5"/>
+          <p:cNvPr id="313052346" name="Footer Placeholder 5"/>
           <p:cNvSpPr>
             <a:spLocks noGrp="1"/>
           </p:cNvSpPr>
@@ -419,7 +419,7 @@
       </p:sp>
       <p:sp>
         <p:nvSpPr>
-          <p:cNvPr id="1368641270" name="Slide Number Placeholder 6"/>
+          <p:cNvPr id="1035077115" name="Slide Number Placeholder 6"/>
           <p:cNvSpPr>
             <a:spLocks noGrp="1"/>
           </p:cNvSpPr>
@@ -572,7 +572,7 @@
       </p:grpSpPr>
       <p:sp>
         <p:nvSpPr>
-          <p:cNvPr id="1298995577" name="Slide Image Placeholder 1"/>
+          <p:cNvPr id="1680978870" name="Slide Image Placeholder 1"/>
           <p:cNvSpPr>
             <a:spLocks noChangeAspect="1" noGrp="1" noRot="1"/>
           </p:cNvSpPr>
@@ -589,7 +589,7 @@
       </p:sp>
       <p:sp>
         <p:nvSpPr>
-          <p:cNvPr id="1376653007" name="Notes Placeholder 2"/>
+          <p:cNvPr id="1641754055" name="Notes Placeholder 2"/>
           <p:cNvSpPr>
             <a:spLocks noGrp="1"/>
           </p:cNvSpPr>
@@ -614,7 +614,7 @@
       </p:sp>
       <p:sp>
         <p:nvSpPr>
-          <p:cNvPr id="968961725" name="Slide Number Placeholder 3"/>
+          <p:cNvPr id="1848915755" name="Slide Number Placeholder 3"/>
           <p:cNvSpPr>
             <a:spLocks noGrp="1"/>
           </p:cNvSpPr>
@@ -665,7 +665,7 @@
       </p:grpSpPr>
       <p:sp>
         <p:nvSpPr>
-          <p:cNvPr id="745315415" name="Slide Image Placeholder 1"/>
+          <p:cNvPr id="556136006" name="Slide Image Placeholder 1"/>
           <p:cNvSpPr>
             <a:spLocks noChangeAspect="1" noGrp="1" noRot="1"/>
           </p:cNvSpPr>
@@ -677,7 +677,7 @@
       </p:sp>
       <p:sp>
         <p:nvSpPr>
-          <p:cNvPr id="93077427" name="Notes Placeholder 2"/>
+          <p:cNvPr id="1553163881" name="Notes Placeholder 2"/>
           <p:cNvSpPr>
             <a:spLocks noGrp="1"/>
           </p:cNvSpPr>
@@ -699,7 +699,7 @@
       </p:sp>
       <p:sp>
         <p:nvSpPr>
-          <p:cNvPr id="708656491" name="Slide Number Placeholder 3"/>
+          <p:cNvPr id="364745476" name="Slide Number Placeholder 3"/>
           <p:cNvSpPr>
             <a:spLocks noGrp="1"/>
           </p:cNvSpPr>
@@ -750,7 +750,7 @@
       </p:grpSpPr>
       <p:sp>
         <p:nvSpPr>
-          <p:cNvPr id="1975840627" name="Slide Image Placeholder 1"/>
+          <p:cNvPr id="315008026" name="Slide Image Placeholder 1"/>
           <p:cNvSpPr>
             <a:spLocks noChangeAspect="1" noGrp="1" noRot="1"/>
           </p:cNvSpPr>
@@ -762,7 +762,7 @@
       </p:sp>
       <p:sp>
         <p:nvSpPr>
-          <p:cNvPr id="787392641" name="Notes Placeholder 2"/>
+          <p:cNvPr id="420960998" name="Notes Placeholder 2"/>
           <p:cNvSpPr>
             <a:spLocks noGrp="1"/>
           </p:cNvSpPr>
@@ -784,7 +784,7 @@
       </p:sp>
       <p:sp>
         <p:nvSpPr>
-          <p:cNvPr id="1947892065" name="Slide Number Placeholder 3"/>
+          <p:cNvPr id="649144516" name="Slide Number Placeholder 3"/>
           <p:cNvSpPr>
             <a:spLocks noGrp="1"/>
           </p:cNvSpPr>
@@ -835,7 +835,7 @@
       </p:grpSpPr>
       <p:sp>
         <p:nvSpPr>
-          <p:cNvPr id="1125259732" name="Slide Image Placeholder 1"/>
+          <p:cNvPr id="1214447952" name="Slide Image Placeholder 1"/>
           <p:cNvSpPr>
             <a:spLocks noChangeAspect="1" noGrp="1" noRot="1"/>
           </p:cNvSpPr>
@@ -847,7 +847,7 @@
       </p:sp>
       <p:sp>
         <p:nvSpPr>
-          <p:cNvPr id="962771815" name="Notes Placeholder 2"/>
+          <p:cNvPr id="1126210712" name="Notes Placeholder 2"/>
           <p:cNvSpPr>
             <a:spLocks noGrp="1"/>
           </p:cNvSpPr>
@@ -869,7 +869,7 @@
       </p:sp>
       <p:sp>
         <p:nvSpPr>
-          <p:cNvPr id="311270995" name="Slide Number Placeholder 3"/>
+          <p:cNvPr id="894183102" name="Slide Number Placeholder 3"/>
           <p:cNvSpPr>
             <a:spLocks noGrp="1"/>
           </p:cNvSpPr>
@@ -920,7 +920,7 @@
       </p:grpSpPr>
       <p:sp>
         <p:nvSpPr>
-          <p:cNvPr id="1564694257" name="Slide Image Placeholder 1"/>
+          <p:cNvPr id="2019272012" name="Slide Image Placeholder 1"/>
           <p:cNvSpPr>
             <a:spLocks noChangeAspect="1" noGrp="1" noRot="1"/>
           </p:cNvSpPr>
@@ -932,7 +932,7 @@
       </p:sp>
       <p:sp>
         <p:nvSpPr>
-          <p:cNvPr id="811331028" name="Notes Placeholder 2"/>
+          <p:cNvPr id="335077920" name="Notes Placeholder 2"/>
           <p:cNvSpPr>
             <a:spLocks noGrp="1"/>
           </p:cNvSpPr>
@@ -954,7 +954,7 @@
       </p:sp>
       <p:sp>
         <p:nvSpPr>
-          <p:cNvPr id="1903079904" name="Slide Number Placeholder 3"/>
+          <p:cNvPr id="2136816195" name="Slide Number Placeholder 3"/>
           <p:cNvSpPr>
             <a:spLocks noGrp="1"/>
           </p:cNvSpPr>
@@ -1005,7 +1005,7 @@
       </p:grpSpPr>
       <p:sp>
         <p:nvSpPr>
-          <p:cNvPr id="1155410960" name="Slide Image Placeholder 1"/>
+          <p:cNvPr id="837330709" name="Slide Image Placeholder 1"/>
           <p:cNvSpPr>
             <a:spLocks noChangeAspect="1" noGrp="1" noRot="1"/>
           </p:cNvSpPr>
@@ -1017,7 +1017,7 @@
       </p:sp>
       <p:sp>
         <p:nvSpPr>
-          <p:cNvPr id="173728062" name="Notes Placeholder 2"/>
+          <p:cNvPr id="2104528450" name="Notes Placeholder 2"/>
           <p:cNvSpPr>
             <a:spLocks noGrp="1"/>
           </p:cNvSpPr>
@@ -1039,7 +1039,7 @@
       </p:sp>
       <p:sp>
         <p:nvSpPr>
-          <p:cNvPr id="1442273283" name="Slide Number Placeholder 3"/>
+          <p:cNvPr id="813489393" name="Slide Number Placeholder 3"/>
           <p:cNvSpPr>
             <a:spLocks noGrp="1"/>
           </p:cNvSpPr>
@@ -1090,7 +1090,7 @@
       </p:grpSpPr>
       <p:sp>
         <p:nvSpPr>
-          <p:cNvPr id="828749673" name="Slide Image Placeholder 1"/>
+          <p:cNvPr id="1485696982" name="Slide Image Placeholder 1"/>
           <p:cNvSpPr>
             <a:spLocks noChangeAspect="1" noGrp="1" noRot="1"/>
           </p:cNvSpPr>
@@ -1102,7 +1102,7 @@
       </p:sp>
       <p:sp>
         <p:nvSpPr>
-          <p:cNvPr id="777395280" name="Notes Placeholder 2"/>
+          <p:cNvPr id="547440255" name="Notes Placeholder 2"/>
           <p:cNvSpPr>
             <a:spLocks noGrp="1"/>
           </p:cNvSpPr>
@@ -1124,7 +1124,7 @@
       </p:sp>
       <p:sp>
         <p:nvSpPr>
-          <p:cNvPr id="1615004838" name="Slide Number Placeholder 3"/>
+          <p:cNvPr id="1071877374" name="Slide Number Placeholder 3"/>
           <p:cNvSpPr>
             <a:spLocks noGrp="1"/>
           </p:cNvSpPr>
@@ -1175,7 +1175,7 @@
       </p:grpSpPr>
       <p:sp>
         <p:nvSpPr>
-          <p:cNvPr id="1780646119" name="Slide Image Placeholder 1"/>
+          <p:cNvPr id="221736343" name="Slide Image Placeholder 1"/>
           <p:cNvSpPr>
             <a:spLocks noChangeAspect="1" noGrp="1" noRot="1"/>
           </p:cNvSpPr>
@@ -1187,7 +1187,7 @@
       </p:sp>
       <p:sp>
         <p:nvSpPr>
-          <p:cNvPr id="1474008644" name="Notes Placeholder 2"/>
+          <p:cNvPr id="794855136" name="Notes Placeholder 2"/>
           <p:cNvSpPr>
             <a:spLocks noGrp="1"/>
           </p:cNvSpPr>
@@ -1209,7 +1209,7 @@
       </p:sp>
       <p:sp>
         <p:nvSpPr>
-          <p:cNvPr id="1736759179" name="Slide Number Placeholder 3"/>
+          <p:cNvPr id="1525224499" name="Slide Number Placeholder 3"/>
           <p:cNvSpPr>
             <a:spLocks noGrp="1"/>
           </p:cNvSpPr>
@@ -1260,7 +1260,7 @@
       </p:grpSpPr>
       <p:sp>
         <p:nvSpPr>
-          <p:cNvPr id="271149511" name="Slide Image Placeholder 1"/>
+          <p:cNvPr id="1221133491" name="Slide Image Placeholder 1"/>
           <p:cNvSpPr>
             <a:spLocks noChangeAspect="1" noGrp="1" noRot="1"/>
           </p:cNvSpPr>
@@ -1272,7 +1272,7 @@
       </p:sp>
       <p:sp>
         <p:nvSpPr>
-          <p:cNvPr id="1476380105" name="Notes Placeholder 2"/>
+          <p:cNvPr id="489355366" name="Notes Placeholder 2"/>
           <p:cNvSpPr>
             <a:spLocks noGrp="1"/>
           </p:cNvSpPr>
@@ -1294,7 +1294,7 @@
       </p:sp>
       <p:sp>
         <p:nvSpPr>
-          <p:cNvPr id="1847300102" name="Slide Number Placeholder 3"/>
+          <p:cNvPr id="1965503353" name="Slide Number Placeholder 3"/>
           <p:cNvSpPr>
             <a:spLocks noGrp="1"/>
           </p:cNvSpPr>
@@ -1345,7 +1345,7 @@
       </p:grpSpPr>
       <p:sp>
         <p:nvSpPr>
-          <p:cNvPr id="1789331504" name="Slide Image Placeholder 1"/>
+          <p:cNvPr id="1062461059" name="Slide Image Placeholder 1"/>
           <p:cNvSpPr>
             <a:spLocks noChangeAspect="1" noGrp="1" noRot="1"/>
           </p:cNvSpPr>
@@ -1357,7 +1357,7 @@
       </p:sp>
       <p:sp>
         <p:nvSpPr>
-          <p:cNvPr id="123621809" name="Notes Placeholder 2"/>
+          <p:cNvPr id="2010807350" name="Notes Placeholder 2"/>
           <p:cNvSpPr>
             <a:spLocks noGrp="1"/>
           </p:cNvSpPr>
@@ -1379,7 +1379,7 @@
       </p:sp>
       <p:sp>
         <p:nvSpPr>
-          <p:cNvPr id="1209337391" name="Slide Number Placeholder 3"/>
+          <p:cNvPr id="1131638784" name="Slide Number Placeholder 3"/>
           <p:cNvSpPr>
             <a:spLocks noGrp="1"/>
           </p:cNvSpPr>
@@ -1430,7 +1430,7 @@
       </p:grpSpPr>
       <p:sp>
         <p:nvSpPr>
-          <p:cNvPr id="1183558054" name="Slide Image Placeholder 1"/>
+          <p:cNvPr id="2099187352" name="Slide Image Placeholder 1"/>
           <p:cNvSpPr>
             <a:spLocks noChangeAspect="1" noGrp="1" noRot="1"/>
           </p:cNvSpPr>
@@ -1442,7 +1442,7 @@
       </p:sp>
       <p:sp>
         <p:nvSpPr>
-          <p:cNvPr id="22692579" name="Notes Placeholder 2"/>
+          <p:cNvPr id="1443043441" name="Notes Placeholder 2"/>
           <p:cNvSpPr>
             <a:spLocks noGrp="1"/>
           </p:cNvSpPr>
@@ -1464,7 +1464,7 @@
       </p:sp>
       <p:sp>
         <p:nvSpPr>
-          <p:cNvPr id="444239228" name="Slide Number Placeholder 3"/>
+          <p:cNvPr id="1821177459" name="Slide Number Placeholder 3"/>
           <p:cNvSpPr>
             <a:spLocks noGrp="1"/>
           </p:cNvSpPr>
@@ -1515,7 +1515,7 @@
       </p:grpSpPr>
       <p:sp>
         <p:nvSpPr>
-          <p:cNvPr id="1460881976" name="Slide Image Placeholder 1"/>
+          <p:cNvPr id="97407030" name="Slide Image Placeholder 1"/>
           <p:cNvSpPr>
             <a:spLocks noChangeAspect="1" noGrp="1" noRot="1"/>
           </p:cNvSpPr>
@@ -1527,7 +1527,7 @@
       </p:sp>
       <p:sp>
         <p:nvSpPr>
-          <p:cNvPr id="811881629" name="Notes Placeholder 2"/>
+          <p:cNvPr id="1844566913" name="Notes Placeholder 2"/>
           <p:cNvSpPr>
             <a:spLocks noGrp="1"/>
           </p:cNvSpPr>
@@ -1549,7 +1549,7 @@
       </p:sp>
       <p:sp>
         <p:nvSpPr>
-          <p:cNvPr id="449020644" name="Slide Number Placeholder 3"/>
+          <p:cNvPr id="411870703" name="Slide Number Placeholder 3"/>
           <p:cNvSpPr>
             <a:spLocks noGrp="1"/>
           </p:cNvSpPr>
@@ -1600,7 +1600,7 @@
       </p:grpSpPr>
       <p:sp>
         <p:nvSpPr>
-          <p:cNvPr id="1995422603" name="Slide Image Placeholder 1"/>
+          <p:cNvPr id="1830223096" name="Slide Image Placeholder 1"/>
           <p:cNvSpPr>
             <a:spLocks noChangeAspect="1" noGrp="1" noRot="1"/>
           </p:cNvSpPr>
@@ -1612,7 +1612,7 @@
       </p:sp>
       <p:sp>
         <p:nvSpPr>
-          <p:cNvPr id="596800594" name="Notes Placeholder 2"/>
+          <p:cNvPr id="166868795" name="Notes Placeholder 2"/>
           <p:cNvSpPr>
             <a:spLocks noGrp="1"/>
           </p:cNvSpPr>
@@ -1634,7 +1634,7 @@
       </p:sp>
       <p:sp>
         <p:nvSpPr>
-          <p:cNvPr id="428488528" name="Slide Number Placeholder 3"/>
+          <p:cNvPr id="2065007204" name="Slide Number Placeholder 3"/>
           <p:cNvSpPr>
             <a:spLocks noGrp="1"/>
           </p:cNvSpPr>
@@ -1685,7 +1685,7 @@
       </p:grpSpPr>
       <p:sp>
         <p:nvSpPr>
-          <p:cNvPr id="1765056224" name="Slide Image Placeholder 1"/>
+          <p:cNvPr id="1654279831" name="Slide Image Placeholder 1"/>
           <p:cNvSpPr>
             <a:spLocks noChangeAspect="1" noGrp="1" noRot="1"/>
           </p:cNvSpPr>
@@ -1697,7 +1697,7 @@
       </p:sp>
       <p:sp>
         <p:nvSpPr>
-          <p:cNvPr id="523714544" name="Notes Placeholder 2"/>
+          <p:cNvPr id="1385849402" name="Notes Placeholder 2"/>
           <p:cNvSpPr>
             <a:spLocks noGrp="1"/>
           </p:cNvSpPr>
@@ -1719,7 +1719,7 @@
       </p:sp>
       <p:sp>
         <p:nvSpPr>
-          <p:cNvPr id="1764167283" name="Slide Number Placeholder 3"/>
+          <p:cNvPr id="283048007" name="Slide Number Placeholder 3"/>
           <p:cNvSpPr>
             <a:spLocks noGrp="1"/>
           </p:cNvSpPr>
@@ -1770,7 +1770,7 @@
       </p:grpSpPr>
       <p:sp>
         <p:nvSpPr>
-          <p:cNvPr id="1237623802" name="Slide Image Placeholder 1"/>
+          <p:cNvPr id="1399435849" name="Slide Image Placeholder 1"/>
           <p:cNvSpPr>
             <a:spLocks noChangeAspect="1" noGrp="1" noRot="1"/>
           </p:cNvSpPr>
@@ -1782,7 +1782,7 @@
       </p:sp>
       <p:sp>
         <p:nvSpPr>
-          <p:cNvPr id="1195942204" name="Notes Placeholder 2"/>
+          <p:cNvPr id="1831028955" name="Notes Placeholder 2"/>
           <p:cNvSpPr>
             <a:spLocks noGrp="1"/>
           </p:cNvSpPr>
@@ -1804,7 +1804,7 @@
       </p:sp>
       <p:sp>
         <p:nvSpPr>
-          <p:cNvPr id="1359092021" name="Slide Number Placeholder 3"/>
+          <p:cNvPr id="1622506081" name="Slide Number Placeholder 3"/>
           <p:cNvSpPr>
             <a:spLocks noGrp="1"/>
           </p:cNvSpPr>
@@ -1855,7 +1855,7 @@
       </p:grpSpPr>
       <p:sp>
         <p:nvSpPr>
-          <p:cNvPr id="1747501899" name="Slide Image Placeholder 1"/>
+          <p:cNvPr id="1621694685" name="Slide Image Placeholder 1"/>
           <p:cNvSpPr>
             <a:spLocks noChangeAspect="1" noGrp="1" noRot="1"/>
           </p:cNvSpPr>
@@ -1867,7 +1867,7 @@
       </p:sp>
       <p:sp>
         <p:nvSpPr>
-          <p:cNvPr id="255277454" name="Notes Placeholder 2"/>
+          <p:cNvPr id="828245654" name="Notes Placeholder 2"/>
           <p:cNvSpPr>
             <a:spLocks noGrp="1"/>
           </p:cNvSpPr>
@@ -1889,7 +1889,7 @@
       </p:sp>
       <p:sp>
         <p:nvSpPr>
-          <p:cNvPr id="1933134776" name="Slide Number Placeholder 3"/>
+          <p:cNvPr id="320978408" name="Slide Number Placeholder 3"/>
           <p:cNvSpPr>
             <a:spLocks noGrp="1"/>
           </p:cNvSpPr>
@@ -1940,7 +1940,7 @@
       </p:grpSpPr>
       <p:sp>
         <p:nvSpPr>
-          <p:cNvPr id="306062743" name="Slide Image Placeholder 1"/>
+          <p:cNvPr id="560857520" name="Slide Image Placeholder 1"/>
           <p:cNvSpPr>
             <a:spLocks noChangeAspect="1" noGrp="1" noRot="1"/>
           </p:cNvSpPr>
@@ -1952,7 +1952,7 @@
       </p:sp>
       <p:sp>
         <p:nvSpPr>
-          <p:cNvPr id="1769090478" name="Notes Placeholder 2"/>
+          <p:cNvPr id="2045309764" name="Notes Placeholder 2"/>
           <p:cNvSpPr>
             <a:spLocks noGrp="1"/>
           </p:cNvSpPr>
@@ -1974,7 +1974,7 @@
       </p:sp>
       <p:sp>
         <p:nvSpPr>
-          <p:cNvPr id="304671089" name="Slide Number Placeholder 3"/>
+          <p:cNvPr id="334900570" name="Slide Number Placeholder 3"/>
           <p:cNvSpPr>
             <a:spLocks noGrp="1"/>
           </p:cNvSpPr>
@@ -2025,7 +2025,7 @@
       </p:grpSpPr>
       <p:sp>
         <p:nvSpPr>
-          <p:cNvPr id="709815089" name="Slide Image Placeholder 1"/>
+          <p:cNvPr id="1489364900" name="Slide Image Placeholder 1"/>
           <p:cNvSpPr>
             <a:spLocks noChangeAspect="1" noGrp="1" noRot="1"/>
           </p:cNvSpPr>
@@ -2037,7 +2037,7 @@
       </p:sp>
       <p:sp>
         <p:nvSpPr>
-          <p:cNvPr id="1292386549" name="Notes Placeholder 2"/>
+          <p:cNvPr id="101303473" name="Notes Placeholder 2"/>
           <p:cNvSpPr>
             <a:spLocks noGrp="1"/>
           </p:cNvSpPr>
@@ -2059,7 +2059,7 @@
       </p:sp>
       <p:sp>
         <p:nvSpPr>
-          <p:cNvPr id="874206454" name="Slide Number Placeholder 3"/>
+          <p:cNvPr id="1870131968" name="Slide Number Placeholder 3"/>
           <p:cNvSpPr>
             <a:spLocks noGrp="1"/>
           </p:cNvSpPr>
@@ -2110,7 +2110,7 @@
       </p:grpSpPr>
       <p:sp>
         <p:nvSpPr>
-          <p:cNvPr id="2028659072" name="Slide Image Placeholder 1"/>
+          <p:cNvPr id="1794112419" name="Slide Image Placeholder 1"/>
           <p:cNvSpPr>
             <a:spLocks noChangeAspect="1" noGrp="1" noRot="1"/>
           </p:cNvSpPr>
@@ -2122,7 +2122,7 @@
       </p:sp>
       <p:sp>
         <p:nvSpPr>
-          <p:cNvPr id="1717770494" name="Notes Placeholder 2"/>
+          <p:cNvPr id="1041400984" name="Notes Placeholder 2"/>
           <p:cNvSpPr>
             <a:spLocks noGrp="1"/>
           </p:cNvSpPr>
@@ -2144,7 +2144,7 @@
       </p:sp>
       <p:sp>
         <p:nvSpPr>
-          <p:cNvPr id="343054067" name="Slide Number Placeholder 3"/>
+          <p:cNvPr id="1353170894" name="Slide Number Placeholder 3"/>
           <p:cNvSpPr>
             <a:spLocks noGrp="1"/>
           </p:cNvSpPr>
@@ -2195,7 +2195,7 @@
       </p:grpSpPr>
       <p:sp>
         <p:nvSpPr>
-          <p:cNvPr id="1462372864" name="Slide Image Placeholder 1"/>
+          <p:cNvPr id="1588301177" name="Slide Image Placeholder 1"/>
           <p:cNvSpPr>
             <a:spLocks noChangeAspect="1" noGrp="1" noRot="1"/>
           </p:cNvSpPr>
@@ -2207,7 +2207,7 @@
       </p:sp>
       <p:sp>
         <p:nvSpPr>
-          <p:cNvPr id="2096068173" name="Notes Placeholder 2"/>
+          <p:cNvPr id="1241559198" name="Notes Placeholder 2"/>
           <p:cNvSpPr>
             <a:spLocks noGrp="1"/>
           </p:cNvSpPr>
@@ -2229,7 +2229,7 @@
       </p:sp>
       <p:sp>
         <p:nvSpPr>
-          <p:cNvPr id="1693241049" name="Slide Number Placeholder 3"/>
+          <p:cNvPr id="126578646" name="Slide Number Placeholder 3"/>
           <p:cNvSpPr>
             <a:spLocks noGrp="1"/>
           </p:cNvSpPr>
@@ -2280,7 +2280,7 @@
       </p:grpSpPr>
       <p:sp>
         <p:nvSpPr>
-          <p:cNvPr id="874758611" name="Slide Image Placeholder 1"/>
+          <p:cNvPr id="2114212009" name="Slide Image Placeholder 1"/>
           <p:cNvSpPr>
             <a:spLocks noChangeAspect="1" noGrp="1" noRot="1"/>
           </p:cNvSpPr>
@@ -2292,7 +2292,7 @@
       </p:sp>
       <p:sp>
         <p:nvSpPr>
-          <p:cNvPr id="467309743" name="Notes Placeholder 2"/>
+          <p:cNvPr id="931118386" name="Notes Placeholder 2"/>
           <p:cNvSpPr>
             <a:spLocks noGrp="1"/>
           </p:cNvSpPr>
@@ -2314,7 +2314,7 @@
       </p:sp>
       <p:sp>
         <p:nvSpPr>
-          <p:cNvPr id="1407456336" name="Slide Number Placeholder 3"/>
+          <p:cNvPr id="289538646" name="Slide Number Placeholder 3"/>
           <p:cNvSpPr>
             <a:spLocks noGrp="1"/>
           </p:cNvSpPr>
@@ -2365,7 +2365,7 @@
       </p:grpSpPr>
       <p:sp>
         <p:nvSpPr>
-          <p:cNvPr id="1688170281" name="Slide Image Placeholder 1"/>
+          <p:cNvPr id="2110532495" name="Slide Image Placeholder 1"/>
           <p:cNvSpPr>
             <a:spLocks noChangeAspect="1" noGrp="1" noRot="1"/>
           </p:cNvSpPr>
@@ -2377,7 +2377,7 @@
       </p:sp>
       <p:sp>
         <p:nvSpPr>
-          <p:cNvPr id="1835855160" name="Notes Placeholder 2"/>
+          <p:cNvPr id="1892047684" name="Notes Placeholder 2"/>
           <p:cNvSpPr>
             <a:spLocks noGrp="1"/>
           </p:cNvSpPr>
@@ -2399,7 +2399,7 @@
       </p:sp>
       <p:sp>
         <p:nvSpPr>
-          <p:cNvPr id="719188614" name="Slide Number Placeholder 3"/>
+          <p:cNvPr id="2054808403" name="Slide Number Placeholder 3"/>
           <p:cNvSpPr>
             <a:spLocks noGrp="1"/>
           </p:cNvSpPr>
@@ -2450,7 +2450,7 @@
       </p:grpSpPr>
       <p:sp>
         <p:nvSpPr>
-          <p:cNvPr id="1031170052" name="Slide Image Placeholder 1"/>
+          <p:cNvPr id="1198987884" name="Slide Image Placeholder 1"/>
           <p:cNvSpPr>
             <a:spLocks noChangeAspect="1" noGrp="1" noRot="1"/>
           </p:cNvSpPr>
@@ -2462,7 +2462,7 @@
       </p:sp>
       <p:sp>
         <p:nvSpPr>
-          <p:cNvPr id="1775337118" name="Notes Placeholder 2"/>
+          <p:cNvPr id="2018659221" name="Notes Placeholder 2"/>
           <p:cNvSpPr>
             <a:spLocks noGrp="1"/>
           </p:cNvSpPr>
@@ -2484,7 +2484,7 @@
       </p:sp>
       <p:sp>
         <p:nvSpPr>
-          <p:cNvPr id="1805717075" name="Slide Number Placeholder 3"/>
+          <p:cNvPr id="1759670535" name="Slide Number Placeholder 3"/>
           <p:cNvSpPr>
             <a:spLocks noGrp="1"/>
           </p:cNvSpPr>
@@ -2535,7 +2535,7 @@
       </p:grpSpPr>
       <p:sp>
         <p:nvSpPr>
-          <p:cNvPr id="403805694" name="Slide Image Placeholder 1"/>
+          <p:cNvPr id="223006188" name="Slide Image Placeholder 1"/>
           <p:cNvSpPr>
             <a:spLocks noChangeAspect="1" noGrp="1" noRot="1"/>
           </p:cNvSpPr>
@@ -2547,7 +2547,7 @@
       </p:sp>
       <p:sp>
         <p:nvSpPr>
-          <p:cNvPr id="1618772926" name="Notes Placeholder 2"/>
+          <p:cNvPr id="607947487" name="Notes Placeholder 2"/>
           <p:cNvSpPr>
             <a:spLocks noGrp="1"/>
           </p:cNvSpPr>
@@ -2569,7 +2569,7 @@
       </p:sp>
       <p:sp>
         <p:nvSpPr>
-          <p:cNvPr id="129098366" name="Slide Number Placeholder 3"/>
+          <p:cNvPr id="569048169" name="Slide Number Placeholder 3"/>
           <p:cNvSpPr>
             <a:spLocks noGrp="1"/>
           </p:cNvSpPr>
@@ -2620,7 +2620,7 @@
       </p:grpSpPr>
       <p:sp>
         <p:nvSpPr>
-          <p:cNvPr id="1940110954" name="Slide Image Placeholder 1"/>
+          <p:cNvPr id="170773330" name="Slide Image Placeholder 1"/>
           <p:cNvSpPr>
             <a:spLocks noChangeAspect="1" noGrp="1" noRot="1"/>
           </p:cNvSpPr>
@@ -2632,7 +2632,7 @@
       </p:sp>
       <p:sp>
         <p:nvSpPr>
-          <p:cNvPr id="899519278" name="Notes Placeholder 2"/>
+          <p:cNvPr id="751484777" name="Notes Placeholder 2"/>
           <p:cNvSpPr>
             <a:spLocks noGrp="1"/>
           </p:cNvSpPr>
@@ -2654,7 +2654,7 @@
       </p:sp>
       <p:sp>
         <p:nvSpPr>
-          <p:cNvPr id="1782608891" name="Slide Number Placeholder 3"/>
+          <p:cNvPr id="333931644" name="Slide Number Placeholder 3"/>
           <p:cNvSpPr>
             <a:spLocks noGrp="1"/>
           </p:cNvSpPr>
@@ -2705,7 +2705,7 @@
       </p:grpSpPr>
       <p:sp>
         <p:nvSpPr>
-          <p:cNvPr id="226374309" name="Slide Image Placeholder 1"/>
+          <p:cNvPr id="1833524060" name="Slide Image Placeholder 1"/>
           <p:cNvSpPr>
             <a:spLocks noChangeAspect="1" noGrp="1" noRot="1"/>
           </p:cNvSpPr>
@@ -2717,7 +2717,7 @@
       </p:sp>
       <p:sp>
         <p:nvSpPr>
-          <p:cNvPr id="957859049" name="Notes Placeholder 2"/>
+          <p:cNvPr id="561103873" name="Notes Placeholder 2"/>
           <p:cNvSpPr>
             <a:spLocks noGrp="1"/>
           </p:cNvSpPr>
@@ -2739,7 +2739,7 @@
       </p:sp>
       <p:sp>
         <p:nvSpPr>
-          <p:cNvPr id="1918968252" name="Slide Number Placeholder 3"/>
+          <p:cNvPr id="862025842" name="Slide Number Placeholder 3"/>
           <p:cNvSpPr>
             <a:spLocks noGrp="1"/>
           </p:cNvSpPr>
@@ -2790,7 +2790,7 @@
       </p:grpSpPr>
       <p:sp>
         <p:nvSpPr>
-          <p:cNvPr id="568714003" name="Slide Image Placeholder 1"/>
+          <p:cNvPr id="998986045" name="Slide Image Placeholder 1"/>
           <p:cNvSpPr>
             <a:spLocks noChangeAspect="1" noGrp="1" noRot="1"/>
           </p:cNvSpPr>
@@ -2802,7 +2802,7 @@
       </p:sp>
       <p:sp>
         <p:nvSpPr>
-          <p:cNvPr id="827529626" name="Notes Placeholder 2"/>
+          <p:cNvPr id="1839909371" name="Notes Placeholder 2"/>
           <p:cNvSpPr>
             <a:spLocks noGrp="1"/>
           </p:cNvSpPr>
@@ -2824,7 +2824,7 @@
       </p:sp>
       <p:sp>
         <p:nvSpPr>
-          <p:cNvPr id="79159721" name="Slide Number Placeholder 3"/>
+          <p:cNvPr id="831631823" name="Slide Number Placeholder 3"/>
           <p:cNvSpPr>
             <a:spLocks noGrp="1"/>
           </p:cNvSpPr>
@@ -2875,7 +2875,7 @@
       </p:grpSpPr>
       <p:sp>
         <p:nvSpPr>
-          <p:cNvPr id="863787859" name="Slide Image Placeholder 1"/>
+          <p:cNvPr id="1449666848" name="Slide Image Placeholder 1"/>
           <p:cNvSpPr>
             <a:spLocks noChangeAspect="1" noGrp="1" noRot="1"/>
           </p:cNvSpPr>
@@ -2887,7 +2887,7 @@
       </p:sp>
       <p:sp>
         <p:nvSpPr>
-          <p:cNvPr id="1619070042" name="Notes Placeholder 2"/>
+          <p:cNvPr id="1249428426" name="Notes Placeholder 2"/>
           <p:cNvSpPr>
             <a:spLocks noGrp="1"/>
           </p:cNvSpPr>
@@ -2909,7 +2909,7 @@
       </p:sp>
       <p:sp>
         <p:nvSpPr>
-          <p:cNvPr id="1167949838" name="Slide Number Placeholder 3"/>
+          <p:cNvPr id="1941384023" name="Slide Number Placeholder 3"/>
           <p:cNvSpPr>
             <a:spLocks noGrp="1"/>
           </p:cNvSpPr>
@@ -2960,7 +2960,7 @@
       </p:grpSpPr>
       <p:sp>
         <p:nvSpPr>
-          <p:cNvPr id="1413988692" name="Slide Image Placeholder 1"/>
+          <p:cNvPr id="1973563950" name="Slide Image Placeholder 1"/>
           <p:cNvSpPr>
             <a:spLocks noChangeAspect="1" noGrp="1" noRot="1"/>
           </p:cNvSpPr>
@@ -2972,7 +2972,7 @@
       </p:sp>
       <p:sp>
         <p:nvSpPr>
-          <p:cNvPr id="1620444229" name="Notes Placeholder 2"/>
+          <p:cNvPr id="336348415" name="Notes Placeholder 2"/>
           <p:cNvSpPr>
             <a:spLocks noGrp="1"/>
           </p:cNvSpPr>
@@ -2994,7 +2994,7 @@
       </p:sp>
       <p:sp>
         <p:nvSpPr>
-          <p:cNvPr id="1718563436" name="Slide Number Placeholder 3"/>
+          <p:cNvPr id="86871942" name="Slide Number Placeholder 3"/>
           <p:cNvSpPr>
             <a:spLocks noGrp="1"/>
           </p:cNvSpPr>
@@ -3045,7 +3045,7 @@
       </p:grpSpPr>
       <p:sp>
         <p:nvSpPr>
-          <p:cNvPr id="1173332578" name="Slide Image Placeholder 1"/>
+          <p:cNvPr id="731752041" name="Slide Image Placeholder 1"/>
           <p:cNvSpPr>
             <a:spLocks noChangeAspect="1" noGrp="1" noRot="1"/>
           </p:cNvSpPr>
@@ -3057,7 +3057,7 @@
       </p:sp>
       <p:sp>
         <p:nvSpPr>
-          <p:cNvPr id="900066217" name="Notes Placeholder 2"/>
+          <p:cNvPr id="1858225098" name="Notes Placeholder 2"/>
           <p:cNvSpPr>
             <a:spLocks noGrp="1"/>
           </p:cNvSpPr>
@@ -3079,7 +3079,7 @@
       </p:sp>
       <p:sp>
         <p:nvSpPr>
-          <p:cNvPr id="571410905" name="Slide Number Placeholder 3"/>
+          <p:cNvPr id="2105295868" name="Slide Number Placeholder 3"/>
           <p:cNvSpPr>
             <a:spLocks noGrp="1"/>
           </p:cNvSpPr>
@@ -3130,7 +3130,7 @@
       </p:grpSpPr>
       <p:sp>
         <p:nvSpPr>
-          <p:cNvPr id="1591084903" name="Slide Image Placeholder 1"/>
+          <p:cNvPr id="1144798954" name="Slide Image Placeholder 1"/>
           <p:cNvSpPr>
             <a:spLocks noChangeAspect="1" noGrp="1" noRot="1"/>
           </p:cNvSpPr>
@@ -3142,7 +3142,7 @@
       </p:sp>
       <p:sp>
         <p:nvSpPr>
-          <p:cNvPr id="320652323" name="Notes Placeholder 2"/>
+          <p:cNvPr id="1391577240" name="Notes Placeholder 2"/>
           <p:cNvSpPr>
             <a:spLocks noGrp="1"/>
           </p:cNvSpPr>
@@ -3164,7 +3164,7 @@
       </p:sp>
       <p:sp>
         <p:nvSpPr>
-          <p:cNvPr id="166363619" name="Slide Number Placeholder 3"/>
+          <p:cNvPr id="670757981" name="Slide Number Placeholder 3"/>
           <p:cNvSpPr>
             <a:spLocks noGrp="1"/>
           </p:cNvSpPr>
@@ -3215,7 +3215,7 @@
       </p:grpSpPr>
       <p:sp>
         <p:nvSpPr>
-          <p:cNvPr id="910634083" name="Slide Image Placeholder 1"/>
+          <p:cNvPr id="925503257" name="Slide Image Placeholder 1"/>
           <p:cNvSpPr>
             <a:spLocks noChangeAspect="1" noGrp="1" noRot="1"/>
           </p:cNvSpPr>
@@ -3227,7 +3227,7 @@
       </p:sp>
       <p:sp>
         <p:nvSpPr>
-          <p:cNvPr id="790853832" name="Notes Placeholder 2"/>
+          <p:cNvPr id="1987191552" name="Notes Placeholder 2"/>
           <p:cNvSpPr>
             <a:spLocks noGrp="1"/>
           </p:cNvSpPr>
@@ -3249,7 +3249,7 @@
       </p:sp>
       <p:sp>
         <p:nvSpPr>
-          <p:cNvPr id="474549622" name="Slide Number Placeholder 3"/>
+          <p:cNvPr id="559924327" name="Slide Number Placeholder 3"/>
           <p:cNvSpPr>
             <a:spLocks noGrp="1"/>
           </p:cNvSpPr>
@@ -3300,7 +3300,7 @@
       </p:grpSpPr>
       <p:sp>
         <p:nvSpPr>
-          <p:cNvPr id="995047303" name="Slide Image Placeholder 1"/>
+          <p:cNvPr id="753795575" name="Slide Image Placeholder 1"/>
           <p:cNvSpPr>
             <a:spLocks noChangeAspect="1" noGrp="1" noRot="1"/>
           </p:cNvSpPr>
@@ -3312,7 +3312,7 @@
       </p:sp>
       <p:sp>
         <p:nvSpPr>
-          <p:cNvPr id="570915158" name="Notes Placeholder 2"/>
+          <p:cNvPr id="1137586927" name="Notes Placeholder 2"/>
           <p:cNvSpPr>
             <a:spLocks noGrp="1"/>
           </p:cNvSpPr>
@@ -3334,7 +3334,7 @@
       </p:sp>
       <p:sp>
         <p:nvSpPr>
-          <p:cNvPr id="580287612" name="Slide Number Placeholder 3"/>
+          <p:cNvPr id="290801278" name="Slide Number Placeholder 3"/>
           <p:cNvSpPr>
             <a:spLocks noGrp="1"/>
           </p:cNvSpPr>
@@ -3385,7 +3385,7 @@
       </p:grpSpPr>
       <p:sp>
         <p:nvSpPr>
-          <p:cNvPr id="1309609138" name="Slide Image Placeholder 1"/>
+          <p:cNvPr id="389782411" name="Slide Image Placeholder 1"/>
           <p:cNvSpPr>
             <a:spLocks noChangeAspect="1" noGrp="1" noRot="1"/>
           </p:cNvSpPr>
@@ -3397,7 +3397,7 @@
       </p:sp>
       <p:sp>
         <p:nvSpPr>
-          <p:cNvPr id="323302855" name="Notes Placeholder 2"/>
+          <p:cNvPr id="1798231463" name="Notes Placeholder 2"/>
           <p:cNvSpPr>
             <a:spLocks noGrp="1"/>
           </p:cNvSpPr>
@@ -3419,7 +3419,7 @@
       </p:sp>
       <p:sp>
         <p:nvSpPr>
-          <p:cNvPr id="1095942122" name="Slide Number Placeholder 3"/>
+          <p:cNvPr id="1807947334" name="Slide Number Placeholder 3"/>
           <p:cNvSpPr>
             <a:spLocks noGrp="1"/>
           </p:cNvSpPr>
@@ -3470,7 +3470,7 @@
       </p:grpSpPr>
       <p:sp>
         <p:nvSpPr>
-          <p:cNvPr id="28894514" name="Slide Image Placeholder 1"/>
+          <p:cNvPr id="808122898" name="Slide Image Placeholder 1"/>
           <p:cNvSpPr>
             <a:spLocks noChangeAspect="1" noGrp="1" noRot="1"/>
           </p:cNvSpPr>
@@ -3482,7 +3482,7 @@
       </p:sp>
       <p:sp>
         <p:nvSpPr>
-          <p:cNvPr id="550845788" name="Notes Placeholder 2"/>
+          <p:cNvPr id="1604117914" name="Notes Placeholder 2"/>
           <p:cNvSpPr>
             <a:spLocks noGrp="1"/>
           </p:cNvSpPr>
@@ -3504,7 +3504,7 @@
       </p:sp>
       <p:sp>
         <p:nvSpPr>
-          <p:cNvPr id="692990460" name="Slide Number Placeholder 3"/>
+          <p:cNvPr id="202540270" name="Slide Number Placeholder 3"/>
           <p:cNvSpPr>
             <a:spLocks noGrp="1"/>
           </p:cNvSpPr>
@@ -3555,7 +3555,7 @@
       </p:grpSpPr>
       <p:sp>
         <p:nvSpPr>
-          <p:cNvPr id="1017172115" name="Slide Image Placeholder 1"/>
+          <p:cNvPr id="98602016" name="Slide Image Placeholder 1"/>
           <p:cNvSpPr>
             <a:spLocks noChangeAspect="1" noGrp="1" noRot="1"/>
           </p:cNvSpPr>
@@ -3567,7 +3567,7 @@
       </p:sp>
       <p:sp>
         <p:nvSpPr>
-          <p:cNvPr id="1697789421" name="Notes Placeholder 2"/>
+          <p:cNvPr id="1912528284" name="Notes Placeholder 2"/>
           <p:cNvSpPr>
             <a:spLocks noGrp="1"/>
           </p:cNvSpPr>
@@ -3589,7 +3589,7 @@
       </p:sp>
       <p:sp>
         <p:nvSpPr>
-          <p:cNvPr id="1134348469" name="Slide Number Placeholder 3"/>
+          <p:cNvPr id="1479331460" name="Slide Number Placeholder 3"/>
           <p:cNvSpPr>
             <a:spLocks noGrp="1"/>
           </p:cNvSpPr>
@@ -3640,7 +3640,7 @@
       </p:grpSpPr>
       <p:sp>
         <p:nvSpPr>
-          <p:cNvPr id="1373312286" name="Slide Image Placeholder 1"/>
+          <p:cNvPr id="123868034" name="Slide Image Placeholder 1"/>
           <p:cNvSpPr>
             <a:spLocks noChangeAspect="1" noGrp="1" noRot="1"/>
           </p:cNvSpPr>
@@ -3652,7 +3652,7 @@
       </p:sp>
       <p:sp>
         <p:nvSpPr>
-          <p:cNvPr id="1756710523" name="Notes Placeholder 2"/>
+          <p:cNvPr id="1739115466" name="Notes Placeholder 2"/>
           <p:cNvSpPr>
             <a:spLocks noGrp="1"/>
           </p:cNvSpPr>
@@ -3674,7 +3674,7 @@
       </p:sp>
       <p:sp>
         <p:nvSpPr>
-          <p:cNvPr id="994799222" name="Slide Number Placeholder 3"/>
+          <p:cNvPr id="1324796588" name="Slide Number Placeholder 3"/>
           <p:cNvSpPr>
             <a:spLocks noGrp="1"/>
           </p:cNvSpPr>
@@ -3725,7 +3725,7 @@
       </p:grpSpPr>
       <p:sp>
         <p:nvSpPr>
-          <p:cNvPr id="155364637" name="Slide Image Placeholder 1"/>
+          <p:cNvPr id="1579866307" name="Slide Image Placeholder 1"/>
           <p:cNvSpPr>
             <a:spLocks noChangeAspect="1" noGrp="1" noRot="1"/>
           </p:cNvSpPr>
@@ -3737,7 +3737,7 @@
       </p:sp>
       <p:sp>
         <p:nvSpPr>
-          <p:cNvPr id="221768525" name="Notes Placeholder 2"/>
+          <p:cNvPr id="1347903847" name="Notes Placeholder 2"/>
           <p:cNvSpPr>
             <a:spLocks noGrp="1"/>
           </p:cNvSpPr>
@@ -3759,7 +3759,7 @@
       </p:sp>
       <p:sp>
         <p:nvSpPr>
-          <p:cNvPr id="420305147" name="Slide Number Placeholder 3"/>
+          <p:cNvPr id="1832316256" name="Slide Number Placeholder 3"/>
           <p:cNvSpPr>
             <a:spLocks noGrp="1"/>
           </p:cNvSpPr>
@@ -3810,7 +3810,7 @@
       </p:grpSpPr>
       <p:sp>
         <p:nvSpPr>
-          <p:cNvPr id="1846272795" name="Slide Image Placeholder 1"/>
+          <p:cNvPr id="880139818" name="Slide Image Placeholder 1"/>
           <p:cNvSpPr>
             <a:spLocks noChangeAspect="1" noGrp="1" noRot="1"/>
           </p:cNvSpPr>
@@ -3822,7 +3822,7 @@
       </p:sp>
       <p:sp>
         <p:nvSpPr>
-          <p:cNvPr id="1580718953" name="Notes Placeholder 2"/>
+          <p:cNvPr id="1804584657" name="Notes Placeholder 2"/>
           <p:cNvSpPr>
             <a:spLocks noGrp="1"/>
           </p:cNvSpPr>
@@ -3844,7 +3844,7 @@
       </p:sp>
       <p:sp>
         <p:nvSpPr>
-          <p:cNvPr id="1427315440" name="Slide Number Placeholder 3"/>
+          <p:cNvPr id="725758124" name="Slide Number Placeholder 3"/>
           <p:cNvSpPr>
             <a:spLocks noGrp="1"/>
           </p:cNvSpPr>
@@ -3895,7 +3895,7 @@
       </p:grpSpPr>
       <p:sp>
         <p:nvSpPr>
-          <p:cNvPr id="634706157" name="Slide Image Placeholder 1"/>
+          <p:cNvPr id="2135263591" name="Slide Image Placeholder 1"/>
           <p:cNvSpPr>
             <a:spLocks noChangeAspect="1" noGrp="1" noRot="1"/>
           </p:cNvSpPr>
@@ -3907,7 +3907,7 @@
       </p:sp>
       <p:sp>
         <p:nvSpPr>
-          <p:cNvPr id="18736556" name="Notes Placeholder 2"/>
+          <p:cNvPr id="1534749562" name="Notes Placeholder 2"/>
           <p:cNvSpPr>
             <a:spLocks noGrp="1"/>
           </p:cNvSpPr>
@@ -3929,7 +3929,7 @@
       </p:sp>
       <p:sp>
         <p:nvSpPr>
-          <p:cNvPr id="1241430845" name="Slide Number Placeholder 3"/>
+          <p:cNvPr id="456460880" name="Slide Number Placeholder 3"/>
           <p:cNvSpPr>
             <a:spLocks noGrp="1"/>
           </p:cNvSpPr>
@@ -3980,7 +3980,7 @@
       </p:grpSpPr>
       <p:sp>
         <p:nvSpPr>
-          <p:cNvPr id="1928673615" name="Slide Image Placeholder 1"/>
+          <p:cNvPr id="947354528" name="Slide Image Placeholder 1"/>
           <p:cNvSpPr>
             <a:spLocks noChangeAspect="1" noGrp="1" noRot="1"/>
           </p:cNvSpPr>
@@ -3992,7 +3992,7 @@
       </p:sp>
       <p:sp>
         <p:nvSpPr>
-          <p:cNvPr id="1646425718" name="Notes Placeholder 2"/>
+          <p:cNvPr id="761127963" name="Notes Placeholder 2"/>
           <p:cNvSpPr>
             <a:spLocks noGrp="1"/>
           </p:cNvSpPr>
@@ -4014,7 +4014,7 @@
       </p:sp>
       <p:sp>
         <p:nvSpPr>
-          <p:cNvPr id="1705209258" name="Slide Number Placeholder 3"/>
+          <p:cNvPr id="891800603" name="Slide Number Placeholder 3"/>
           <p:cNvSpPr>
             <a:spLocks noGrp="1"/>
           </p:cNvSpPr>
@@ -4065,7 +4065,7 @@
       </p:grpSpPr>
       <p:sp>
         <p:nvSpPr>
-          <p:cNvPr id="209018881" name="Slide Image Placeholder 1"/>
+          <p:cNvPr id="780254202" name="Slide Image Placeholder 1"/>
           <p:cNvSpPr>
             <a:spLocks noChangeAspect="1" noGrp="1" noRot="1"/>
           </p:cNvSpPr>
@@ -4077,7 +4077,7 @@
       </p:sp>
       <p:sp>
         <p:nvSpPr>
-          <p:cNvPr id="1253994951" name="Notes Placeholder 2"/>
+          <p:cNvPr id="1656889660" name="Notes Placeholder 2"/>
           <p:cNvSpPr>
             <a:spLocks noGrp="1"/>
           </p:cNvSpPr>
@@ -4099,7 +4099,7 @@
       </p:sp>
       <p:sp>
         <p:nvSpPr>
-          <p:cNvPr id="1988987115" name="Slide Number Placeholder 3"/>
+          <p:cNvPr id="1496904130" name="Slide Number Placeholder 3"/>
           <p:cNvSpPr>
             <a:spLocks noGrp="1"/>
           </p:cNvSpPr>
@@ -4150,7 +4150,7 @@
       </p:grpSpPr>
       <p:sp>
         <p:nvSpPr>
-          <p:cNvPr id="115060475" name="Slide Image Placeholder 1"/>
+          <p:cNvPr id="1517642627" name="Slide Image Placeholder 1"/>
           <p:cNvSpPr>
             <a:spLocks noChangeAspect="1" noGrp="1" noRot="1"/>
           </p:cNvSpPr>
@@ -4162,7 +4162,7 @@
       </p:sp>
       <p:sp>
         <p:nvSpPr>
-          <p:cNvPr id="105457941" name="Notes Placeholder 2"/>
+          <p:cNvPr id="511396513" name="Notes Placeholder 2"/>
           <p:cNvSpPr>
             <a:spLocks noGrp="1"/>
           </p:cNvSpPr>
@@ -4184,7 +4184,7 @@
       </p:sp>
       <p:sp>
         <p:nvSpPr>
-          <p:cNvPr id="1305674618" name="Slide Number Placeholder 3"/>
+          <p:cNvPr id="219031650" name="Slide Number Placeholder 3"/>
           <p:cNvSpPr>
             <a:spLocks noGrp="1"/>
           </p:cNvSpPr>
@@ -4235,7 +4235,7 @@
       </p:grpSpPr>
       <p:sp>
         <p:nvSpPr>
-          <p:cNvPr id="738806369" name="Slide Image Placeholder 1"/>
+          <p:cNvPr id="567939734" name="Slide Image Placeholder 1"/>
           <p:cNvSpPr>
             <a:spLocks noChangeAspect="1" noGrp="1" noRot="1"/>
           </p:cNvSpPr>
@@ -4247,7 +4247,7 @@
       </p:sp>
       <p:sp>
         <p:nvSpPr>
-          <p:cNvPr id="22469712" name="Notes Placeholder 2"/>
+          <p:cNvPr id="1957360403" name="Notes Placeholder 2"/>
           <p:cNvSpPr>
             <a:spLocks noGrp="1"/>
           </p:cNvSpPr>
@@ -4269,7 +4269,7 @@
       </p:sp>
       <p:sp>
         <p:nvSpPr>
-          <p:cNvPr id="766920768" name="Slide Number Placeholder 3"/>
+          <p:cNvPr id="1118774055" name="Slide Number Placeholder 3"/>
           <p:cNvSpPr>
             <a:spLocks noGrp="1"/>
           </p:cNvSpPr>
@@ -4320,7 +4320,7 @@
       </p:grpSpPr>
       <p:sp>
         <p:nvSpPr>
-          <p:cNvPr id="787329949" name="Slide Image Placeholder 1"/>
+          <p:cNvPr id="544146331" name="Slide Image Placeholder 1"/>
           <p:cNvSpPr>
             <a:spLocks noChangeAspect="1" noGrp="1" noRot="1"/>
           </p:cNvSpPr>
@@ -4332,7 +4332,7 @@
       </p:sp>
       <p:sp>
         <p:nvSpPr>
-          <p:cNvPr id="1398520278" name="Notes Placeholder 2"/>
+          <p:cNvPr id="496666805" name="Notes Placeholder 2"/>
           <p:cNvSpPr>
             <a:spLocks noGrp="1"/>
           </p:cNvSpPr>
@@ -4354,7 +4354,7 @@
       </p:sp>
       <p:sp>
         <p:nvSpPr>
-          <p:cNvPr id="691879154" name="Slide Number Placeholder 3"/>
+          <p:cNvPr id="624653920" name="Slide Number Placeholder 3"/>
           <p:cNvSpPr>
             <a:spLocks noGrp="1"/>
           </p:cNvSpPr>
@@ -4405,7 +4405,7 @@
       </p:grpSpPr>
       <p:sp>
         <p:nvSpPr>
-          <p:cNvPr id="869513576" name="Slide Image Placeholder 1"/>
+          <p:cNvPr id="316834477" name="Slide Image Placeholder 1"/>
           <p:cNvSpPr>
             <a:spLocks noChangeAspect="1" noGrp="1" noRot="1"/>
           </p:cNvSpPr>
@@ -4417,7 +4417,7 @@
       </p:sp>
       <p:sp>
         <p:nvSpPr>
-          <p:cNvPr id="1847350493" name="Notes Placeholder 2"/>
+          <p:cNvPr id="1109965242" name="Notes Placeholder 2"/>
           <p:cNvSpPr>
             <a:spLocks noGrp="1"/>
           </p:cNvSpPr>
@@ -4439,7 +4439,7 @@
       </p:sp>
       <p:sp>
         <p:nvSpPr>
-          <p:cNvPr id="707473760" name="Slide Number Placeholder 3"/>
+          <p:cNvPr id="276781704" name="Slide Number Placeholder 3"/>
           <p:cNvSpPr>
             <a:spLocks noGrp="1"/>
           </p:cNvSpPr>
@@ -4490,7 +4490,7 @@
       </p:grpSpPr>
       <p:sp>
         <p:nvSpPr>
-          <p:cNvPr id="903459478" name="Slide Image Placeholder 1"/>
+          <p:cNvPr id="1355795523" name="Slide Image Placeholder 1"/>
           <p:cNvSpPr>
             <a:spLocks noChangeAspect="1" noGrp="1" noRot="1"/>
           </p:cNvSpPr>
@@ -4502,7 +4502,7 @@
       </p:sp>
       <p:sp>
         <p:nvSpPr>
-          <p:cNvPr id="1883719658" name="Notes Placeholder 2"/>
+          <p:cNvPr id="625480591" name="Notes Placeholder 2"/>
           <p:cNvSpPr>
             <a:spLocks noGrp="1"/>
           </p:cNvSpPr>
@@ -4524,7 +4524,7 @@
       </p:sp>
       <p:sp>
         <p:nvSpPr>
-          <p:cNvPr id="135898575" name="Slide Number Placeholder 3"/>
+          <p:cNvPr id="1948794253" name="Slide Number Placeholder 3"/>
           <p:cNvSpPr>
             <a:spLocks noGrp="1"/>
           </p:cNvSpPr>
@@ -4575,7 +4575,7 @@
       </p:grpSpPr>
       <p:sp>
         <p:nvSpPr>
-          <p:cNvPr id="972912451" name="Slide Image Placeholder 1"/>
+          <p:cNvPr id="1229622150" name="Slide Image Placeholder 1"/>
           <p:cNvSpPr>
             <a:spLocks noChangeAspect="1" noGrp="1" noRot="1"/>
           </p:cNvSpPr>
@@ -4587,7 +4587,7 @@
       </p:sp>
       <p:sp>
         <p:nvSpPr>
-          <p:cNvPr id="211893156" name="Notes Placeholder 2"/>
+          <p:cNvPr id="740247287" name="Notes Placeholder 2"/>
           <p:cNvSpPr>
             <a:spLocks noGrp="1"/>
           </p:cNvSpPr>
@@ -4609,7 +4609,7 @@
       </p:sp>
       <p:sp>
         <p:nvSpPr>
-          <p:cNvPr id="400242818" name="Slide Number Placeholder 3"/>
+          <p:cNvPr id="278391773" name="Slide Number Placeholder 3"/>
           <p:cNvSpPr>
             <a:spLocks noGrp="1"/>
           </p:cNvSpPr>
@@ -4660,7 +4660,7 @@
       </p:grpSpPr>
       <p:sp>
         <p:nvSpPr>
-          <p:cNvPr id="653551388" name="Slide Image Placeholder 1"/>
+          <p:cNvPr id="1115422049" name="Slide Image Placeholder 1"/>
           <p:cNvSpPr>
             <a:spLocks noChangeAspect="1" noGrp="1" noRot="1"/>
           </p:cNvSpPr>
@@ -4672,7 +4672,7 @@
       </p:sp>
       <p:sp>
         <p:nvSpPr>
-          <p:cNvPr id="911402525" name="Notes Placeholder 2"/>
+          <p:cNvPr id="356464489" name="Notes Placeholder 2"/>
           <p:cNvSpPr>
             <a:spLocks noGrp="1"/>
           </p:cNvSpPr>
@@ -4694,7 +4694,7 @@
       </p:sp>
       <p:sp>
         <p:nvSpPr>
-          <p:cNvPr id="947814466" name="Slide Number Placeholder 3"/>
+          <p:cNvPr id="1246232195" name="Slide Number Placeholder 3"/>
           <p:cNvSpPr>
             <a:spLocks noGrp="1"/>
           </p:cNvSpPr>
@@ -4745,7 +4745,7 @@
       </p:grpSpPr>
       <p:sp>
         <p:nvSpPr>
-          <p:cNvPr id="2057863711" name="Slide Image Placeholder 1"/>
+          <p:cNvPr id="1784479592" name="Slide Image Placeholder 1"/>
           <p:cNvSpPr>
             <a:spLocks noChangeAspect="1" noGrp="1" noRot="1"/>
           </p:cNvSpPr>
@@ -4757,7 +4757,7 @@
       </p:sp>
       <p:sp>
         <p:nvSpPr>
-          <p:cNvPr id="835521266" name="Notes Placeholder 2"/>
+          <p:cNvPr id="783295339" name="Notes Placeholder 2"/>
           <p:cNvSpPr>
             <a:spLocks noGrp="1"/>
           </p:cNvSpPr>
@@ -4779,7 +4779,7 @@
       </p:sp>
       <p:sp>
         <p:nvSpPr>
-          <p:cNvPr id="1715420413" name="Slide Number Placeholder 3"/>
+          <p:cNvPr id="1084225759" name="Slide Number Placeholder 3"/>
           <p:cNvSpPr>
             <a:spLocks noGrp="1"/>
           </p:cNvSpPr>
@@ -4830,7 +4830,7 @@
       </p:grpSpPr>
       <p:sp>
         <p:nvSpPr>
-          <p:cNvPr id="2049882397" name="Slide Image Placeholder 1"/>
+          <p:cNvPr id="1721766811" name="Slide Image Placeholder 1"/>
           <p:cNvSpPr>
             <a:spLocks noChangeAspect="1" noGrp="1" noRot="1"/>
           </p:cNvSpPr>
@@ -4842,7 +4842,7 @@
       </p:sp>
       <p:sp>
         <p:nvSpPr>
-          <p:cNvPr id="1561570577" name="Notes Placeholder 2"/>
+          <p:cNvPr id="1815805737" name="Notes Placeholder 2"/>
           <p:cNvSpPr>
             <a:spLocks noGrp="1"/>
           </p:cNvSpPr>
@@ -4864,7 +4864,7 @@
       </p:sp>
       <p:sp>
         <p:nvSpPr>
-          <p:cNvPr id="636089373" name="Slide Number Placeholder 3"/>
+          <p:cNvPr id="235529095" name="Slide Number Placeholder 3"/>
           <p:cNvSpPr>
             <a:spLocks noGrp="1"/>
           </p:cNvSpPr>
@@ -4915,7 +4915,7 @@
       </p:grpSpPr>
       <p:sp>
         <p:nvSpPr>
-          <p:cNvPr id="166703837" name="Slide Image Placeholder 1"/>
+          <p:cNvPr id="2055448411" name="Slide Image Placeholder 1"/>
           <p:cNvSpPr>
             <a:spLocks noChangeAspect="1" noGrp="1" noRot="1"/>
           </p:cNvSpPr>
@@ -4927,7 +4927,7 @@
       </p:sp>
       <p:sp>
         <p:nvSpPr>
-          <p:cNvPr id="1612897421" name="Notes Placeholder 2"/>
+          <p:cNvPr id="1239057448" name="Notes Placeholder 2"/>
           <p:cNvSpPr>
             <a:spLocks noGrp="1"/>
           </p:cNvSpPr>
@@ -4949,7 +4949,7 @@
       </p:sp>
       <p:sp>
         <p:nvSpPr>
-          <p:cNvPr id="1923760457" name="Slide Number Placeholder 3"/>
+          <p:cNvPr id="204967566" name="Slide Number Placeholder 3"/>
           <p:cNvSpPr>
             <a:spLocks noGrp="1"/>
           </p:cNvSpPr>
@@ -5000,7 +5000,7 @@
       </p:grpSpPr>
       <p:sp>
         <p:nvSpPr>
-          <p:cNvPr id="1383185969" name="Slide Image Placeholder 1"/>
+          <p:cNvPr id="1769902783" name="Slide Image Placeholder 1"/>
           <p:cNvSpPr>
             <a:spLocks noChangeAspect="1" noGrp="1" noRot="1"/>
           </p:cNvSpPr>
@@ -5012,7 +5012,7 @@
       </p:sp>
       <p:sp>
         <p:nvSpPr>
-          <p:cNvPr id="1718339995" name="Notes Placeholder 2"/>
+          <p:cNvPr id="29311879" name="Notes Placeholder 2"/>
           <p:cNvSpPr>
             <a:spLocks noGrp="1"/>
           </p:cNvSpPr>
@@ -5034,7 +5034,7 @@
       </p:sp>
       <p:sp>
         <p:nvSpPr>
-          <p:cNvPr id="1840025761" name="Slide Number Placeholder 3"/>
+          <p:cNvPr id="949617625" name="Slide Number Placeholder 3"/>
           <p:cNvSpPr>
             <a:spLocks noGrp="1"/>
           </p:cNvSpPr>
@@ -5085,7 +5085,7 @@
       </p:grpSpPr>
       <p:sp>
         <p:nvSpPr>
-          <p:cNvPr id="295197427" name="Slide Image Placeholder 1"/>
+          <p:cNvPr id="2030908105" name="Slide Image Placeholder 1"/>
           <p:cNvSpPr>
             <a:spLocks noChangeAspect="1" noGrp="1" noRot="1"/>
           </p:cNvSpPr>
@@ -5097,7 +5097,7 @@
       </p:sp>
       <p:sp>
         <p:nvSpPr>
-          <p:cNvPr id="402111067" name="Notes Placeholder 2"/>
+          <p:cNvPr id="107099537" name="Notes Placeholder 2"/>
           <p:cNvSpPr>
             <a:spLocks noGrp="1"/>
           </p:cNvSpPr>
@@ -5119,7 +5119,7 @@
       </p:sp>
       <p:sp>
         <p:nvSpPr>
-          <p:cNvPr id="2006806995" name="Slide Number Placeholder 3"/>
+          <p:cNvPr id="880910517" name="Slide Number Placeholder 3"/>
           <p:cNvSpPr>
             <a:spLocks noGrp="1"/>
           </p:cNvSpPr>
@@ -5170,7 +5170,7 @@
       </p:grpSpPr>
       <p:sp>
         <p:nvSpPr>
-          <p:cNvPr id="1234659472" name="Slide Image Placeholder 1"/>
+          <p:cNvPr id="1929281538" name="Slide Image Placeholder 1"/>
           <p:cNvSpPr>
             <a:spLocks noChangeAspect="1" noGrp="1" noRot="1"/>
           </p:cNvSpPr>
@@ -5182,7 +5182,7 @@
       </p:sp>
       <p:sp>
         <p:nvSpPr>
-          <p:cNvPr id="1767724579" name="Notes Placeholder 2"/>
+          <p:cNvPr id="829870333" name="Notes Placeholder 2"/>
           <p:cNvSpPr>
             <a:spLocks noGrp="1"/>
           </p:cNvSpPr>
@@ -5204,7 +5204,7 @@
       </p:sp>
       <p:sp>
         <p:nvSpPr>
-          <p:cNvPr id="1621695818" name="Slide Number Placeholder 3"/>
+          <p:cNvPr id="1627807772" name="Slide Number Placeholder 3"/>
           <p:cNvSpPr>
             <a:spLocks noGrp="1"/>
           </p:cNvSpPr>
@@ -5255,7 +5255,7 @@
       </p:grpSpPr>
       <p:sp>
         <p:nvSpPr>
-          <p:cNvPr id="2010749086" name="Slide Image Placeholder 1"/>
+          <p:cNvPr id="1127538199" name="Slide Image Placeholder 1"/>
           <p:cNvSpPr>
             <a:spLocks noChangeAspect="1" noGrp="1" noRot="1"/>
           </p:cNvSpPr>
@@ -5267,7 +5267,7 @@
       </p:sp>
       <p:sp>
         <p:nvSpPr>
-          <p:cNvPr id="1724562393" name="Notes Placeholder 2"/>
+          <p:cNvPr id="192852020" name="Notes Placeholder 2"/>
           <p:cNvSpPr>
             <a:spLocks noGrp="1"/>
           </p:cNvSpPr>
@@ -5289,7 +5289,7 @@
       </p:sp>
       <p:sp>
         <p:nvSpPr>
-          <p:cNvPr id="2098451822" name="Slide Number Placeholder 3"/>
+          <p:cNvPr id="243591323" name="Slide Number Placeholder 3"/>
           <p:cNvSpPr>
             <a:spLocks noGrp="1"/>
           </p:cNvSpPr>
@@ -5340,7 +5340,7 @@
       </p:grpSpPr>
       <p:sp>
         <p:nvSpPr>
-          <p:cNvPr id="1163656337" name="Slide Image Placeholder 1"/>
+          <p:cNvPr id="1356324387" name="Slide Image Placeholder 1"/>
           <p:cNvSpPr>
             <a:spLocks noChangeAspect="1" noGrp="1" noRot="1"/>
           </p:cNvSpPr>
@@ -5352,7 +5352,7 @@
       </p:sp>
       <p:sp>
         <p:nvSpPr>
-          <p:cNvPr id="1389437045" name="Notes Placeholder 2"/>
+          <p:cNvPr id="399627715" name="Notes Placeholder 2"/>
           <p:cNvSpPr>
             <a:spLocks noGrp="1"/>
           </p:cNvSpPr>
@@ -5374,7 +5374,7 @@
       </p:sp>
       <p:sp>
         <p:nvSpPr>
-          <p:cNvPr id="319788863" name="Slide Number Placeholder 3"/>
+          <p:cNvPr id="684634988" name="Slide Number Placeholder 3"/>
           <p:cNvSpPr>
             <a:spLocks noGrp="1"/>
           </p:cNvSpPr>
@@ -5425,7 +5425,7 @@
       </p:grpSpPr>
       <p:sp>
         <p:nvSpPr>
-          <p:cNvPr id="1399292291" name="Slide Image Placeholder 1"/>
+          <p:cNvPr id="1464677275" name="Slide Image Placeholder 1"/>
           <p:cNvSpPr>
             <a:spLocks noChangeAspect="1" noGrp="1" noRot="1"/>
           </p:cNvSpPr>
@@ -5437,7 +5437,7 @@
       </p:sp>
       <p:sp>
         <p:nvSpPr>
-          <p:cNvPr id="1594769741" name="Notes Placeholder 2"/>
+          <p:cNvPr id="1300619260" name="Notes Placeholder 2"/>
           <p:cNvSpPr>
             <a:spLocks noGrp="1"/>
           </p:cNvSpPr>
@@ -5459,7 +5459,7 @@
       </p:sp>
       <p:sp>
         <p:nvSpPr>
-          <p:cNvPr id="782238005" name="Slide Number Placeholder 3"/>
+          <p:cNvPr id="1633749029" name="Slide Number Placeholder 3"/>
           <p:cNvSpPr>
             <a:spLocks noGrp="1"/>
           </p:cNvSpPr>
@@ -5510,7 +5510,7 @@
       </p:grpSpPr>
       <p:sp>
         <p:nvSpPr>
-          <p:cNvPr id="791984102" name="Slide Image Placeholder 1"/>
+          <p:cNvPr id="517537935" name="Slide Image Placeholder 1"/>
           <p:cNvSpPr>
             <a:spLocks noChangeAspect="1" noGrp="1" noRot="1"/>
           </p:cNvSpPr>
@@ -5522,7 +5522,7 @@
       </p:sp>
       <p:sp>
         <p:nvSpPr>
-          <p:cNvPr id="543714663" name="Notes Placeholder 2"/>
+          <p:cNvPr id="1943896651" name="Notes Placeholder 2"/>
           <p:cNvSpPr>
             <a:spLocks noGrp="1"/>
           </p:cNvSpPr>
@@ -5544,7 +5544,7 @@
       </p:sp>
       <p:sp>
         <p:nvSpPr>
-          <p:cNvPr id="1690070782" name="Slide Number Placeholder 3"/>
+          <p:cNvPr id="1617124105" name="Slide Number Placeholder 3"/>
           <p:cNvSpPr>
             <a:spLocks noGrp="1"/>
           </p:cNvSpPr>
@@ -5595,7 +5595,7 @@
       </p:grpSpPr>
       <p:sp>
         <p:nvSpPr>
-          <p:cNvPr id="1428055321" name="Slide Image Placeholder 1"/>
+          <p:cNvPr id="1677597955" name="Slide Image Placeholder 1"/>
           <p:cNvSpPr>
             <a:spLocks noChangeAspect="1" noGrp="1" noRot="1"/>
           </p:cNvSpPr>
@@ -5607,7 +5607,7 @@
       </p:sp>
       <p:sp>
         <p:nvSpPr>
-          <p:cNvPr id="57790617" name="Notes Placeholder 2"/>
+          <p:cNvPr id="1905233829" name="Notes Placeholder 2"/>
           <p:cNvSpPr>
             <a:spLocks noGrp="1"/>
           </p:cNvSpPr>
@@ -5629,7 +5629,7 @@
       </p:sp>
       <p:sp>
         <p:nvSpPr>
-          <p:cNvPr id="2071197558" name="Slide Number Placeholder 3"/>
+          <p:cNvPr id="1716180609" name="Slide Number Placeholder 3"/>
           <p:cNvSpPr>
             <a:spLocks noGrp="1"/>
           </p:cNvSpPr>
@@ -5680,7 +5680,7 @@
       </p:grpSpPr>
       <p:sp>
         <p:nvSpPr>
-          <p:cNvPr id="1441588424" name="Slide Image Placeholder 1"/>
+          <p:cNvPr id="1963552713" name="Slide Image Placeholder 1"/>
           <p:cNvSpPr>
             <a:spLocks noChangeAspect="1" noGrp="1" noRot="1"/>
           </p:cNvSpPr>
@@ -5692,7 +5692,7 @@
       </p:sp>
       <p:sp>
         <p:nvSpPr>
-          <p:cNvPr id="942630322" name="Notes Placeholder 2"/>
+          <p:cNvPr id="1780203352" name="Notes Placeholder 2"/>
           <p:cNvSpPr>
             <a:spLocks noGrp="1"/>
           </p:cNvSpPr>
@@ -5714,7 +5714,7 @@
       </p:sp>
       <p:sp>
         <p:nvSpPr>
-          <p:cNvPr id="648178851" name="Slide Number Placeholder 3"/>
+          <p:cNvPr id="1224509775" name="Slide Number Placeholder 3"/>
           <p:cNvSpPr>
             <a:spLocks noGrp="1"/>
           </p:cNvSpPr>
@@ -5765,7 +5765,7 @@
       </p:grpSpPr>
       <p:sp>
         <p:nvSpPr>
-          <p:cNvPr id="466821392" name="Slide Image Placeholder 1"/>
+          <p:cNvPr id="1487780361" name="Slide Image Placeholder 1"/>
           <p:cNvSpPr>
             <a:spLocks noChangeAspect="1" noGrp="1" noRot="1"/>
           </p:cNvSpPr>
@@ -5777,7 +5777,7 @@
       </p:sp>
       <p:sp>
         <p:nvSpPr>
-          <p:cNvPr id="2127228070" name="Notes Placeholder 2"/>
+          <p:cNvPr id="1079466640" name="Notes Placeholder 2"/>
           <p:cNvSpPr>
             <a:spLocks noGrp="1"/>
           </p:cNvSpPr>
@@ -5799,7 +5799,7 @@
       </p:sp>
       <p:sp>
         <p:nvSpPr>
-          <p:cNvPr id="1922027118" name="Slide Number Placeholder 3"/>
+          <p:cNvPr id="408675091" name="Slide Number Placeholder 3"/>
           <p:cNvSpPr>
             <a:spLocks noGrp="1"/>
           </p:cNvSpPr>
@@ -5850,7 +5850,7 @@
       </p:grpSpPr>
       <p:sp>
         <p:nvSpPr>
-          <p:cNvPr id="2000730853" name="Slide Image Placeholder 1"/>
+          <p:cNvPr id="2111027749" name="Slide Image Placeholder 1"/>
           <p:cNvSpPr>
             <a:spLocks noChangeAspect="1" noGrp="1" noRot="1"/>
           </p:cNvSpPr>
@@ -5862,7 +5862,7 @@
       </p:sp>
       <p:sp>
         <p:nvSpPr>
-          <p:cNvPr id="90004024" name="Notes Placeholder 2"/>
+          <p:cNvPr id="1971464053" name="Notes Placeholder 2"/>
           <p:cNvSpPr>
             <a:spLocks noGrp="1"/>
           </p:cNvSpPr>
@@ -5884,7 +5884,7 @@
       </p:sp>
       <p:sp>
         <p:nvSpPr>
-          <p:cNvPr id="1788558417" name="Slide Number Placeholder 3"/>
+          <p:cNvPr id="2004494988" name="Slide Number Placeholder 3"/>
           <p:cNvSpPr>
             <a:spLocks noGrp="1"/>
           </p:cNvSpPr>
@@ -5935,7 +5935,7 @@
       </p:grpSpPr>
       <p:sp>
         <p:nvSpPr>
-          <p:cNvPr id="176404687" name="Slide Image Placeholder 1"/>
+          <p:cNvPr id="211658885" name="Slide Image Placeholder 1"/>
           <p:cNvSpPr>
             <a:spLocks noChangeAspect="1" noGrp="1" noRot="1"/>
           </p:cNvSpPr>
@@ -5947,7 +5947,7 @@
       </p:sp>
       <p:sp>
         <p:nvSpPr>
-          <p:cNvPr id="324828684" name="Notes Placeholder 2"/>
+          <p:cNvPr id="176358956" name="Notes Placeholder 2"/>
           <p:cNvSpPr>
             <a:spLocks noGrp="1"/>
           </p:cNvSpPr>
@@ -5969,7 +5969,7 @@
       </p:sp>
       <p:sp>
         <p:nvSpPr>
-          <p:cNvPr id="821559628" name="Slide Number Placeholder 3"/>
+          <p:cNvPr id="1982408783" name="Slide Number Placeholder 3"/>
           <p:cNvSpPr>
             <a:spLocks noGrp="1"/>
           </p:cNvSpPr>
@@ -6020,7 +6020,7 @@
       </p:grpSpPr>
       <p:sp>
         <p:nvSpPr>
-          <p:cNvPr id="1637721638" name="Slide Image Placeholder 1"/>
+          <p:cNvPr id="1908288620" name="Slide Image Placeholder 1"/>
           <p:cNvSpPr>
             <a:spLocks noChangeAspect="1" noGrp="1" noRot="1"/>
           </p:cNvSpPr>
@@ -6032,7 +6032,7 @@
       </p:sp>
       <p:sp>
         <p:nvSpPr>
-          <p:cNvPr id="1689041822" name="Notes Placeholder 2"/>
+          <p:cNvPr id="1440153816" name="Notes Placeholder 2"/>
           <p:cNvSpPr>
             <a:spLocks noGrp="1"/>
           </p:cNvSpPr>
@@ -6054,7 +6054,7 @@
       </p:sp>
       <p:sp>
         <p:nvSpPr>
-          <p:cNvPr id="1986191863" name="Slide Number Placeholder 3"/>
+          <p:cNvPr id="1682555441" name="Slide Number Placeholder 3"/>
           <p:cNvSpPr>
             <a:spLocks noGrp="1"/>
           </p:cNvSpPr>
@@ -6105,7 +6105,7 @@
       </p:grpSpPr>
       <p:sp>
         <p:nvSpPr>
-          <p:cNvPr id="528892743" name="Slide Image Placeholder 1"/>
+          <p:cNvPr id="127797474" name="Slide Image Placeholder 1"/>
           <p:cNvSpPr>
             <a:spLocks noChangeAspect="1" noGrp="1" noRot="1"/>
           </p:cNvSpPr>
@@ -6117,7 +6117,7 @@
       </p:sp>
       <p:sp>
         <p:nvSpPr>
-          <p:cNvPr id="189797828" name="Notes Placeholder 2"/>
+          <p:cNvPr id="1920859199" name="Notes Placeholder 2"/>
           <p:cNvSpPr>
             <a:spLocks noGrp="1"/>
           </p:cNvSpPr>
@@ -6139,7 +6139,7 @@
       </p:sp>
       <p:sp>
         <p:nvSpPr>
-          <p:cNvPr id="2098529183" name="Slide Number Placeholder 3"/>
+          <p:cNvPr id="1218487582" name="Slide Number Placeholder 3"/>
           <p:cNvSpPr>
             <a:spLocks noGrp="1"/>
           </p:cNvSpPr>
@@ -6190,7 +6190,7 @@
       </p:grpSpPr>
       <p:sp>
         <p:nvSpPr>
-          <p:cNvPr id="443291620" name="Slide Image Placeholder 1"/>
+          <p:cNvPr id="1225259919" name="Slide Image Placeholder 1"/>
           <p:cNvSpPr>
             <a:spLocks noChangeAspect="1" noGrp="1" noRot="1"/>
           </p:cNvSpPr>
@@ -6202,7 +6202,7 @@
       </p:sp>
       <p:sp>
         <p:nvSpPr>
-          <p:cNvPr id="1191270941" name="Notes Placeholder 2"/>
+          <p:cNvPr id="595947963" name="Notes Placeholder 2"/>
           <p:cNvSpPr>
             <a:spLocks noGrp="1"/>
           </p:cNvSpPr>
@@ -6224,7 +6224,7 @@
       </p:sp>
       <p:sp>
         <p:nvSpPr>
-          <p:cNvPr id="1375945288" name="Slide Number Placeholder 3"/>
+          <p:cNvPr id="780479728" name="Slide Number Placeholder 3"/>
           <p:cNvSpPr>
             <a:spLocks noGrp="1"/>
           </p:cNvSpPr>
@@ -6275,7 +6275,7 @@
       </p:grpSpPr>
       <p:sp>
         <p:nvSpPr>
-          <p:cNvPr id="1957898028" name="Slide Image Placeholder 1"/>
+          <p:cNvPr id="1497072513" name="Slide Image Placeholder 1"/>
           <p:cNvSpPr>
             <a:spLocks noChangeAspect="1" noGrp="1" noRot="1"/>
           </p:cNvSpPr>
@@ -6287,7 +6287,7 @@
       </p:sp>
       <p:sp>
         <p:nvSpPr>
-          <p:cNvPr id="1939398368" name="Notes Placeholder 2"/>
+          <p:cNvPr id="1196868332" name="Notes Placeholder 2"/>
           <p:cNvSpPr>
             <a:spLocks noGrp="1"/>
           </p:cNvSpPr>
@@ -6309,7 +6309,7 @@
       </p:sp>
       <p:sp>
         <p:nvSpPr>
-          <p:cNvPr id="389423855" name="Slide Number Placeholder 3"/>
+          <p:cNvPr id="489356318" name="Slide Number Placeholder 3"/>
           <p:cNvSpPr>
             <a:spLocks noGrp="1"/>
           </p:cNvSpPr>
@@ -6360,7 +6360,7 @@
       </p:grpSpPr>
       <p:sp>
         <p:nvSpPr>
-          <p:cNvPr id="1696347545" name="Slide Image Placeholder 1"/>
+          <p:cNvPr id="2042594588" name="Slide Image Placeholder 1"/>
           <p:cNvSpPr>
             <a:spLocks noChangeAspect="1" noGrp="1" noRot="1"/>
           </p:cNvSpPr>
@@ -6372,7 +6372,7 @@
       </p:sp>
       <p:sp>
         <p:nvSpPr>
-          <p:cNvPr id="137310814" name="Notes Placeholder 2"/>
+          <p:cNvPr id="763954667" name="Notes Placeholder 2"/>
           <p:cNvSpPr>
             <a:spLocks noGrp="1"/>
           </p:cNvSpPr>
@@ -6394,7 +6394,7 @@
       </p:sp>
       <p:sp>
         <p:nvSpPr>
-          <p:cNvPr id="323682657" name="Slide Number Placeholder 3"/>
+          <p:cNvPr id="584211226" name="Slide Number Placeholder 3"/>
           <p:cNvSpPr>
             <a:spLocks noGrp="1"/>
           </p:cNvSpPr>
@@ -6445,7 +6445,7 @@
       </p:grpSpPr>
       <p:sp>
         <p:nvSpPr>
-          <p:cNvPr id="543016521" name="Slide Image Placeholder 1"/>
+          <p:cNvPr id="1202613138" name="Slide Image Placeholder 1"/>
           <p:cNvSpPr>
             <a:spLocks noChangeAspect="1" noGrp="1" noRot="1"/>
           </p:cNvSpPr>
@@ -6457,7 +6457,7 @@
       </p:sp>
       <p:sp>
         <p:nvSpPr>
-          <p:cNvPr id="688589681" name="Notes Placeholder 2"/>
+          <p:cNvPr id="873603887" name="Notes Placeholder 2"/>
           <p:cNvSpPr>
             <a:spLocks noGrp="1"/>
           </p:cNvSpPr>
@@ -6479,7 +6479,7 @@
       </p:sp>
       <p:sp>
         <p:nvSpPr>
-          <p:cNvPr id="211523628" name="Slide Number Placeholder 3"/>
+          <p:cNvPr id="1625884384" name="Slide Number Placeholder 3"/>
           <p:cNvSpPr>
             <a:spLocks noGrp="1"/>
           </p:cNvSpPr>
@@ -6530,7 +6530,7 @@
       </p:grpSpPr>
       <p:sp>
         <p:nvSpPr>
-          <p:cNvPr id="1946269559" name="Title 1"/>
+          <p:cNvPr id="1434012231" name="Title 1"/>
           <p:cNvSpPr>
             <a:spLocks noGrp="1"/>
           </p:cNvSpPr>
@@ -6565,7 +6565,7 @@
       </p:sp>
       <p:sp>
         <p:nvSpPr>
-          <p:cNvPr id="1345391900" name="Subtitle 2"/>
+          <p:cNvPr id="151914569" name="Subtitle 2"/>
           <p:cNvSpPr>
             <a:spLocks noGrp="1"/>
           </p:cNvSpPr>
@@ -6633,7 +6633,7 @@
       </p:sp>
       <p:sp>
         <p:nvSpPr>
-          <p:cNvPr id="1925625471" name="Date Placeholder 3"/>
+          <p:cNvPr id="507495707" name="Date Placeholder 3"/>
           <p:cNvSpPr>
             <a:spLocks noGrp="1"/>
           </p:cNvSpPr>
@@ -6659,7 +6659,7 @@
       </p:sp>
       <p:sp>
         <p:nvSpPr>
-          <p:cNvPr id="197237680" name="Footer Placeholder 4"/>
+          <p:cNvPr id="159064080" name="Footer Placeholder 4"/>
           <p:cNvSpPr>
             <a:spLocks noGrp="1"/>
           </p:cNvSpPr>
@@ -6681,7 +6681,7 @@
       </p:sp>
       <p:sp>
         <p:nvSpPr>
-          <p:cNvPr id="1398782636" name="Slide Number Placeholder 5"/>
+          <p:cNvPr id="448745178" name="Slide Number Placeholder 5"/>
           <p:cNvSpPr>
             <a:spLocks noGrp="1"/>
           </p:cNvSpPr>
@@ -6732,7 +6732,7 @@
       </p:grpSpPr>
       <p:sp>
         <p:nvSpPr>
-          <p:cNvPr id="1925272527" name="Title 1"/>
+          <p:cNvPr id="1936036465" name="Title 1"/>
           <p:cNvSpPr>
             <a:spLocks noGrp="1"/>
           </p:cNvSpPr>
@@ -6758,7 +6758,7 @@
       </p:sp>
       <p:sp>
         <p:nvSpPr>
-          <p:cNvPr id="19598402" name="Vertical Text Placeholder 2"/>
+          <p:cNvPr id="1608545615" name="Vertical Text Placeholder 2"/>
           <p:cNvSpPr>
             <a:spLocks noGrp="1"/>
           </p:cNvSpPr>
@@ -6824,7 +6824,7 @@
       </p:sp>
       <p:sp>
         <p:nvSpPr>
-          <p:cNvPr id="709500127" name="Date Placeholder 3"/>
+          <p:cNvPr id="551568304" name="Date Placeholder 3"/>
           <p:cNvSpPr>
             <a:spLocks noGrp="1"/>
           </p:cNvSpPr>
@@ -6850,7 +6850,7 @@
       </p:sp>
       <p:sp>
         <p:nvSpPr>
-          <p:cNvPr id="1552010465" name="Footer Placeholder 4"/>
+          <p:cNvPr id="1212848884" name="Footer Placeholder 4"/>
           <p:cNvSpPr>
             <a:spLocks noGrp="1"/>
           </p:cNvSpPr>
@@ -6872,7 +6872,7 @@
       </p:sp>
       <p:sp>
         <p:nvSpPr>
-          <p:cNvPr id="99613470" name="Slide Number Placeholder 5"/>
+          <p:cNvPr id="1671848474" name="Slide Number Placeholder 5"/>
           <p:cNvSpPr>
             <a:spLocks noGrp="1"/>
           </p:cNvSpPr>
@@ -6923,7 +6923,7 @@
       </p:grpSpPr>
       <p:sp>
         <p:nvSpPr>
-          <p:cNvPr id="2144520779" name="Vertical Title 1"/>
+          <p:cNvPr id="1554682609" name="Vertical Title 1"/>
           <p:cNvSpPr>
             <a:spLocks noGrp="1"/>
           </p:cNvSpPr>
@@ -6954,7 +6954,7 @@
       </p:sp>
       <p:sp>
         <p:nvSpPr>
-          <p:cNvPr id="963812117" name="Vertical Text Placeholder 2"/>
+          <p:cNvPr id="1612358660" name="Vertical Text Placeholder 2"/>
           <p:cNvSpPr>
             <a:spLocks noGrp="1"/>
           </p:cNvSpPr>
@@ -7025,7 +7025,7 @@
       </p:sp>
       <p:sp>
         <p:nvSpPr>
-          <p:cNvPr id="731510100" name="Date Placeholder 3"/>
+          <p:cNvPr id="1822129254" name="Date Placeholder 3"/>
           <p:cNvSpPr>
             <a:spLocks noGrp="1"/>
           </p:cNvSpPr>
@@ -7051,7 +7051,7 @@
       </p:sp>
       <p:sp>
         <p:nvSpPr>
-          <p:cNvPr id="1389974664" name="Footer Placeholder 4"/>
+          <p:cNvPr id="670170280" name="Footer Placeholder 4"/>
           <p:cNvSpPr>
             <a:spLocks noGrp="1"/>
           </p:cNvSpPr>
@@ -7073,7 +7073,7 @@
       </p:sp>
       <p:sp>
         <p:nvSpPr>
-          <p:cNvPr id="257813248" name="Slide Number Placeholder 5"/>
+          <p:cNvPr id="991499975" name="Slide Number Placeholder 5"/>
           <p:cNvSpPr>
             <a:spLocks noGrp="1"/>
           </p:cNvSpPr>
@@ -7124,7 +7124,7 @@
       </p:grpSpPr>
       <p:sp>
         <p:nvSpPr>
-          <p:cNvPr id="356093975" name="Title 1"/>
+          <p:cNvPr id="1208025237" name="Title 1"/>
           <p:cNvSpPr>
             <a:spLocks noGrp="1"/>
           </p:cNvSpPr>
@@ -7150,7 +7150,7 @@
       </p:sp>
       <p:sp>
         <p:nvSpPr>
-          <p:cNvPr id="1358857362" name="Content Placeholder 2"/>
+          <p:cNvPr id="775452756" name="Content Placeholder 2"/>
           <p:cNvSpPr>
             <a:spLocks noGrp="1"/>
           </p:cNvSpPr>
@@ -7216,7 +7216,7 @@
       </p:sp>
       <p:sp>
         <p:nvSpPr>
-          <p:cNvPr id="1930735990" name="Date Placeholder 3"/>
+          <p:cNvPr id="2072524030" name="Date Placeholder 3"/>
           <p:cNvSpPr>
             <a:spLocks noGrp="1"/>
           </p:cNvSpPr>
@@ -7242,7 +7242,7 @@
       </p:sp>
       <p:sp>
         <p:nvSpPr>
-          <p:cNvPr id="263261186" name="Footer Placeholder 4"/>
+          <p:cNvPr id="529252071" name="Footer Placeholder 4"/>
           <p:cNvSpPr>
             <a:spLocks noGrp="1"/>
           </p:cNvSpPr>
@@ -7264,7 +7264,7 @@
       </p:sp>
       <p:sp>
         <p:nvSpPr>
-          <p:cNvPr id="1908858691" name="Slide Number Placeholder 5"/>
+          <p:cNvPr id="316494689" name="Slide Number Placeholder 5"/>
           <p:cNvSpPr>
             <a:spLocks noGrp="1"/>
           </p:cNvSpPr>
@@ -7315,7 +7315,7 @@
       </p:grpSpPr>
       <p:sp>
         <p:nvSpPr>
-          <p:cNvPr id="1954847686" name="Title 1"/>
+          <p:cNvPr id="1550848304" name="Title 1"/>
           <p:cNvSpPr>
             <a:spLocks noGrp="1"/>
           </p:cNvSpPr>
@@ -7350,7 +7350,7 @@
       </p:sp>
       <p:sp>
         <p:nvSpPr>
-          <p:cNvPr id="1424639439" name="Text Placeholder 2"/>
+          <p:cNvPr id="1662682895" name="Text Placeholder 2"/>
           <p:cNvSpPr>
             <a:spLocks noGrp="1"/>
           </p:cNvSpPr>
@@ -7472,7 +7472,7 @@
       </p:sp>
       <p:sp>
         <p:nvSpPr>
-          <p:cNvPr id="96843865" name="Date Placeholder 3"/>
+          <p:cNvPr id="309291197" name="Date Placeholder 3"/>
           <p:cNvSpPr>
             <a:spLocks noGrp="1"/>
           </p:cNvSpPr>
@@ -7498,7 +7498,7 @@
       </p:sp>
       <p:sp>
         <p:nvSpPr>
-          <p:cNvPr id="951736670" name="Footer Placeholder 4"/>
+          <p:cNvPr id="1516677121" name="Footer Placeholder 4"/>
           <p:cNvSpPr>
             <a:spLocks noGrp="1"/>
           </p:cNvSpPr>
@@ -7520,7 +7520,7 @@
       </p:sp>
       <p:sp>
         <p:nvSpPr>
-          <p:cNvPr id="1556898758" name="Slide Number Placeholder 5"/>
+          <p:cNvPr id="647930611" name="Slide Number Placeholder 5"/>
           <p:cNvSpPr>
             <a:spLocks noGrp="1"/>
           </p:cNvSpPr>
@@ -7571,7 +7571,7 @@
       </p:grpSpPr>
       <p:sp>
         <p:nvSpPr>
-          <p:cNvPr id="20676723" name="Title 1"/>
+          <p:cNvPr id="1802052270" name="Title 1"/>
           <p:cNvSpPr>
             <a:spLocks noGrp="1"/>
           </p:cNvSpPr>
@@ -7597,7 +7597,7 @@
       </p:sp>
       <p:sp>
         <p:nvSpPr>
-          <p:cNvPr id="25896801" name="Content Placeholder 2"/>
+          <p:cNvPr id="680301703" name="Content Placeholder 2"/>
           <p:cNvSpPr>
             <a:spLocks noGrp="1"/>
           </p:cNvSpPr>
@@ -7668,7 +7668,7 @@
       </p:sp>
       <p:sp>
         <p:nvSpPr>
-          <p:cNvPr id="1614259879" name="Content Placeholder 3"/>
+          <p:cNvPr id="548332984" name="Content Placeholder 3"/>
           <p:cNvSpPr>
             <a:spLocks noGrp="1"/>
           </p:cNvSpPr>
@@ -7739,7 +7739,7 @@
       </p:sp>
       <p:sp>
         <p:nvSpPr>
-          <p:cNvPr id="749336663" name="Date Placeholder 4"/>
+          <p:cNvPr id="1418399296" name="Date Placeholder 4"/>
           <p:cNvSpPr>
             <a:spLocks noGrp="1"/>
           </p:cNvSpPr>
@@ -7765,7 +7765,7 @@
       </p:sp>
       <p:sp>
         <p:nvSpPr>
-          <p:cNvPr id="67498948" name="Footer Placeholder 5"/>
+          <p:cNvPr id="644927447" name="Footer Placeholder 5"/>
           <p:cNvSpPr>
             <a:spLocks noGrp="1"/>
           </p:cNvSpPr>
@@ -7787,7 +7787,7 @@
       </p:sp>
       <p:sp>
         <p:nvSpPr>
-          <p:cNvPr id="252846267" name="Slide Number Placeholder 6"/>
+          <p:cNvPr id="2047346718" name="Slide Number Placeholder 6"/>
           <p:cNvSpPr>
             <a:spLocks noGrp="1"/>
           </p:cNvSpPr>
@@ -7838,7 +7838,7 @@
       </p:grpSpPr>
       <p:sp>
         <p:nvSpPr>
-          <p:cNvPr id="553976669" name="Title 1"/>
+          <p:cNvPr id="659494795" name="Title 1"/>
           <p:cNvSpPr>
             <a:spLocks noGrp="1"/>
           </p:cNvSpPr>
@@ -7869,7 +7869,7 @@
       </p:sp>
       <p:sp>
         <p:nvSpPr>
-          <p:cNvPr id="1902454134" name="Text Placeholder 2"/>
+          <p:cNvPr id="881963263" name="Text Placeholder 2"/>
           <p:cNvSpPr>
             <a:spLocks noGrp="1"/>
           </p:cNvSpPr>
@@ -7937,7 +7937,7 @@
       </p:sp>
       <p:sp>
         <p:nvSpPr>
-          <p:cNvPr id="1892413028" name="Content Placeholder 3"/>
+          <p:cNvPr id="582293859" name="Content Placeholder 3"/>
           <p:cNvSpPr>
             <a:spLocks noGrp="1"/>
           </p:cNvSpPr>
@@ -8008,7 +8008,7 @@
       </p:sp>
       <p:sp>
         <p:nvSpPr>
-          <p:cNvPr id="761713369" name="Text Placeholder 4"/>
+          <p:cNvPr id="1056826878" name="Text Placeholder 4"/>
           <p:cNvSpPr>
             <a:spLocks noGrp="1"/>
           </p:cNvSpPr>
@@ -8076,7 +8076,7 @@
       </p:sp>
       <p:sp>
         <p:nvSpPr>
-          <p:cNvPr id="969307521" name="Content Placeholder 5"/>
+          <p:cNvPr id="1780629443" name="Content Placeholder 5"/>
           <p:cNvSpPr>
             <a:spLocks noGrp="1"/>
           </p:cNvSpPr>
@@ -8147,7 +8147,7 @@
       </p:sp>
       <p:sp>
         <p:nvSpPr>
-          <p:cNvPr id="1343110158" name="Date Placeholder 6"/>
+          <p:cNvPr id="1687960751" name="Date Placeholder 6"/>
           <p:cNvSpPr>
             <a:spLocks noGrp="1"/>
           </p:cNvSpPr>
@@ -8173,7 +8173,7 @@
       </p:sp>
       <p:sp>
         <p:nvSpPr>
-          <p:cNvPr id="705498344" name="Footer Placeholder 7"/>
+          <p:cNvPr id="1072777601" name="Footer Placeholder 7"/>
           <p:cNvSpPr>
             <a:spLocks noGrp="1"/>
           </p:cNvSpPr>
@@ -8195,7 +8195,7 @@
       </p:sp>
       <p:sp>
         <p:nvSpPr>
-          <p:cNvPr id="1063888608" name="Slide Number Placeholder 8"/>
+          <p:cNvPr id="226134090" name="Slide Number Placeholder 8"/>
           <p:cNvSpPr>
             <a:spLocks noGrp="1"/>
           </p:cNvSpPr>
@@ -8246,7 +8246,7 @@
       </p:grpSpPr>
       <p:sp>
         <p:nvSpPr>
-          <p:cNvPr id="30817538" name="Title 1"/>
+          <p:cNvPr id="1126996218" name="Title 1"/>
           <p:cNvSpPr>
             <a:spLocks noGrp="1"/>
           </p:cNvSpPr>
@@ -8272,7 +8272,7 @@
       </p:sp>
       <p:sp>
         <p:nvSpPr>
-          <p:cNvPr id="539009082" name="Date Placeholder 2"/>
+          <p:cNvPr id="1483117413" name="Date Placeholder 2"/>
           <p:cNvSpPr>
             <a:spLocks noGrp="1"/>
           </p:cNvSpPr>
@@ -8298,7 +8298,7 @@
       </p:sp>
       <p:sp>
         <p:nvSpPr>
-          <p:cNvPr id="2088429582" name="Footer Placeholder 3"/>
+          <p:cNvPr id="1406399579" name="Footer Placeholder 3"/>
           <p:cNvSpPr>
             <a:spLocks noGrp="1"/>
           </p:cNvSpPr>
@@ -8320,7 +8320,7 @@
       </p:sp>
       <p:sp>
         <p:nvSpPr>
-          <p:cNvPr id="1942022686" name="Slide Number Placeholder 4"/>
+          <p:cNvPr id="1430513999" name="Slide Number Placeholder 4"/>
           <p:cNvSpPr>
             <a:spLocks noGrp="1"/>
           </p:cNvSpPr>
@@ -8371,7 +8371,7 @@
       </p:grpSpPr>
       <p:sp>
         <p:nvSpPr>
-          <p:cNvPr id="654837077" name="Date Placeholder 1"/>
+          <p:cNvPr id="2073014016" name="Date Placeholder 1"/>
           <p:cNvSpPr>
             <a:spLocks noGrp="1"/>
           </p:cNvSpPr>
@@ -8397,7 +8397,7 @@
       </p:sp>
       <p:sp>
         <p:nvSpPr>
-          <p:cNvPr id="590372837" name="Footer Placeholder 2"/>
+          <p:cNvPr id="1990089583" name="Footer Placeholder 2"/>
           <p:cNvSpPr>
             <a:spLocks noGrp="1"/>
           </p:cNvSpPr>
@@ -8419,7 +8419,7 @@
       </p:sp>
       <p:sp>
         <p:nvSpPr>
-          <p:cNvPr id="1049397735" name="Slide Number Placeholder 3"/>
+          <p:cNvPr id="1619118340" name="Slide Number Placeholder 3"/>
           <p:cNvSpPr>
             <a:spLocks noGrp="1"/>
           </p:cNvSpPr>
@@ -8470,7 +8470,7 @@
       </p:grpSpPr>
       <p:sp>
         <p:nvSpPr>
-          <p:cNvPr id="667110897" name="Title 1"/>
+          <p:cNvPr id="412197542" name="Title 1"/>
           <p:cNvSpPr>
             <a:spLocks noGrp="1"/>
           </p:cNvSpPr>
@@ -8505,7 +8505,7 @@
       </p:sp>
       <p:sp>
         <p:nvSpPr>
-          <p:cNvPr id="1605180353" name="Content Placeholder 2"/>
+          <p:cNvPr id="1471917766" name="Content Placeholder 2"/>
           <p:cNvSpPr>
             <a:spLocks noGrp="1"/>
           </p:cNvSpPr>
@@ -8604,7 +8604,7 @@
       </p:sp>
       <p:sp>
         <p:nvSpPr>
-          <p:cNvPr id="1275619152" name="Text Placeholder 3"/>
+          <p:cNvPr id="1505629683" name="Text Placeholder 3"/>
           <p:cNvSpPr>
             <a:spLocks noGrp="1"/>
           </p:cNvSpPr>
@@ -8672,7 +8672,7 @@
       </p:sp>
       <p:sp>
         <p:nvSpPr>
-          <p:cNvPr id="694162073" name="Date Placeholder 4"/>
+          <p:cNvPr id="1234955807" name="Date Placeholder 4"/>
           <p:cNvSpPr>
             <a:spLocks noGrp="1"/>
           </p:cNvSpPr>
@@ -8698,7 +8698,7 @@
       </p:sp>
       <p:sp>
         <p:nvSpPr>
-          <p:cNvPr id="1168574422" name="Footer Placeholder 5"/>
+          <p:cNvPr id="1988544406" name="Footer Placeholder 5"/>
           <p:cNvSpPr>
             <a:spLocks noGrp="1"/>
           </p:cNvSpPr>
@@ -8720,7 +8720,7 @@
       </p:sp>
       <p:sp>
         <p:nvSpPr>
-          <p:cNvPr id="1247131256" name="Slide Number Placeholder 6"/>
+          <p:cNvPr id="756103786" name="Slide Number Placeholder 6"/>
           <p:cNvSpPr>
             <a:spLocks noGrp="1"/>
           </p:cNvSpPr>
@@ -8771,7 +8771,7 @@
       </p:grpSpPr>
       <p:sp>
         <p:nvSpPr>
-          <p:cNvPr id="1615875130" name="Title 1"/>
+          <p:cNvPr id="1793073462" name="Title 1"/>
           <p:cNvSpPr>
             <a:spLocks noGrp="1"/>
           </p:cNvSpPr>
@@ -8806,7 +8806,7 @@
       </p:sp>
       <p:sp>
         <p:nvSpPr>
-          <p:cNvPr id="1411658339" name="Picture Placeholder 2"/>
+          <p:cNvPr id="1665684061" name="Picture Placeholder 2"/>
           <p:cNvSpPr>
             <a:spLocks noChangeAspect="1" noGrp="1"/>
           </p:cNvSpPr>
@@ -8874,7 +8874,7 @@
       </p:sp>
       <p:sp>
         <p:nvSpPr>
-          <p:cNvPr id="1015454129" name="Text Placeholder 3"/>
+          <p:cNvPr id="1169806175" name="Text Placeholder 3"/>
           <p:cNvSpPr>
             <a:spLocks noGrp="1"/>
           </p:cNvSpPr>
@@ -8942,7 +8942,7 @@
       </p:sp>
       <p:sp>
         <p:nvSpPr>
-          <p:cNvPr id="545744123" name="Date Placeholder 4"/>
+          <p:cNvPr id="684644214" name="Date Placeholder 4"/>
           <p:cNvSpPr>
             <a:spLocks noGrp="1"/>
           </p:cNvSpPr>
@@ -8968,7 +8968,7 @@
       </p:sp>
       <p:sp>
         <p:nvSpPr>
-          <p:cNvPr id="139190087" name="Footer Placeholder 5"/>
+          <p:cNvPr id="1319188390" name="Footer Placeholder 5"/>
           <p:cNvSpPr>
             <a:spLocks noGrp="1"/>
           </p:cNvSpPr>
@@ -8990,7 +8990,7 @@
       </p:sp>
       <p:sp>
         <p:nvSpPr>
-          <p:cNvPr id="669033459" name="Slide Number Placeholder 6"/>
+          <p:cNvPr id="1337491548" name="Slide Number Placeholder 6"/>
           <p:cNvSpPr>
             <a:spLocks noGrp="1"/>
           </p:cNvSpPr>
@@ -9046,7 +9046,7 @@
       </p:grpSpPr>
       <p:sp>
         <p:nvSpPr>
-          <p:cNvPr id="527806315" name="Title Placeholder 1"/>
+          <p:cNvPr id="1634000150" name="Title Placeholder 1"/>
           <p:cNvSpPr>
             <a:spLocks noGrp="1"/>
           </p:cNvSpPr>
@@ -9082,7 +9082,7 @@
       </p:sp>
       <p:sp>
         <p:nvSpPr>
-          <p:cNvPr id="901685973" name="Text Placeholder 2"/>
+          <p:cNvPr id="1984633628" name="Text Placeholder 2"/>
           <p:cNvSpPr>
             <a:spLocks noGrp="1"/>
           </p:cNvSpPr>
@@ -9158,7 +9158,7 @@
       </p:sp>
       <p:sp>
         <p:nvSpPr>
-          <p:cNvPr id="285947842" name="Date Placeholder 3"/>
+          <p:cNvPr id="1413260570" name="Date Placeholder 3"/>
           <p:cNvSpPr>
             <a:spLocks noGrp="1"/>
           </p:cNvSpPr>
@@ -9202,7 +9202,7 @@
       </p:sp>
       <p:sp>
         <p:nvSpPr>
-          <p:cNvPr id="936646354" name="Footer Placeholder 4"/>
+          <p:cNvPr id="952573259" name="Footer Placeholder 4"/>
           <p:cNvSpPr>
             <a:spLocks noGrp="1"/>
           </p:cNvSpPr>
@@ -9242,7 +9242,7 @@
       </p:sp>
       <p:sp>
         <p:nvSpPr>
-          <p:cNvPr id="839322563" name="Slide Number Placeholder 5"/>
+          <p:cNvPr id="1547826785" name="Slide Number Placeholder 5"/>
           <p:cNvSpPr>
             <a:spLocks noGrp="1"/>
           </p:cNvSpPr>
@@ -9607,9 +9607,468 @@
           <a:chExt cx="0" cy="0"/>
         </a:xfrm>
       </p:grpSpPr>
+      <p:sp>
+        <p:nvSpPr>
+          <p:cNvPr id="239117410" name="Rectangle 7"/>
+          <p:cNvSpPr/>
+          <p:nvPr/>
+        </p:nvSpPr>
+        <p:spPr bwMode="auto">
+          <a:xfrm>
+            <a:off x="2595339" y="198443"/>
+            <a:ext cx="1396890" cy="381323"/>
+          </a:xfrm>
+          <a:prstGeom prst="rect">
+            <a:avLst/>
+          </a:prstGeom>
+          <a:solidFill>
+            <a:srgbClr val="FFFFFF"/>
+          </a:solidFill>
+          <a:ln>
+            <a:noFill/>
+          </a:ln>
+        </p:spPr>
+        <p:style>
+          <a:lnRef idx="2">
+            <a:schemeClr val="accent1">
+              <a:shade val="15000"/>
+            </a:schemeClr>
+          </a:lnRef>
+          <a:fillRef idx="1">
+            <a:schemeClr val="accent1"/>
+          </a:fillRef>
+          <a:effectRef idx="0">
+            <a:schemeClr val="accent1"/>
+          </a:effectRef>
+          <a:fontRef idx="minor">
+            <a:schemeClr val="lt1"/>
+          </a:fontRef>
+        </p:style>
+        <p:txBody>
+          <a:bodyPr rtlCol="0" anchor="ctr"/>
+          <a:lstStyle/>
+          <a:p>
+            <a:pPr algn="ctr">
+              <a:defRPr/>
+            </a:pPr>
+            <a:endParaRPr lang="en-US"/>
+          </a:p>
+        </p:txBody>
+      </p:sp>
+      <p:sp>
+        <p:nvSpPr>
+          <p:cNvPr id="201387892" name="TextBox 5"/>
+          <p:cNvSpPr txBox="1"/>
+          <p:nvPr/>
+        </p:nvSpPr>
+        <p:spPr bwMode="auto">
+          <a:xfrm>
+            <a:off x="2591523" y="188417"/>
+            <a:ext cx="2347353" cy="442319"/>
+          </a:xfrm>
+          <a:prstGeom prst="rect">
+            <a:avLst/>
+          </a:prstGeom>
+          <a:noFill/>
+        </p:spPr>
+        <p:txBody>
+          <a:bodyPr wrap="square" lIns="91440" tIns="45720" rIns="91440" bIns="45720" rtlCol="0" anchor="t">
+            <a:spAutoFit/>
+          </a:bodyPr>
+          <a:lstStyle/>
+          <a:p>
+            <a:pPr>
+              <a:defRPr/>
+            </a:pPr>
+            <a:r>
+              <a:rPr sz="2300" b="1" lang="en-US">
+                <a:latin typeface="Roboto"/>
+              </a:rPr>
+              <a:t>Cleartext</a:t>
+            </a:r>
+            <a:endParaRPr lang="en-US" sz="2300"/>
+          </a:p>
+        </p:txBody>
+      </p:sp>
+      <p:sp>
+        <p:nvSpPr>
+          <p:cNvPr id="542659239" name="Rectangle 13"/>
+          <p:cNvSpPr/>
+          <p:nvPr/>
+        </p:nvSpPr>
+        <p:spPr bwMode="auto">
+          <a:xfrm>
+            <a:off x="7747107" y="158272"/>
+            <a:ext cx="1739305" cy="461664"/>
+          </a:xfrm>
+          <a:prstGeom prst="rect">
+            <a:avLst/>
+          </a:prstGeom>
+          <a:solidFill>
+            <a:srgbClr val="FFFFFF"/>
+          </a:solidFill>
+          <a:ln>
+            <a:noFill/>
+          </a:ln>
+        </p:spPr>
+        <p:style>
+          <a:lnRef idx="2">
+            <a:schemeClr val="accent1">
+              <a:shade val="15000"/>
+            </a:schemeClr>
+          </a:lnRef>
+          <a:fillRef idx="1">
+            <a:schemeClr val="accent1"/>
+          </a:fillRef>
+          <a:effectRef idx="0">
+            <a:schemeClr val="accent1"/>
+          </a:effectRef>
+          <a:fontRef idx="minor">
+            <a:schemeClr val="lt1"/>
+          </a:fontRef>
+        </p:style>
+        <p:txBody>
+          <a:bodyPr rtlCol="0" anchor="ctr"/>
+          <a:lstStyle/>
+          <a:p>
+            <a:pPr algn="ctr">
+              <a:defRPr/>
+            </a:pPr>
+            <a:endParaRPr lang="en-US"/>
+          </a:p>
+        </p:txBody>
+      </p:sp>
+      <p:sp>
+        <p:nvSpPr>
+          <p:cNvPr id="1506029660" name="TextBox 11"/>
+          <p:cNvSpPr txBox="1"/>
+          <p:nvPr/>
+        </p:nvSpPr>
+        <p:spPr bwMode="auto">
+          <a:xfrm>
+            <a:off x="7764696" y="178324"/>
+            <a:ext cx="2593914" cy="442319"/>
+          </a:xfrm>
+          <a:prstGeom prst="rect">
+            <a:avLst/>
+          </a:prstGeom>
+          <a:noFill/>
+        </p:spPr>
+        <p:txBody>
+          <a:bodyPr wrap="square" lIns="91440" tIns="45720" rIns="91440" bIns="45720" anchor="t">
+            <a:spAutoFit/>
+          </a:bodyPr>
+          <a:lstStyle/>
+          <a:p>
+            <a:pPr>
+              <a:defRPr/>
+            </a:pPr>
+            <a:r>
+              <a:rPr sz="2300" b="1" lang="en-US">
+                <a:latin typeface="Roboto"/>
+              </a:rPr>
+              <a:t>Ciphertext</a:t>
+            </a:r>
+            <a:endParaRPr/>
+          </a:p>
+        </p:txBody>
+      </p:sp>
+      <p:sp>
+        <p:nvSpPr>
+          <p:cNvPr id="515311746" name="Rectangle 17"/>
+          <p:cNvSpPr/>
+          <p:nvPr/>
+        </p:nvSpPr>
+        <p:spPr bwMode="auto">
+          <a:xfrm>
+            <a:off x="8766243" y="2968881"/>
+            <a:ext cx="1257075" cy="430535"/>
+          </a:xfrm>
+          <a:prstGeom prst="rect">
+            <a:avLst/>
+          </a:prstGeom>
+          <a:solidFill>
+            <a:srgbClr val="FFFFFF"/>
+          </a:solidFill>
+          <a:ln>
+            <a:noFill/>
+          </a:ln>
+        </p:spPr>
+        <p:style>
+          <a:lnRef idx="2">
+            <a:schemeClr val="accent1">
+              <a:shade val="15000"/>
+            </a:schemeClr>
+          </a:lnRef>
+          <a:fillRef idx="1">
+            <a:schemeClr val="accent1"/>
+          </a:fillRef>
+          <a:effectRef idx="0">
+            <a:schemeClr val="accent1"/>
+          </a:effectRef>
+          <a:fontRef idx="minor">
+            <a:schemeClr val="lt1"/>
+          </a:fontRef>
+        </p:style>
+        <p:txBody>
+          <a:bodyPr rtlCol="0" anchor="ctr"/>
+          <a:lstStyle/>
+          <a:p>
+            <a:pPr algn="ctr">
+              <a:defRPr/>
+            </a:pPr>
+            <a:endParaRPr lang="en-US"/>
+          </a:p>
+        </p:txBody>
+      </p:sp>
+      <p:sp>
+        <p:nvSpPr>
+          <p:cNvPr id="687331779" name="Rectangle 18"/>
+          <p:cNvSpPr/>
+          <p:nvPr/>
+        </p:nvSpPr>
+        <p:spPr bwMode="auto">
+          <a:xfrm>
+            <a:off x="4918718" y="1681878"/>
+            <a:ext cx="1610899" cy="1143972"/>
+          </a:xfrm>
+          <a:prstGeom prst="rect">
+            <a:avLst/>
+          </a:prstGeom>
+          <a:solidFill>
+            <a:srgbClr val="FFFFFF"/>
+          </a:solidFill>
+          <a:ln>
+            <a:noFill/>
+          </a:ln>
+        </p:spPr>
+        <p:style>
+          <a:lnRef idx="2">
+            <a:schemeClr val="accent1">
+              <a:shade val="15000"/>
+            </a:schemeClr>
+          </a:lnRef>
+          <a:fillRef idx="1">
+            <a:schemeClr val="accent1"/>
+          </a:fillRef>
+          <a:effectRef idx="0">
+            <a:schemeClr val="accent1"/>
+          </a:effectRef>
+          <a:fontRef idx="minor">
+            <a:schemeClr val="lt1"/>
+          </a:fontRef>
+        </p:style>
+        <p:txBody>
+          <a:bodyPr rtlCol="0" anchor="ctr"/>
+          <a:lstStyle/>
+          <a:p>
+            <a:pPr algn="ctr">
+              <a:defRPr/>
+            </a:pPr>
+            <a:endParaRPr lang="en-US">
+              <a:solidFill>
+                <a:schemeClr val="tx1"/>
+              </a:solidFill>
+            </a:endParaRPr>
+          </a:p>
+        </p:txBody>
+      </p:sp>
+      <p:sp>
+        <p:nvSpPr>
+          <p:cNvPr id="2035916910" name="TextBox 14"/>
+          <p:cNvSpPr txBox="1"/>
+          <p:nvPr/>
+        </p:nvSpPr>
+        <p:spPr bwMode="auto">
+          <a:xfrm>
+            <a:off x="8766243" y="2957805"/>
+            <a:ext cx="1954436" cy="442319"/>
+          </a:xfrm>
+          <a:prstGeom prst="rect">
+            <a:avLst/>
+          </a:prstGeom>
+          <a:noFill/>
+        </p:spPr>
+        <p:txBody>
+          <a:bodyPr wrap="square" lIns="91440" tIns="45720" rIns="91440" bIns="45720" rtlCol="0" anchor="t">
+            <a:spAutoFit/>
+          </a:bodyPr>
+          <a:lstStyle/>
+          <a:p>
+            <a:pPr>
+              <a:defRPr/>
+            </a:pPr>
+            <a:r>
+              <a:rPr sz="2300" lang="en-US">
+                <a:latin typeface="Roboto"/>
+              </a:rPr>
+              <a:t>Sending</a:t>
+            </a:r>
+            <a:endParaRPr/>
+          </a:p>
+        </p:txBody>
+      </p:sp>
+      <p:sp>
+        <p:nvSpPr>
+          <p:cNvPr id="1682539440" name="TextBox 19"/>
+          <p:cNvSpPr txBox="1"/>
+          <p:nvPr/>
+        </p:nvSpPr>
+        <p:spPr bwMode="auto">
+          <a:xfrm>
+            <a:off x="4410180" y="1713858"/>
+            <a:ext cx="2628336" cy="1143359"/>
+          </a:xfrm>
+          <a:prstGeom prst="rect">
+            <a:avLst/>
+          </a:prstGeom>
+          <a:noFill/>
+        </p:spPr>
+        <p:txBody>
+          <a:bodyPr wrap="square" lIns="91440" tIns="45720" rIns="91440" bIns="45720" rtlCol="0" anchor="t">
+            <a:spAutoFit/>
+          </a:bodyPr>
+          <a:lstStyle/>
+          <a:p>
+            <a:pPr algn="ctr">
+              <a:defRPr/>
+            </a:pPr>
+            <a:r>
+              <a:rPr sz="2300" lang="en-US">
+                <a:latin typeface="Roboto"/>
+              </a:rPr>
+              <a:t>Encryption</a:t>
+            </a:r>
+            <a:endParaRPr/>
+          </a:p>
+          <a:p>
+            <a:pPr algn="ctr"/>
+            <a:r>
+              <a:rPr sz="2300" lang="en-US">
+                <a:latin typeface="Roboto"/>
+              </a:rPr>
+              <a:t>with public</a:t>
+            </a:r>
+          </a:p>
+          <a:p>
+            <a:pPr algn="ctr"/>
+            <a:r>
+              <a:rPr sz="2300" lang="en-US">
+                <a:latin typeface="Roboto"/>
+              </a:rPr>
+              <a:t>key</a:t>
+            </a:r>
+          </a:p>
+        </p:txBody>
+      </p:sp>
+      <p:sp>
+        <p:nvSpPr>
+          <p:cNvPr id="698934102" name="Rectangle 21"/>
+          <p:cNvSpPr/>
+          <p:nvPr/>
+        </p:nvSpPr>
+        <p:spPr bwMode="auto">
+          <a:xfrm>
+            <a:off x="4918718" y="5620284"/>
+            <a:ext cx="1610899" cy="1143972"/>
+          </a:xfrm>
+          <a:prstGeom prst="rect">
+            <a:avLst/>
+          </a:prstGeom>
+          <a:solidFill>
+            <a:srgbClr val="FFFFFF"/>
+          </a:solidFill>
+          <a:ln>
+            <a:noFill/>
+          </a:ln>
+        </p:spPr>
+        <p:style>
+          <a:lnRef idx="2">
+            <a:schemeClr val="accent1">
+              <a:shade val="15000"/>
+            </a:schemeClr>
+          </a:lnRef>
+          <a:fillRef idx="1">
+            <a:schemeClr val="accent1"/>
+          </a:fillRef>
+          <a:effectRef idx="0">
+            <a:schemeClr val="accent1"/>
+          </a:effectRef>
+          <a:fontRef idx="minor">
+            <a:schemeClr val="lt1"/>
+          </a:fontRef>
+        </p:style>
+        <p:txBody>
+          <a:bodyPr rtlCol="0" anchor="ctr"/>
+          <a:lstStyle/>
+          <a:p>
+            <a:pPr algn="ctr">
+              <a:defRPr/>
+            </a:pPr>
+            <a:endParaRPr lang="en-US">
+              <a:solidFill>
+                <a:schemeClr val="tx1"/>
+              </a:solidFill>
+            </a:endParaRPr>
+          </a:p>
+        </p:txBody>
+      </p:sp>
+      <p:sp>
+        <p:nvSpPr>
+          <p:cNvPr id="898941771" name="TextBox 22"/>
+          <p:cNvSpPr txBox="1"/>
+          <p:nvPr/>
+        </p:nvSpPr>
+        <p:spPr bwMode="auto">
+          <a:xfrm>
+            <a:off x="4520468" y="5592105"/>
+            <a:ext cx="2407757" cy="1143359"/>
+          </a:xfrm>
+          <a:prstGeom prst="rect">
+            <a:avLst/>
+          </a:prstGeom>
+          <a:noFill/>
+        </p:spPr>
+        <p:txBody>
+          <a:bodyPr wrap="square" lIns="91440" tIns="45720" rIns="91440" bIns="45720" rtlCol="0" anchor="t">
+            <a:spAutoFit/>
+          </a:bodyPr>
+          <a:lstStyle/>
+          <a:p>
+            <a:pPr algn="ctr">
+              <a:defRPr/>
+            </a:pPr>
+            <a:r>
+              <a:rPr sz="2300" lang="en-US">
+                <a:latin typeface="Roboto"/>
+              </a:rPr>
+              <a:t>Decryption</a:t>
+            </a:r>
+            <a:endParaRPr/>
+          </a:p>
+          <a:p>
+            <a:pPr algn="ctr"/>
+            <a:r>
+              <a:rPr sz="2300" lang="en-US">
+                <a:latin typeface="Roboto"/>
+              </a:rPr>
+              <a:t>with private</a:t>
+            </a:r>
+          </a:p>
+          <a:p>
+            <a:pPr algn="ctr"/>
+            <a:r>
+              <a:rPr sz="2300" lang="en-US">
+                <a:latin typeface="Roboto"/>
+              </a:rPr>
+              <a:t>key</a:t>
+            </a:r>
+          </a:p>
+        </p:txBody>
+      </p:sp>
       <p:pic>
         <p:nvPicPr>
-          <p:cNvPr id="815682937" name=""/>
+          <p:cNvPr id="502438407" name=""/>
           <p:cNvPicPr>
             <a:picLocks noChangeAspect="1"/>
           </p:cNvPicPr>
@@ -9617,27 +10076,717 @@
         </p:nvPicPr>
         <p:blipFill>
           <a:blip r:embed="rId3"/>
-          <a:srcRect l="0" t="0" r="0" b="17028"/>
           <a:stretch/>
         </p:blipFill>
         <p:spPr bwMode="auto">
           <a:xfrm flipH="0" flipV="0">
-            <a:off x="1822927" y="497415"/>
-            <a:ext cx="8392870" cy="5570938"/>
-          </a:xfrm>
-          <a:prstGeom prst="rect">
-            <a:avLst/>
-          </a:prstGeom>
-          <a:ln w="6349">
-            <a:solidFill>
-              <a:schemeClr val="accent1">
-                <a:lumMod val="50196"/>
-              </a:schemeClr>
-            </a:solidFill>
+            <a:off x="1958999" y="21166"/>
+            <a:ext cx="8392871" cy="6714297"/>
+          </a:xfrm>
+          <a:prstGeom prst="rect">
+            <a:avLst/>
+          </a:prstGeom>
+        </p:spPr>
+      </p:pic>
+      <p:sp>
+        <p:nvSpPr>
+          <p:cNvPr id="1429071587" name=""/>
+          <p:cNvSpPr/>
+          <p:nvPr/>
+        </p:nvSpPr>
+        <p:spPr bwMode="auto">
+          <a:xfrm flipH="0" flipV="0">
+            <a:off x="2722070" y="203655"/>
+            <a:ext cx="1398607" cy="446107"/>
+          </a:xfrm>
+          <a:prstGeom prst="rect">
+            <a:avLst/>
+          </a:prstGeom>
+          <a:solidFill>
+            <a:srgbClr val="FFFFFF"/>
+          </a:solidFill>
+          <a:ln w="12700" cap="flat" cmpd="sng" algn="ctr">
+            <a:noFill/>
             <a:prstDash val="solid"/>
+            <a:miter lim="800000"/>
           </a:ln>
         </p:spPr>
-      </p:pic>
+        <p:style>
+          <a:lnRef idx="2">
+            <a:schemeClr val="accent1">
+              <a:shade val="50000"/>
+            </a:schemeClr>
+          </a:lnRef>
+          <a:fillRef idx="1">
+            <a:schemeClr val="accent1"/>
+          </a:fillRef>
+          <a:effectRef idx="0">
+            <a:schemeClr val="accent1"/>
+          </a:effectRef>
+          <a:fontRef idx="minor">
+            <a:schemeClr val="lt1"/>
+          </a:fontRef>
+        </p:style>
+        <p:txBody>
+          <a:bodyPr/>
+          <a:p>
+            <a:pPr>
+              <a:defRPr/>
+            </a:pPr>
+            <a:endParaRPr/>
+          </a:p>
+        </p:txBody>
+      </p:sp>
+      <p:sp>
+        <p:nvSpPr>
+          <p:cNvPr id="761093492" name=""/>
+          <p:cNvSpPr txBox="1"/>
+          <p:nvPr/>
+        </p:nvSpPr>
+        <p:spPr bwMode="auto">
+          <a:xfrm flipH="0" flipV="0">
+            <a:off x="1535541" y="203654"/>
+            <a:ext cx="3431783" cy="427079"/>
+          </a:xfrm>
+          <a:prstGeom prst="rect">
+            <a:avLst/>
+          </a:prstGeom>
+          <a:noFill/>
+        </p:spPr>
+        <p:txBody>
+          <a:bodyPr vertOverflow="overflow" horzOverflow="overflow" vert="horz" wrap="square" lIns="91440" tIns="45720" rIns="91440" bIns="45720" numCol="1" spcCol="0" rtlCol="0" fromWordArt="0" anchor="t" anchorCtr="0" forceAA="0" upright="0" compatLnSpc="0">
+            <a:spAutoFit/>
+          </a:bodyPr>
+          <a:p>
+            <a:pPr algn="ctr">
+              <a:defRPr/>
+            </a:pPr>
+            <a:r>
+              <a:rPr sz="2200" b="1">
+                <a:latin typeface="IBM Plex Sans"/>
+              </a:rPr>
+              <a:t>Cleartext</a:t>
+            </a:r>
+            <a:endParaRPr sz="2200" b="1">
+              <a:latin typeface="IBM Plex Sans"/>
+              <a:cs typeface="IBM Plex Sans"/>
+            </a:endParaRPr>
+          </a:p>
+        </p:txBody>
+      </p:sp>
+      <p:sp>
+        <p:nvSpPr>
+          <p:cNvPr id="1969521309" name=""/>
+          <p:cNvSpPr/>
+          <p:nvPr/>
+        </p:nvSpPr>
+        <p:spPr bwMode="auto">
+          <a:xfrm flipH="0" flipV="0">
+            <a:off x="7827161" y="198442"/>
+            <a:ext cx="2037394" cy="446106"/>
+          </a:xfrm>
+          <a:prstGeom prst="rect">
+            <a:avLst/>
+          </a:prstGeom>
+          <a:solidFill>
+            <a:srgbClr val="FFFFFF"/>
+          </a:solidFill>
+          <a:ln w="12700" cap="flat" cmpd="sng" algn="ctr">
+            <a:noFill/>
+            <a:prstDash val="solid"/>
+            <a:miter lim="800000"/>
+          </a:ln>
+        </p:spPr>
+        <p:style>
+          <a:lnRef idx="2">
+            <a:schemeClr val="accent1">
+              <a:shade val="50000"/>
+            </a:schemeClr>
+          </a:lnRef>
+          <a:fillRef idx="1">
+            <a:schemeClr val="accent1"/>
+          </a:fillRef>
+          <a:effectRef idx="0">
+            <a:schemeClr val="accent1"/>
+          </a:effectRef>
+          <a:fontRef idx="minor">
+            <a:schemeClr val="lt1"/>
+          </a:fontRef>
+        </p:style>
+        <p:txBody>
+          <a:bodyPr/>
+          <a:p>
+            <a:pPr>
+              <a:defRPr/>
+            </a:pPr>
+            <a:endParaRPr/>
+          </a:p>
+        </p:txBody>
+      </p:sp>
+      <p:sp>
+        <p:nvSpPr>
+          <p:cNvPr id="1091385861" name=""/>
+          <p:cNvSpPr/>
+          <p:nvPr/>
+        </p:nvSpPr>
+        <p:spPr bwMode="auto">
+          <a:xfrm flipH="0" flipV="0">
+            <a:off x="8721165" y="2325560"/>
+            <a:ext cx="1999512" cy="1365376"/>
+          </a:xfrm>
+          <a:prstGeom prst="rect">
+            <a:avLst/>
+          </a:prstGeom>
+          <a:solidFill>
+            <a:srgbClr val="FFFFFF"/>
+          </a:solidFill>
+          <a:ln w="12700" cap="flat" cmpd="sng" algn="ctr">
+            <a:noFill/>
+            <a:prstDash val="solid"/>
+            <a:miter lim="800000"/>
+          </a:ln>
+        </p:spPr>
+        <p:style>
+          <a:lnRef idx="2">
+            <a:schemeClr val="accent1">
+              <a:shade val="50000"/>
+            </a:schemeClr>
+          </a:lnRef>
+          <a:fillRef idx="1">
+            <a:schemeClr val="accent1"/>
+          </a:fillRef>
+          <a:effectRef idx="0">
+            <a:schemeClr val="accent1"/>
+          </a:effectRef>
+          <a:fontRef idx="minor">
+            <a:schemeClr val="lt1"/>
+          </a:fontRef>
+        </p:style>
+        <p:txBody>
+          <a:bodyPr/>
+          <a:p>
+            <a:pPr>
+              <a:defRPr/>
+            </a:pPr>
+            <a:endParaRPr/>
+          </a:p>
+        </p:txBody>
+      </p:sp>
+      <p:sp>
+        <p:nvSpPr>
+          <p:cNvPr id="1093531871" name=""/>
+          <p:cNvSpPr/>
+          <p:nvPr/>
+        </p:nvSpPr>
+        <p:spPr bwMode="auto">
+          <a:xfrm flipH="0" flipV="0">
+            <a:off x="4938876" y="1490804"/>
+            <a:ext cx="1645997" cy="1669513"/>
+          </a:xfrm>
+          <a:prstGeom prst="rect">
+            <a:avLst/>
+          </a:prstGeom>
+          <a:solidFill>
+            <a:srgbClr val="FFFFFF"/>
+          </a:solidFill>
+          <a:ln w="12700" cap="flat" cmpd="sng" algn="ctr">
+            <a:noFill/>
+            <a:prstDash val="solid"/>
+            <a:miter lim="800000"/>
+          </a:ln>
+        </p:spPr>
+        <p:style>
+          <a:lnRef idx="2">
+            <a:schemeClr val="accent1">
+              <a:shade val="50000"/>
+            </a:schemeClr>
+          </a:lnRef>
+          <a:fillRef idx="1">
+            <a:schemeClr val="accent1"/>
+          </a:fillRef>
+          <a:effectRef idx="0">
+            <a:schemeClr val="accent1"/>
+          </a:effectRef>
+          <a:fontRef idx="minor">
+            <a:schemeClr val="lt1"/>
+          </a:fontRef>
+        </p:style>
+        <p:txBody>
+          <a:bodyPr/>
+          <a:p>
+            <a:pPr>
+              <a:defRPr/>
+            </a:pPr>
+            <a:endParaRPr/>
+          </a:p>
+        </p:txBody>
+      </p:sp>
+      <p:sp>
+        <p:nvSpPr>
+          <p:cNvPr id="525520898" name=""/>
+          <p:cNvSpPr/>
+          <p:nvPr/>
+        </p:nvSpPr>
+        <p:spPr bwMode="auto">
+          <a:xfrm flipH="0" flipV="0">
+            <a:off x="4966245" y="5441911"/>
+            <a:ext cx="1645996" cy="1293550"/>
+          </a:xfrm>
+          <a:prstGeom prst="rect">
+            <a:avLst/>
+          </a:prstGeom>
+          <a:solidFill>
+            <a:srgbClr val="FFFFFF"/>
+          </a:solidFill>
+          <a:ln w="12700" cap="flat" cmpd="sng" algn="ctr">
+            <a:noFill/>
+            <a:prstDash val="solid"/>
+            <a:miter lim="800000"/>
+          </a:ln>
+        </p:spPr>
+        <p:style>
+          <a:lnRef idx="2">
+            <a:schemeClr val="accent1">
+              <a:shade val="50000"/>
+            </a:schemeClr>
+          </a:lnRef>
+          <a:fillRef idx="1">
+            <a:schemeClr val="accent1"/>
+          </a:fillRef>
+          <a:effectRef idx="0">
+            <a:schemeClr val="accent1"/>
+          </a:effectRef>
+          <a:fontRef idx="minor">
+            <a:schemeClr val="lt1"/>
+          </a:fontRef>
+        </p:style>
+        <p:txBody>
+          <a:bodyPr/>
+          <a:p>
+            <a:pPr>
+              <a:defRPr/>
+            </a:pPr>
+            <a:endParaRPr/>
+          </a:p>
+        </p:txBody>
+      </p:sp>
+      <p:sp>
+        <p:nvSpPr>
+          <p:cNvPr id="1756478981" name=""/>
+          <p:cNvSpPr/>
+          <p:nvPr/>
+        </p:nvSpPr>
+        <p:spPr bwMode="auto">
+          <a:xfrm flipH="0" flipV="0">
+            <a:off x="2722070" y="1044697"/>
+            <a:ext cx="1688109" cy="446106"/>
+          </a:xfrm>
+          <a:prstGeom prst="rect">
+            <a:avLst/>
+          </a:prstGeom>
+          <a:solidFill>
+            <a:srgbClr val="FFFFFF"/>
+          </a:solidFill>
+          <a:ln w="12700" cap="flat" cmpd="sng" algn="ctr">
+            <a:noFill/>
+            <a:prstDash val="solid"/>
+            <a:miter lim="800000"/>
+          </a:ln>
+        </p:spPr>
+        <p:style>
+          <a:lnRef idx="2">
+            <a:schemeClr val="accent1">
+              <a:shade val="50000"/>
+            </a:schemeClr>
+          </a:lnRef>
+          <a:fillRef idx="1">
+            <a:schemeClr val="accent1"/>
+          </a:fillRef>
+          <a:effectRef idx="0">
+            <a:schemeClr val="accent1"/>
+          </a:effectRef>
+          <a:fontRef idx="minor">
+            <a:schemeClr val="lt1"/>
+          </a:fontRef>
+        </p:style>
+        <p:txBody>
+          <a:bodyPr/>
+          <a:p>
+            <a:pPr>
+              <a:defRPr/>
+            </a:pPr>
+            <a:endParaRPr>
+              <a:solidFill>
+                <a:schemeClr val="bg1"/>
+              </a:solidFill>
+            </a:endParaRPr>
+          </a:p>
+        </p:txBody>
+      </p:sp>
+      <p:sp>
+        <p:nvSpPr>
+          <p:cNvPr id="30921611" name=""/>
+          <p:cNvSpPr txBox="1"/>
+          <p:nvPr/>
+        </p:nvSpPr>
+        <p:spPr bwMode="auto">
+          <a:xfrm flipH="0" flipV="0">
+            <a:off x="2853086" y="1033244"/>
+            <a:ext cx="1139142" cy="457560"/>
+          </a:xfrm>
+          <a:prstGeom prst="rect">
+            <a:avLst/>
+          </a:prstGeom>
+          <a:noFill/>
+        </p:spPr>
+        <p:txBody>
+          <a:bodyPr vertOverflow="overflow" horzOverflow="overflow" vert="horz" wrap="none" lIns="91440" tIns="45720" rIns="91440" bIns="45720" numCol="1" spcCol="0" rtlCol="0" fromWordArt="0" anchor="t" anchorCtr="0" forceAA="0" upright="0" compatLnSpc="0">
+            <a:spAutoFit/>
+          </a:bodyPr>
+          <a:p>
+            <a:pPr>
+              <a:defRPr/>
+            </a:pPr>
+            <a:r>
+              <a:rPr sz="2400">
+                <a:latin typeface="IBM Plex Sans"/>
+              </a:rPr>
+              <a:t>Bitcoin</a:t>
+            </a:r>
+            <a:endParaRPr sz="2400">
+              <a:latin typeface="IBM Plex Sans"/>
+              <a:cs typeface="IBM Plex Sans"/>
+            </a:endParaRPr>
+          </a:p>
+        </p:txBody>
+      </p:sp>
+      <p:sp>
+        <p:nvSpPr>
+          <p:cNvPr id="276313897" name=""/>
+          <p:cNvSpPr txBox="1"/>
+          <p:nvPr/>
+        </p:nvSpPr>
+        <p:spPr bwMode="auto">
+          <a:xfrm flipH="0" flipV="0">
+            <a:off x="7187931" y="203654"/>
+            <a:ext cx="3239579" cy="427079"/>
+          </a:xfrm>
+          <a:prstGeom prst="rect">
+            <a:avLst/>
+          </a:prstGeom>
+          <a:noFill/>
+        </p:spPr>
+        <p:txBody>
+          <a:bodyPr vertOverflow="overflow" horzOverflow="overflow" vert="horz" wrap="square" lIns="91440" tIns="45720" rIns="91440" bIns="45720" numCol="1" spcCol="0" rtlCol="0" fromWordArt="0" anchor="t" anchorCtr="0" forceAA="0" upright="0" compatLnSpc="0">
+            <a:spAutoFit/>
+          </a:bodyPr>
+          <a:p>
+            <a:pPr algn="ctr">
+              <a:defRPr/>
+            </a:pPr>
+            <a:r>
+              <a:rPr sz="2200" b="1">
+                <a:latin typeface="IBM Plex Sans"/>
+              </a:rPr>
+              <a:t>Ciphertext</a:t>
+            </a:r>
+            <a:endParaRPr sz="2200" b="1">
+              <a:latin typeface="IBM Plex Sans"/>
+              <a:cs typeface="IBM Plex Sans"/>
+            </a:endParaRPr>
+          </a:p>
+        </p:txBody>
+      </p:sp>
+      <p:sp>
+        <p:nvSpPr>
+          <p:cNvPr id="1415171345" name=""/>
+          <p:cNvSpPr txBox="1"/>
+          <p:nvPr/>
+        </p:nvSpPr>
+        <p:spPr bwMode="auto">
+          <a:xfrm flipH="0" flipV="0">
+            <a:off x="8807720" y="2794709"/>
+            <a:ext cx="3193567" cy="427079"/>
+          </a:xfrm>
+          <a:prstGeom prst="rect">
+            <a:avLst/>
+          </a:prstGeom>
+          <a:noFill/>
+        </p:spPr>
+        <p:txBody>
+          <a:bodyPr vertOverflow="overflow" horzOverflow="overflow" vert="horz" wrap="square" lIns="91440" tIns="45720" rIns="91440" bIns="45720" numCol="1" spcCol="0" rtlCol="0" fromWordArt="0" anchor="t" anchorCtr="0" forceAA="0" upright="0" compatLnSpc="0">
+            <a:spAutoFit/>
+          </a:bodyPr>
+          <a:p>
+            <a:pPr>
+              <a:defRPr/>
+            </a:pPr>
+            <a:r>
+              <a:rPr sz="2200" b="0">
+                <a:latin typeface="IBM Plex Sans"/>
+              </a:rPr>
+              <a:t>Sending</a:t>
+            </a:r>
+            <a:endParaRPr sz="2200" b="0">
+              <a:latin typeface="IBM Plex Sans"/>
+              <a:cs typeface="IBM Plex Sans"/>
+            </a:endParaRPr>
+          </a:p>
+        </p:txBody>
+      </p:sp>
+      <p:sp>
+        <p:nvSpPr>
+          <p:cNvPr id="2060365003" name=""/>
+          <p:cNvSpPr txBox="1"/>
+          <p:nvPr/>
+        </p:nvSpPr>
+        <p:spPr bwMode="auto">
+          <a:xfrm flipH="0" flipV="0">
+            <a:off x="4938875" y="1639891"/>
+            <a:ext cx="1592180" cy="518519"/>
+          </a:xfrm>
+          <a:prstGeom prst="rect">
+            <a:avLst/>
+          </a:prstGeom>
+          <a:noFill/>
+        </p:spPr>
+        <p:txBody>
+          <a:bodyPr vertOverflow="overflow" horzOverflow="overflow" vert="horz" wrap="square" lIns="91440" tIns="45720" rIns="91440" bIns="45720" numCol="1" spcCol="0" rtlCol="0" fromWordArt="0" anchor="t" anchorCtr="0" forceAA="0" upright="0" compatLnSpc="0">
+            <a:spAutoFit/>
+          </a:bodyPr>
+          <a:p>
+            <a:pPr algn="ctr">
+              <a:defRPr/>
+            </a:pPr>
+            <a:r>
+              <a:rPr sz="1400" b="0">
+                <a:latin typeface="IBM Plex Sans"/>
+              </a:rPr>
+              <a:t>Encryption </a:t>
+            </a:r>
+            <a:r>
+              <a:rPr sz="1400" b="0" lang="fr-FR">
+                <a:latin typeface="IBM Plex Sans"/>
+              </a:rPr>
+              <a:t>with </a:t>
+            </a:r>
+            <a:r>
+              <a:rPr sz="1400" b="0">
+                <a:latin typeface="IBM Plex Sans"/>
+              </a:rPr>
+              <a:t>public </a:t>
+            </a:r>
+            <a:r>
+              <a:rPr sz="1400" b="0" lang="fr-FR">
+                <a:latin typeface="IBM Plex Sans"/>
+              </a:rPr>
+              <a:t>key </a:t>
+            </a:r>
+            <a:r>
+              <a:rPr sz="1400" b="0">
+                <a:latin typeface="IBM Plex Sans"/>
+              </a:rPr>
+              <a:t/>
+            </a:r>
+            <a:endParaRPr sz="1400" b="0">
+              <a:latin typeface="IBM Plex Sans"/>
+              <a:ea typeface="IBM Plex Sans"/>
+              <a:cs typeface="IBM Plex Sans"/>
+            </a:endParaRPr>
+          </a:p>
+        </p:txBody>
+      </p:sp>
+      <p:sp>
+        <p:nvSpPr>
+          <p:cNvPr id="564805446" name=""/>
+          <p:cNvSpPr txBox="1"/>
+          <p:nvPr/>
+        </p:nvSpPr>
+        <p:spPr bwMode="auto">
+          <a:xfrm flipH="0" flipV="0">
+            <a:off x="3765199" y="5680215"/>
+            <a:ext cx="5043240" cy="335639"/>
+          </a:xfrm>
+          <a:prstGeom prst="rect">
+            <a:avLst/>
+          </a:prstGeom>
+          <a:noFill/>
+        </p:spPr>
+        <p:txBody>
+          <a:bodyPr vertOverflow="overflow" horzOverflow="overflow" vert="horz" wrap="square" lIns="91440" tIns="45720" rIns="91440" bIns="45720" numCol="1" spcCol="0" rtlCol="0" fromWordArt="0" anchor="t" anchorCtr="0" forceAA="0" upright="0" compatLnSpc="0">
+            <a:spAutoFit/>
+          </a:bodyPr>
+          <a:p>
+            <a:pPr algn="ctr">
+              <a:defRPr/>
+            </a:pPr>
+            <a:r>
+              <a:rPr sz="1600" b="0">
+                <a:latin typeface="IBM Plex Sans"/>
+              </a:rPr>
+              <a:t>Decryption </a:t>
+            </a:r>
+            <a:r>
+              <a:rPr sz="1600" b="0" lang="fr-FR">
+                <a:latin typeface="IBM Plex Sans"/>
+              </a:rPr>
+              <a:t>with </a:t>
+            </a:r>
+            <a:r>
+              <a:rPr sz="1600" b="0">
+                <a:latin typeface="IBM Plex Sans"/>
+              </a:rPr>
+              <a:t>private </a:t>
+            </a:r>
+            <a:r>
+              <a:rPr sz="1600" b="0" lang="fr-FR">
+                <a:latin typeface="IBM Plex Sans"/>
+              </a:rPr>
+              <a:t>key </a:t>
+            </a:r>
+            <a:r>
+              <a:rPr sz="1600" b="0">
+                <a:latin typeface="IBM Plex Sans"/>
+              </a:rPr>
+              <a:t/>
+            </a:r>
+            <a:endParaRPr sz="1600" b="0">
+              <a:latin typeface="IBM Plex Sans"/>
+              <a:ea typeface="IBM Plex Sans"/>
+              <a:cs typeface="IBM Plex Sans"/>
+            </a:endParaRPr>
+          </a:p>
+        </p:txBody>
+      </p:sp>
+      <p:sp>
+        <p:nvSpPr>
+          <p:cNvPr id="2117423457" name=""/>
+          <p:cNvSpPr/>
+          <p:nvPr/>
+        </p:nvSpPr>
+        <p:spPr bwMode="auto">
+          <a:xfrm flipH="0" flipV="0">
+            <a:off x="2720786" y="1056150"/>
+            <a:ext cx="1688108" cy="446106"/>
+          </a:xfrm>
+          <a:prstGeom prst="rect">
+            <a:avLst/>
+          </a:prstGeom>
+          <a:solidFill>
+            <a:srgbClr val="FFFFFF"/>
+          </a:solidFill>
+          <a:ln w="12700" cap="flat" cmpd="sng" algn="ctr">
+            <a:noFill/>
+            <a:prstDash val="solid"/>
+            <a:miter lim="800000"/>
+          </a:ln>
+        </p:spPr>
+        <p:style>
+          <a:lnRef idx="2">
+            <a:schemeClr val="accent1">
+              <a:shade val="50000"/>
+            </a:schemeClr>
+          </a:lnRef>
+          <a:fillRef idx="1">
+            <a:schemeClr val="accent1"/>
+          </a:fillRef>
+          <a:effectRef idx="0">
+            <a:schemeClr val="accent1"/>
+          </a:effectRef>
+          <a:fontRef idx="minor">
+            <a:schemeClr val="lt1"/>
+          </a:fontRef>
+        </p:style>
+        <p:txBody>
+          <a:bodyPr/>
+          <a:p>
+            <a:pPr>
+              <a:defRPr/>
+            </a:pPr>
+            <a:endParaRPr>
+              <a:solidFill>
+                <a:schemeClr val="bg1"/>
+              </a:solidFill>
+            </a:endParaRPr>
+          </a:p>
+        </p:txBody>
+      </p:sp>
+      <p:sp>
+        <p:nvSpPr>
+          <p:cNvPr id="1861164775" name=""/>
+          <p:cNvSpPr txBox="1"/>
+          <p:nvPr/>
+        </p:nvSpPr>
+        <p:spPr bwMode="auto">
+          <a:xfrm flipH="0" flipV="0">
+            <a:off x="1853931" y="1044696"/>
+            <a:ext cx="2138452" cy="457560"/>
+          </a:xfrm>
+          <a:prstGeom prst="rect">
+            <a:avLst/>
+          </a:prstGeom>
+          <a:noFill/>
+        </p:spPr>
+        <p:txBody>
+          <a:bodyPr vertOverflow="overflow" horzOverflow="overflow" vert="horz" wrap="square" lIns="91440" tIns="45720" rIns="91440" bIns="45720" numCol="1" spcCol="0" rtlCol="0" fromWordArt="0" anchor="t" anchorCtr="0" forceAA="0" upright="0" compatLnSpc="0">
+            <a:spAutoFit/>
+          </a:bodyPr>
+          <a:p>
+            <a:pPr algn="r">
+              <a:defRPr/>
+            </a:pPr>
+            <a:r>
+              <a:rPr sz="2400">
+                <a:latin typeface="IBM Plex Sans"/>
+              </a:rPr>
+              <a:t>Bitcoin</a:t>
+            </a:r>
+            <a:endParaRPr sz="2400">
+              <a:latin typeface="IBM Plex Sans"/>
+              <a:cs typeface="IBM Plex Sans"/>
+            </a:endParaRPr>
+          </a:p>
+        </p:txBody>
+      </p:sp>
+      <p:sp>
+        <p:nvSpPr>
+          <p:cNvPr id="1486006633" name=""/>
+          <p:cNvSpPr txBox="1"/>
+          <p:nvPr/>
+        </p:nvSpPr>
+        <p:spPr bwMode="auto">
+          <a:xfrm flipH="0" flipV="0">
+            <a:off x="2006330" y="4863123"/>
+            <a:ext cx="2138812" cy="457560"/>
+          </a:xfrm>
+          <a:prstGeom prst="rect">
+            <a:avLst/>
+          </a:prstGeom>
+          <a:solidFill>
+            <a:schemeClr val="bg1"/>
+          </a:solidFill>
+        </p:spPr>
+        <p:txBody>
+          <a:bodyPr vertOverflow="overflow" horzOverflow="overflow" vert="horz" wrap="square" lIns="91440" tIns="45720" rIns="91440" bIns="45720" numCol="1" spcCol="0" rtlCol="0" fromWordArt="0" anchor="t" anchorCtr="0" forceAA="0" upright="0" compatLnSpc="0">
+            <a:spAutoFit/>
+          </a:bodyPr>
+          <a:p>
+            <a:pPr algn="r">
+              <a:defRPr/>
+            </a:pPr>
+            <a:r>
+              <a:rPr sz="2400">
+                <a:latin typeface="IBM Plex Sans"/>
+              </a:rPr>
+              <a:t>Bitcoin</a:t>
+            </a:r>
+            <a:endParaRPr sz="2400">
+              <a:latin typeface="IBM Plex Sans"/>
+              <a:cs typeface="IBM Plex Sans"/>
+            </a:endParaRPr>
+          </a:p>
+        </p:txBody>
+      </p:sp>
     </p:spTree>
   </p:cSld>
   <p:clrMapOvr>
@@ -9673,7 +10822,7 @@
       </p:grpSpPr>
       <p:pic>
         <p:nvPicPr>
-          <p:cNvPr id="2037513630" name=""/>
+          <p:cNvPr id="281991235" name=""/>
           <p:cNvPicPr>
             <a:picLocks noChangeAspect="1"/>
           </p:cNvPicPr>
@@ -9728,7 +10877,7 @@
       </p:grpSpPr>
       <p:pic>
         <p:nvPicPr>
-          <p:cNvPr id="9864935" name=""/>
+          <p:cNvPr id="534118267" name=""/>
           <p:cNvPicPr>
             <a:picLocks noChangeAspect="1"/>
           </p:cNvPicPr>
@@ -9781,568 +10930,555 @@
           <a:chExt cx="0" cy="0"/>
         </a:xfrm>
       </p:grpSpPr>
-      <p:grpSp>
-        <p:nvGrpSpPr>
-          <p:cNvPr id="264086350" name=""/>
-          <p:cNvGrpSpPr/>
+      <p:pic>
+        <p:nvPicPr>
+          <p:cNvPr id="1149992560" name=""/>
+          <p:cNvPicPr>
+            <a:picLocks noChangeAspect="1"/>
+          </p:cNvPicPr>
           <p:nvPr/>
-        </p:nvGrpSpPr>
-        <p:grpSpPr bwMode="auto">
-          <a:xfrm>
-            <a:off x="1533582" y="159769"/>
-            <a:ext cx="9897157" cy="6069251"/>
-            <a:chOff x="0" y="0"/>
-            <a:chExt cx="9897157" cy="6069251"/>
-          </a:xfrm>
-        </p:grpSpPr>
-        <p:pic>
-          <p:nvPicPr>
-            <p:cNvPr id="1740608804" name=""/>
-            <p:cNvPicPr>
-              <a:picLocks noChangeAspect="1"/>
-            </p:cNvPicPr>
-            <p:nvPr/>
-          </p:nvPicPr>
-          <p:blipFill>
-            <a:blip r:embed="rId3"/>
-            <a:srcRect l="0" t="0" r="0" b="16973"/>
-            <a:stretch/>
-          </p:blipFill>
-          <p:spPr bwMode="auto">
-            <a:xfrm flipH="0" flipV="0">
-              <a:off x="29691" y="0"/>
-              <a:ext cx="9065446" cy="5428633"/>
-            </a:xfrm>
-            <a:prstGeom prst="rect">
-              <a:avLst/>
-            </a:prstGeom>
-          </p:spPr>
-        </p:pic>
-        <p:sp>
-          <p:nvSpPr>
-            <p:cNvPr id="948010094" name=""/>
-            <p:cNvSpPr/>
-            <p:nvPr/>
-          </p:nvSpPr>
-          <p:spPr bwMode="auto">
-            <a:xfrm flipH="0" flipV="0">
-              <a:off x="1458241" y="5440928"/>
-              <a:ext cx="523874" cy="361949"/>
-            </a:xfrm>
-            <a:prstGeom prst="rect">
-              <a:avLst/>
-            </a:prstGeom>
-            <a:solidFill>
-              <a:srgbClr val="FFFFFF"/>
-            </a:solidFill>
-            <a:ln w="12700" cap="flat" cmpd="sng" algn="ctr">
-              <a:noFill/>
-              <a:prstDash val="solid"/>
-              <a:miter lim="800000"/>
-            </a:ln>
-          </p:spPr>
-          <p:style>
-            <a:lnRef idx="2">
-              <a:schemeClr val="accent1">
-                <a:shade val="50000"/>
-              </a:schemeClr>
-            </a:lnRef>
-            <a:fillRef idx="1">
-              <a:schemeClr val="accent1"/>
-            </a:fillRef>
-            <a:effectRef idx="0">
-              <a:schemeClr val="accent1"/>
-            </a:effectRef>
-            <a:fontRef idx="minor">
-              <a:schemeClr val="lt1"/>
-            </a:fontRef>
-          </p:style>
-        </p:sp>
-        <p:sp>
-          <p:nvSpPr>
-            <p:cNvPr id="1865153022" name=""/>
-            <p:cNvSpPr/>
-            <p:nvPr/>
-          </p:nvSpPr>
-          <p:spPr bwMode="auto">
-            <a:xfrm flipH="0" flipV="0">
-              <a:off x="4165144" y="5440928"/>
-              <a:ext cx="523874" cy="361949"/>
-            </a:xfrm>
-            <a:prstGeom prst="rect">
-              <a:avLst/>
-            </a:prstGeom>
-            <a:solidFill>
-              <a:srgbClr val="FFFFFF"/>
-            </a:solidFill>
-            <a:ln w="12700" cap="flat" cmpd="sng" algn="ctr">
-              <a:noFill/>
-              <a:prstDash val="solid"/>
-              <a:miter lim="800000"/>
-            </a:ln>
-          </p:spPr>
-          <p:style>
-            <a:lnRef idx="2">
-              <a:schemeClr val="accent1">
-                <a:shade val="50000"/>
-              </a:schemeClr>
-            </a:lnRef>
-            <a:fillRef idx="1">
-              <a:schemeClr val="accent1"/>
-            </a:fillRef>
-            <a:effectRef idx="0">
-              <a:schemeClr val="accent1"/>
-            </a:effectRef>
-            <a:fontRef idx="minor">
-              <a:schemeClr val="lt1"/>
-            </a:fontRef>
-          </p:style>
-        </p:sp>
-        <p:sp>
-          <p:nvSpPr>
-            <p:cNvPr id="2110959219" name=""/>
-            <p:cNvSpPr/>
-            <p:nvPr/>
-          </p:nvSpPr>
-          <p:spPr bwMode="auto">
-            <a:xfrm flipH="0" flipV="0">
-              <a:off x="6890746" y="5440928"/>
-              <a:ext cx="523874" cy="361949"/>
-            </a:xfrm>
-            <a:prstGeom prst="rect">
-              <a:avLst/>
-            </a:prstGeom>
-            <a:solidFill>
-              <a:srgbClr val="FFFFFF"/>
-            </a:solidFill>
-            <a:ln w="12700" cap="flat" cmpd="sng" algn="ctr">
-              <a:noFill/>
-              <a:prstDash val="solid"/>
-              <a:miter lim="800000"/>
-            </a:ln>
-          </p:spPr>
-          <p:style>
-            <a:lnRef idx="2">
-              <a:schemeClr val="accent1">
-                <a:shade val="50000"/>
-              </a:schemeClr>
-            </a:lnRef>
-            <a:fillRef idx="1">
-              <a:schemeClr val="accent1"/>
-            </a:fillRef>
-            <a:effectRef idx="0">
-              <a:schemeClr val="accent1"/>
-            </a:effectRef>
-            <a:fontRef idx="minor">
-              <a:schemeClr val="lt1"/>
-            </a:fontRef>
-          </p:style>
-        </p:sp>
-        <p:sp>
-          <p:nvSpPr>
-            <p:cNvPr id="149984963" name=""/>
-            <p:cNvSpPr/>
-            <p:nvPr/>
-          </p:nvSpPr>
-          <p:spPr bwMode="auto">
-            <a:xfrm flipH="0" flipV="0">
-              <a:off x="1429366" y="5197383"/>
-              <a:ext cx="762300" cy="285390"/>
-            </a:xfrm>
-            <a:prstGeom prst="rect">
-              <a:avLst/>
-            </a:prstGeom>
-            <a:solidFill>
-              <a:srgbClr val="FFFFFF"/>
-            </a:solidFill>
-            <a:ln w="12700" cap="flat" cmpd="sng" algn="ctr">
-              <a:noFill/>
-              <a:prstDash val="solid"/>
-              <a:miter lim="800000"/>
-            </a:ln>
-          </p:spPr>
-          <p:style>
-            <a:lnRef idx="2">
-              <a:schemeClr val="accent1">
-                <a:shade val="50000"/>
-              </a:schemeClr>
-            </a:lnRef>
-            <a:fillRef idx="1">
-              <a:schemeClr val="accent1"/>
-            </a:fillRef>
-            <a:effectRef idx="0">
-              <a:schemeClr val="accent1"/>
-            </a:effectRef>
-            <a:fontRef idx="minor">
-              <a:schemeClr val="lt1"/>
-            </a:fontRef>
-          </p:style>
-          <p:txBody>
-            <a:bodyPr/>
-            <a:p>
-              <a:pPr>
-                <a:defRPr/>
-              </a:pPr>
-              <a:endParaRPr sz="2200">
+        </p:nvPicPr>
+        <p:blipFill>
+          <a:blip r:embed="rId3"/>
+          <a:srcRect l="0" t="0" r="0" b="16973"/>
+          <a:stretch/>
+        </p:blipFill>
+        <p:spPr bwMode="auto">
+          <a:xfrm flipH="0" flipV="0">
+            <a:off x="1563274" y="159770"/>
+            <a:ext cx="9065446" cy="5428633"/>
+          </a:xfrm>
+          <a:prstGeom prst="rect">
+            <a:avLst/>
+          </a:prstGeom>
+        </p:spPr>
+      </p:pic>
+      <p:sp>
+        <p:nvSpPr>
+          <p:cNvPr id="1056831080" name=""/>
+          <p:cNvSpPr/>
+          <p:nvPr/>
+        </p:nvSpPr>
+        <p:spPr bwMode="auto">
+          <a:xfrm flipH="0" flipV="0">
+            <a:off x="2991824" y="5600699"/>
+            <a:ext cx="523874" cy="361949"/>
+          </a:xfrm>
+          <a:prstGeom prst="rect">
+            <a:avLst/>
+          </a:prstGeom>
+          <a:solidFill>
+            <a:srgbClr val="FFFFFF"/>
+          </a:solidFill>
+          <a:ln w="12700" cap="flat" cmpd="sng" algn="ctr">
+            <a:noFill/>
+            <a:prstDash val="solid"/>
+            <a:miter lim="800000"/>
+          </a:ln>
+        </p:spPr>
+        <p:style>
+          <a:lnRef idx="2">
+            <a:schemeClr val="accent1">
+              <a:shade val="50000"/>
+            </a:schemeClr>
+          </a:lnRef>
+          <a:fillRef idx="1">
+            <a:schemeClr val="accent1"/>
+          </a:fillRef>
+          <a:effectRef idx="0">
+            <a:schemeClr val="accent1"/>
+          </a:effectRef>
+          <a:fontRef idx="minor">
+            <a:schemeClr val="lt1"/>
+          </a:fontRef>
+        </p:style>
+        <p:txBody>
+          <a:bodyPr/>
+          <a:p/>
+        </p:txBody>
+      </p:sp>
+      <p:sp>
+        <p:nvSpPr>
+          <p:cNvPr id="661749794" name=""/>
+          <p:cNvSpPr/>
+          <p:nvPr/>
+        </p:nvSpPr>
+        <p:spPr bwMode="auto">
+          <a:xfrm flipH="0" flipV="0">
+            <a:off x="5698727" y="5600699"/>
+            <a:ext cx="523874" cy="361949"/>
+          </a:xfrm>
+          <a:prstGeom prst="rect">
+            <a:avLst/>
+          </a:prstGeom>
+          <a:solidFill>
+            <a:srgbClr val="FFFFFF"/>
+          </a:solidFill>
+          <a:ln w="12700" cap="flat" cmpd="sng" algn="ctr">
+            <a:noFill/>
+            <a:prstDash val="solid"/>
+            <a:miter lim="800000"/>
+          </a:ln>
+        </p:spPr>
+        <p:style>
+          <a:lnRef idx="2">
+            <a:schemeClr val="accent1">
+              <a:shade val="50000"/>
+            </a:schemeClr>
+          </a:lnRef>
+          <a:fillRef idx="1">
+            <a:schemeClr val="accent1"/>
+          </a:fillRef>
+          <a:effectRef idx="0">
+            <a:schemeClr val="accent1"/>
+          </a:effectRef>
+          <a:fontRef idx="minor">
+            <a:schemeClr val="lt1"/>
+          </a:fontRef>
+        </p:style>
+        <p:txBody>
+          <a:bodyPr/>
+          <a:p/>
+        </p:txBody>
+      </p:sp>
+      <p:sp>
+        <p:nvSpPr>
+          <p:cNvPr id="370698139" name=""/>
+          <p:cNvSpPr/>
+          <p:nvPr/>
+        </p:nvSpPr>
+        <p:spPr bwMode="auto">
+          <a:xfrm flipH="0" flipV="0">
+            <a:off x="8424329" y="5600699"/>
+            <a:ext cx="523874" cy="361949"/>
+          </a:xfrm>
+          <a:prstGeom prst="rect">
+            <a:avLst/>
+          </a:prstGeom>
+          <a:solidFill>
+            <a:srgbClr val="FFFFFF"/>
+          </a:solidFill>
+          <a:ln w="12700" cap="flat" cmpd="sng" algn="ctr">
+            <a:noFill/>
+            <a:prstDash val="solid"/>
+            <a:miter lim="800000"/>
+          </a:ln>
+        </p:spPr>
+        <p:style>
+          <a:lnRef idx="2">
+            <a:schemeClr val="accent1">
+              <a:shade val="50000"/>
+            </a:schemeClr>
+          </a:lnRef>
+          <a:fillRef idx="1">
+            <a:schemeClr val="accent1"/>
+          </a:fillRef>
+          <a:effectRef idx="0">
+            <a:schemeClr val="accent1"/>
+          </a:effectRef>
+          <a:fontRef idx="minor">
+            <a:schemeClr val="lt1"/>
+          </a:fontRef>
+        </p:style>
+        <p:txBody>
+          <a:bodyPr/>
+          <a:p/>
+        </p:txBody>
+      </p:sp>
+      <p:sp>
+        <p:nvSpPr>
+          <p:cNvPr id="797094744" name=""/>
+          <p:cNvSpPr/>
+          <p:nvPr/>
+        </p:nvSpPr>
+        <p:spPr bwMode="auto">
+          <a:xfrm flipH="0" flipV="0">
+            <a:off x="2962949" y="5357154"/>
+            <a:ext cx="762300" cy="285390"/>
+          </a:xfrm>
+          <a:prstGeom prst="rect">
+            <a:avLst/>
+          </a:prstGeom>
+          <a:solidFill>
+            <a:srgbClr val="FFFFFF"/>
+          </a:solidFill>
+          <a:ln w="12700" cap="flat" cmpd="sng" algn="ctr">
+            <a:noFill/>
+            <a:prstDash val="solid"/>
+            <a:miter lim="800000"/>
+          </a:ln>
+        </p:spPr>
+        <p:style>
+          <a:lnRef idx="2">
+            <a:schemeClr val="accent1">
+              <a:shade val="50000"/>
+            </a:schemeClr>
+          </a:lnRef>
+          <a:fillRef idx="1">
+            <a:schemeClr val="accent1"/>
+          </a:fillRef>
+          <a:effectRef idx="0">
+            <a:schemeClr val="accent1"/>
+          </a:effectRef>
+          <a:fontRef idx="minor">
+            <a:schemeClr val="lt1"/>
+          </a:fontRef>
+        </p:style>
+        <p:txBody>
+          <a:bodyPr/>
+          <a:p>
+            <a:pPr>
+              <a:defRPr/>
+            </a:pPr>
+            <a:endParaRPr sz="2200">
+              <a:latin typeface="IBM Plex Sans"/>
+              <a:cs typeface="IBM Plex Sans"/>
+            </a:endParaRPr>
+          </a:p>
+        </p:txBody>
+      </p:sp>
+      <p:sp>
+        <p:nvSpPr>
+          <p:cNvPr id="153823412" name=""/>
+          <p:cNvSpPr/>
+          <p:nvPr/>
+        </p:nvSpPr>
+        <p:spPr bwMode="auto">
+          <a:xfrm flipH="0" flipV="0">
+            <a:off x="3677625" y="4867453"/>
+            <a:ext cx="647698" cy="228600"/>
+          </a:xfrm>
+          <a:prstGeom prst="rect">
+            <a:avLst/>
+          </a:prstGeom>
+          <a:solidFill>
+            <a:srgbClr val="FFFFFF"/>
+          </a:solidFill>
+          <a:ln w="12700" cap="flat" cmpd="sng" algn="ctr">
+            <a:noFill/>
+            <a:prstDash val="solid"/>
+            <a:miter lim="800000"/>
+          </a:ln>
+        </p:spPr>
+        <p:style>
+          <a:lnRef idx="2">
+            <a:schemeClr val="accent1">
+              <a:shade val="50000"/>
+            </a:schemeClr>
+          </a:lnRef>
+          <a:fillRef idx="1">
+            <a:schemeClr val="accent1"/>
+          </a:fillRef>
+          <a:effectRef idx="0">
+            <a:schemeClr val="accent1"/>
+          </a:effectRef>
+          <a:fontRef idx="minor">
+            <a:schemeClr val="lt1"/>
+          </a:fontRef>
+        </p:style>
+        <p:txBody>
+          <a:bodyPr/>
+          <a:p>
+            <a:pPr>
+              <a:defRPr/>
+            </a:pPr>
+            <a:endParaRPr sz="2200">
+              <a:latin typeface="IBM Plex Sans"/>
+              <a:cs typeface="IBM Plex Sans"/>
+            </a:endParaRPr>
+          </a:p>
+        </p:txBody>
+      </p:sp>
+      <p:sp>
+        <p:nvSpPr>
+          <p:cNvPr id="2108527031" name=""/>
+          <p:cNvSpPr txBox="1"/>
+          <p:nvPr/>
+        </p:nvSpPr>
+        <p:spPr bwMode="auto">
+          <a:xfrm flipH="0" flipV="0">
+            <a:off x="7346907" y="5801943"/>
+            <a:ext cx="4083833" cy="427079"/>
+          </a:xfrm>
+          <a:prstGeom prst="rect">
+            <a:avLst/>
+          </a:prstGeom>
+          <a:noFill/>
+        </p:spPr>
+        <p:txBody>
+          <a:bodyPr vertOverflow="overflow" horzOverflow="overflow" vert="horz" wrap="square" lIns="91440" tIns="45720" rIns="91440" bIns="45720" numCol="1" spcCol="0" rtlCol="0" fromWordArt="0" anchor="t" anchorCtr="0" forceAA="0" upright="0" compatLnSpc="0">
+            <a:spAutoFit/>
+          </a:bodyPr>
+          <a:p>
+            <a:pPr algn="ctr">
+              <a:defRPr/>
+            </a:pPr>
+            <a:r>
+              <a:rPr sz="2200">
                 <a:latin typeface="IBM Plex Sans"/>
-                <a:cs typeface="IBM Plex Sans"/>
-              </a:endParaRPr>
-            </a:p>
-          </p:txBody>
-        </p:sp>
-        <p:sp>
-          <p:nvSpPr>
-            <p:cNvPr id="1959587101" name=""/>
-            <p:cNvSpPr/>
-            <p:nvPr/>
-          </p:nvSpPr>
-          <p:spPr bwMode="auto">
-            <a:xfrm flipH="0" flipV="0">
-              <a:off x="2144043" y="4707682"/>
-              <a:ext cx="647698" cy="228600"/>
-            </a:xfrm>
-            <a:prstGeom prst="rect">
-              <a:avLst/>
-            </a:prstGeom>
-            <a:solidFill>
-              <a:srgbClr val="FFFFFF"/>
-            </a:solidFill>
-            <a:ln w="12700" cap="flat" cmpd="sng" algn="ctr">
-              <a:noFill/>
-              <a:prstDash val="solid"/>
-              <a:miter lim="800000"/>
-            </a:ln>
-          </p:spPr>
-          <p:style>
-            <a:lnRef idx="2">
-              <a:schemeClr val="accent1">
-                <a:shade val="50000"/>
-              </a:schemeClr>
-            </a:lnRef>
-            <a:fillRef idx="1">
-              <a:schemeClr val="accent1"/>
-            </a:fillRef>
-            <a:effectRef idx="0">
-              <a:schemeClr val="accent1"/>
-            </a:effectRef>
-            <a:fontRef idx="minor">
-              <a:schemeClr val="lt1"/>
-            </a:fontRef>
-          </p:style>
-          <p:txBody>
-            <a:bodyPr/>
-            <a:p>
-              <a:pPr>
-                <a:defRPr/>
-              </a:pPr>
-              <a:endParaRPr sz="2200">
+              </a:rPr>
+              <a:t>Distributed networks.</a:t>
+            </a:r>
+            <a:endParaRPr sz="2200">
+              <a:latin typeface="IBM Plex Sans"/>
+              <a:cs typeface="IBM Plex Sans"/>
+            </a:endParaRPr>
+          </a:p>
+        </p:txBody>
+      </p:sp>
+      <p:sp>
+        <p:nvSpPr>
+          <p:cNvPr id="794602628" name=""/>
+          <p:cNvSpPr txBox="1"/>
+          <p:nvPr/>
+        </p:nvSpPr>
+        <p:spPr bwMode="auto">
+          <a:xfrm flipH="0" flipV="0">
+            <a:off x="2925666" y="5337383"/>
+            <a:ext cx="1448440" cy="305159"/>
+          </a:xfrm>
+          <a:prstGeom prst="rect">
+            <a:avLst/>
+          </a:prstGeom>
+          <a:noFill/>
+        </p:spPr>
+        <p:txBody>
+          <a:bodyPr vertOverflow="overflow" horzOverflow="overflow" vert="horz" wrap="square" lIns="91440" tIns="45720" rIns="91440" bIns="45720" numCol="1" spcCol="0" rtlCol="0" fromWordArt="0" anchor="t" anchorCtr="0" forceAA="0" upright="0" compatLnSpc="0">
+            <a:spAutoFit/>
+          </a:bodyPr>
+          <a:p>
+            <a:pPr>
+              <a:defRPr/>
+            </a:pPr>
+            <a:r>
+              <a:rPr sz="1400">
                 <a:latin typeface="IBM Plex Sans"/>
-                <a:cs typeface="IBM Plex Sans"/>
-              </a:endParaRPr>
-            </a:p>
-          </p:txBody>
-        </p:sp>
-        <p:sp>
-          <p:nvSpPr>
-            <p:cNvPr id="1525536756" name=""/>
-            <p:cNvSpPr txBox="1"/>
-            <p:nvPr/>
-          </p:nvSpPr>
-          <p:spPr bwMode="auto">
-            <a:xfrm flipH="0" flipV="0">
-              <a:off x="5813324" y="5642172"/>
-              <a:ext cx="4083833" cy="427079"/>
-            </a:xfrm>
-            <a:prstGeom prst="rect">
-              <a:avLst/>
-            </a:prstGeom>
+              </a:rPr>
+              <a:t>Station</a:t>
+            </a:r>
+            <a:endParaRPr sz="1400">
+              <a:latin typeface="IBM Plex Sans"/>
+              <a:cs typeface="IBM Plex Sans"/>
+            </a:endParaRPr>
+          </a:p>
+        </p:txBody>
+      </p:sp>
+      <p:sp>
+        <p:nvSpPr>
+          <p:cNvPr id="1833248220" name=""/>
+          <p:cNvSpPr txBox="1"/>
+          <p:nvPr/>
+        </p:nvSpPr>
+        <p:spPr bwMode="auto">
+          <a:xfrm flipH="0" flipV="0">
+            <a:off x="3677625" y="4829175"/>
+            <a:ext cx="1183282" cy="305159"/>
+          </a:xfrm>
+          <a:prstGeom prst="rect">
+            <a:avLst/>
+          </a:prstGeom>
+          <a:noFill/>
+        </p:spPr>
+        <p:txBody>
+          <a:bodyPr vertOverflow="overflow" horzOverflow="overflow" vert="horz" wrap="square" lIns="91440" tIns="45720" rIns="91440" bIns="45720" numCol="1" spcCol="0" rtlCol="0" fromWordArt="0" anchor="t" anchorCtr="0" forceAA="0" upright="0" compatLnSpc="0">
+            <a:spAutoFit/>
+          </a:bodyPr>
+          <a:p>
+            <a:pPr>
+              <a:defRPr/>
+            </a:pPr>
+            <a:r>
+              <a:rPr sz="1400">
+                <a:latin typeface="IBM Plex Sans"/>
+              </a:rPr>
+              <a:t>Link</a:t>
+            </a:r>
+            <a:endParaRPr sz="1400">
+              <a:latin typeface="IBM Plex Sans"/>
+              <a:ea typeface="IBM Plex Sans"/>
+              <a:cs typeface="IBM Plex Sans"/>
+            </a:endParaRPr>
+          </a:p>
+        </p:txBody>
+      </p:sp>
+      <p:sp>
+        <p:nvSpPr>
+          <p:cNvPr id="1083863093" name=""/>
+          <p:cNvSpPr/>
+          <p:nvPr/>
+        </p:nvSpPr>
+        <p:spPr bwMode="auto">
+          <a:xfrm flipH="0" flipV="0">
+            <a:off x="3458550" y="4867453"/>
+            <a:ext cx="266699" cy="152579"/>
+          </a:xfrm>
+          <a:prstGeom prst="leftArrow">
+            <a:avLst>
+              <a:gd name="adj1" fmla="val 50000"/>
+              <a:gd name="adj2" fmla="val 83333"/>
+            </a:avLst>
+          </a:prstGeom>
+          <a:solidFill>
+            <a:schemeClr val="tx1"/>
+          </a:solidFill>
+          <a:ln w="12700" cap="flat" cmpd="sng" algn="ctr">
             <a:noFill/>
-          </p:spPr>
-          <p:txBody>
-            <a:bodyPr vertOverflow="overflow" horzOverflow="overflow" vert="horz" wrap="square" lIns="91440" tIns="45720" rIns="91440" bIns="45720" numCol="1" spcCol="0" rtlCol="0" fromWordArt="0" anchor="t" anchorCtr="0" forceAA="0" upright="0" compatLnSpc="0">
-              <a:spAutoFit/>
-            </a:bodyPr>
-            <a:p>
-              <a:pPr algn="ctr">
-                <a:defRPr/>
-              </a:pPr>
-              <a:r>
-                <a:rPr sz="2200">
-                  <a:latin typeface="IBM Plex Sans"/>
-                  <a:ea typeface="IBM Plex Sans"/>
-                  <a:cs typeface="IBM Plex Sans"/>
-                </a:rPr>
-                <a:t>Distributed networks.</a:t>
-              </a:r>
-              <a:endParaRPr sz="2200">
+            <a:prstDash val="solid"/>
+            <a:miter lim="800000"/>
+          </a:ln>
+        </p:spPr>
+        <p:style>
+          <a:lnRef idx="2">
+            <a:schemeClr val="accent1">
+              <a:shade val="50000"/>
+            </a:schemeClr>
+          </a:lnRef>
+          <a:fillRef idx="1">
+            <a:schemeClr val="accent1"/>
+          </a:fillRef>
+          <a:effectRef idx="0">
+            <a:schemeClr val="accent1"/>
+          </a:effectRef>
+          <a:fontRef idx="minor">
+            <a:schemeClr val="lt1"/>
+          </a:fontRef>
+        </p:style>
+        <p:txBody>
+          <a:bodyPr/>
+          <a:p>
+            <a:pPr>
+              <a:defRPr/>
+            </a:pPr>
+            <a:endParaRPr/>
+          </a:p>
+        </p:txBody>
+      </p:sp>
+      <p:sp>
+        <p:nvSpPr>
+          <p:cNvPr id="1980293751" name=""/>
+          <p:cNvSpPr/>
+          <p:nvPr/>
+        </p:nvSpPr>
+        <p:spPr bwMode="auto">
+          <a:xfrm rot="2286170" flipH="0" flipV="0">
+            <a:off x="2724120" y="5303120"/>
+            <a:ext cx="266698" cy="152579"/>
+          </a:xfrm>
+          <a:prstGeom prst="leftArrow">
+            <a:avLst>
+              <a:gd name="adj1" fmla="val 50000"/>
+              <a:gd name="adj2" fmla="val 83333"/>
+            </a:avLst>
+          </a:prstGeom>
+          <a:solidFill>
+            <a:schemeClr val="tx1"/>
+          </a:solidFill>
+          <a:ln w="12700" cap="flat" cmpd="sng" algn="ctr">
+            <a:noFill/>
+            <a:prstDash val="solid"/>
+            <a:miter lim="800000"/>
+          </a:ln>
+        </p:spPr>
+        <p:style>
+          <a:lnRef idx="2">
+            <a:schemeClr val="accent1">
+              <a:shade val="50000"/>
+            </a:schemeClr>
+          </a:lnRef>
+          <a:fillRef idx="1">
+            <a:schemeClr val="accent1"/>
+          </a:fillRef>
+          <a:effectRef idx="0">
+            <a:schemeClr val="accent1"/>
+          </a:effectRef>
+          <a:fontRef idx="minor">
+            <a:schemeClr val="lt1"/>
+          </a:fontRef>
+        </p:style>
+        <p:txBody>
+          <a:bodyPr/>
+          <a:p>
+            <a:pPr>
+              <a:defRPr/>
+            </a:pPr>
+            <a:endParaRPr/>
+          </a:p>
+        </p:txBody>
+      </p:sp>
+      <p:sp>
+        <p:nvSpPr>
+          <p:cNvPr id="1827644842" name=""/>
+          <p:cNvSpPr txBox="1"/>
+          <p:nvPr/>
+        </p:nvSpPr>
+        <p:spPr bwMode="auto">
+          <a:xfrm rot="0" flipH="0" flipV="0">
+            <a:off x="1533582" y="5801943"/>
+            <a:ext cx="2763487" cy="427079"/>
+          </a:xfrm>
+          <a:prstGeom prst="rect">
+            <a:avLst/>
+          </a:prstGeom>
+          <a:noFill/>
+        </p:spPr>
+        <p:txBody>
+          <a:bodyPr vertOverflow="overflow" horzOverflow="overflow" vert="horz" wrap="square" lIns="91440" tIns="45720" rIns="91440" bIns="45720" numCol="1" spcCol="0" rtlCol="0" fromWordArt="0" anchor="t" anchorCtr="0" forceAA="0" upright="0" compatLnSpc="0">
+            <a:spAutoFit/>
+          </a:bodyPr>
+          <a:p>
+            <a:pPr algn="ctr">
+              <a:defRPr/>
+            </a:pPr>
+            <a:r>
+              <a:rPr sz="2200" lang="fr-FR">
                 <a:latin typeface="IBM Plex Sans"/>
-                <a:cs typeface="IBM Plex Sans"/>
-              </a:endParaRPr>
-            </a:p>
-          </p:txBody>
-        </p:sp>
-        <p:sp>
-          <p:nvSpPr>
-            <p:cNvPr id="278027353" name=""/>
-            <p:cNvSpPr txBox="1"/>
-            <p:nvPr/>
-          </p:nvSpPr>
-          <p:spPr bwMode="auto">
-            <a:xfrm flipH="0" flipV="0">
-              <a:off x="1392084" y="5177612"/>
-              <a:ext cx="1448440" cy="305159"/>
-            </a:xfrm>
-            <a:prstGeom prst="rect">
-              <a:avLst/>
-            </a:prstGeom>
-            <a:noFill/>
-          </p:spPr>
-          <p:txBody>
-            <a:bodyPr vertOverflow="overflow" horzOverflow="overflow" vert="horz" wrap="square" lIns="91440" tIns="45720" rIns="91440" bIns="45720" numCol="1" spcCol="0" rtlCol="0" fromWordArt="0" anchor="t" anchorCtr="0" forceAA="0" upright="0" compatLnSpc="0">
-              <a:spAutoFit/>
-            </a:bodyPr>
-            <a:p>
-              <a:pPr>
-                <a:defRPr/>
-              </a:pPr>
-              <a:r>
-                <a:rPr sz="1400">
-                  <a:latin typeface="IBM Plex Sans"/>
-                  <a:ea typeface="IBM Plex Sans"/>
-                  <a:cs typeface="IBM Plex Sans"/>
-                </a:rPr>
-                <a:t>Station</a:t>
-              </a:r>
-              <a:endParaRPr sz="1400">
+              </a:rPr>
+              <a:t>Centralisation</a:t>
+            </a:r>
+            <a:endParaRPr sz="2200">
+              <a:latin typeface="IBM Plex Sans"/>
+              <a:cs typeface="IBM Plex Sans"/>
+            </a:endParaRPr>
+          </a:p>
+        </p:txBody>
+      </p:sp>
+      <p:sp>
+        <p:nvSpPr>
+          <p:cNvPr id="414344841" name=""/>
+          <p:cNvSpPr txBox="1"/>
+          <p:nvPr/>
+        </p:nvSpPr>
+        <p:spPr bwMode="auto">
+          <a:xfrm rot="0" flipH="0" flipV="0">
+            <a:off x="4494953" y="5801943"/>
+            <a:ext cx="2851953" cy="427079"/>
+          </a:xfrm>
+          <a:prstGeom prst="rect">
+            <a:avLst/>
+          </a:prstGeom>
+          <a:noFill/>
+        </p:spPr>
+        <p:txBody>
+          <a:bodyPr vertOverflow="overflow" horzOverflow="overflow" vert="horz" wrap="square" lIns="91440" tIns="45720" rIns="91440" bIns="45720" numCol="1" spcCol="0" rtlCol="0" fromWordArt="0" anchor="t" anchorCtr="0" forceAA="0" upright="0" compatLnSpc="0">
+            <a:spAutoFit/>
+          </a:bodyPr>
+          <a:p>
+            <a:pPr algn="ctr">
+              <a:defRPr/>
+            </a:pPr>
+            <a:r>
+              <a:rPr sz="2200" lang="fr-FR">
                 <a:latin typeface="IBM Plex Sans"/>
-                <a:cs typeface="IBM Plex Sans"/>
-              </a:endParaRPr>
-            </a:p>
-          </p:txBody>
-        </p:sp>
-        <p:sp>
-          <p:nvSpPr>
-            <p:cNvPr id="245396164" name=""/>
-            <p:cNvSpPr txBox="1"/>
-            <p:nvPr/>
-          </p:nvSpPr>
-          <p:spPr bwMode="auto">
-            <a:xfrm flipH="0" flipV="0">
-              <a:off x="2144043" y="4669404"/>
-              <a:ext cx="921958" cy="305159"/>
-            </a:xfrm>
-            <a:prstGeom prst="rect">
-              <a:avLst/>
-            </a:prstGeom>
-            <a:noFill/>
-          </p:spPr>
-          <p:txBody>
-            <a:bodyPr vertOverflow="overflow" horzOverflow="overflow" vert="horz" wrap="square" lIns="91440" tIns="45720" rIns="91440" bIns="45720" numCol="1" spcCol="0" rtlCol="0" fromWordArt="0" anchor="t" anchorCtr="0" forceAA="0" upright="0" compatLnSpc="0">
-              <a:spAutoFit/>
-            </a:bodyPr>
-            <a:p>
-              <a:pPr>
-                <a:defRPr/>
-              </a:pPr>
-              <a:r>
-                <a:rPr sz="1400">
-                  <a:latin typeface="IBM Plex Sans"/>
-                  <a:ea typeface="IBM Plex Sans"/>
-                  <a:cs typeface="IBM Plex Sans"/>
-                </a:rPr>
-                <a:t>Link</a:t>
-              </a:r>
-              <a:endParaRPr sz="1400">
-                <a:latin typeface="IBM Plex Sans"/>
-                <a:ea typeface="IBM Plex Sans"/>
-                <a:cs typeface="IBM Plex Sans"/>
-              </a:endParaRPr>
-            </a:p>
-          </p:txBody>
-        </p:sp>
-        <p:sp>
-          <p:nvSpPr>
-            <p:cNvPr id="1991108817" name=""/>
-            <p:cNvSpPr/>
-            <p:nvPr/>
-          </p:nvSpPr>
-          <p:spPr bwMode="auto">
-            <a:xfrm flipH="0" flipV="0">
-              <a:off x="1924967" y="4707682"/>
-              <a:ext cx="266699" cy="152579"/>
-            </a:xfrm>
-            <a:prstGeom prst="leftArrow">
-              <a:avLst>
-                <a:gd name="adj1" fmla="val 50000"/>
-                <a:gd name="adj2" fmla="val 83333"/>
-              </a:avLst>
-            </a:prstGeom>
-            <a:solidFill>
-              <a:schemeClr val="tx1"/>
-            </a:solidFill>
-            <a:ln w="12700" cap="flat" cmpd="sng" algn="ctr">
-              <a:noFill/>
-              <a:prstDash val="solid"/>
-              <a:miter lim="800000"/>
-            </a:ln>
-          </p:spPr>
-          <p:style>
-            <a:lnRef idx="2">
-              <a:schemeClr val="accent1">
-                <a:shade val="50000"/>
-              </a:schemeClr>
-            </a:lnRef>
-            <a:fillRef idx="1">
-              <a:schemeClr val="accent1"/>
-            </a:fillRef>
-            <a:effectRef idx="0">
-              <a:schemeClr val="accent1"/>
-            </a:effectRef>
-            <a:fontRef idx="minor">
-              <a:schemeClr val="lt1"/>
-            </a:fontRef>
-          </p:style>
-          <p:txBody>
-            <a:bodyPr/>
-            <a:p>
-              <a:pPr>
-                <a:defRPr/>
-              </a:pPr>
-              <a:endParaRPr/>
-            </a:p>
-          </p:txBody>
-        </p:sp>
-        <p:sp>
-          <p:nvSpPr>
-            <p:cNvPr id="1935356810" name=""/>
-            <p:cNvSpPr/>
-            <p:nvPr/>
-          </p:nvSpPr>
-          <p:spPr bwMode="auto">
-            <a:xfrm rot="2286170" flipH="0" flipV="0">
-              <a:off x="1190538" y="5143349"/>
-              <a:ext cx="266698" cy="152579"/>
-            </a:xfrm>
-            <a:prstGeom prst="leftArrow">
-              <a:avLst>
-                <a:gd name="adj1" fmla="val 50000"/>
-                <a:gd name="adj2" fmla="val 83333"/>
-              </a:avLst>
-            </a:prstGeom>
-            <a:solidFill>
-              <a:schemeClr val="tx1"/>
-            </a:solidFill>
-            <a:ln w="12700" cap="flat" cmpd="sng" algn="ctr">
-              <a:noFill/>
-              <a:prstDash val="solid"/>
-              <a:miter lim="800000"/>
-            </a:ln>
-          </p:spPr>
-          <p:style>
-            <a:lnRef idx="2">
-              <a:schemeClr val="accent1">
-                <a:shade val="50000"/>
-              </a:schemeClr>
-            </a:lnRef>
-            <a:fillRef idx="1">
-              <a:schemeClr val="accent1"/>
-            </a:fillRef>
-            <a:effectRef idx="0">
-              <a:schemeClr val="accent1"/>
-            </a:effectRef>
-            <a:fontRef idx="minor">
-              <a:schemeClr val="lt1"/>
-            </a:fontRef>
-          </p:style>
-          <p:txBody>
-            <a:bodyPr/>
-            <a:p>
-              <a:pPr>
-                <a:defRPr/>
-              </a:pPr>
-              <a:endParaRPr/>
-            </a:p>
-          </p:txBody>
-        </p:sp>
-        <p:sp>
-          <p:nvSpPr>
-            <p:cNvPr id="189378415" name=""/>
-            <p:cNvSpPr txBox="1"/>
-            <p:nvPr/>
-          </p:nvSpPr>
-          <p:spPr bwMode="auto">
-            <a:xfrm rot="0" flipH="0" flipV="0">
-              <a:off x="0" y="5642172"/>
-              <a:ext cx="2763487" cy="427079"/>
-            </a:xfrm>
-            <a:prstGeom prst="rect">
-              <a:avLst/>
-            </a:prstGeom>
-            <a:noFill/>
-          </p:spPr>
-          <p:txBody>
-            <a:bodyPr vertOverflow="overflow" horzOverflow="overflow" vert="horz" wrap="square" lIns="91440" tIns="45720" rIns="91440" bIns="45720" numCol="1" spcCol="0" rtlCol="0" fromWordArt="0" anchor="t" anchorCtr="0" forceAA="0" upright="0" compatLnSpc="0">
-              <a:spAutoFit/>
-            </a:bodyPr>
-            <a:p>
-              <a:pPr algn="ctr">
-                <a:defRPr/>
-              </a:pPr>
-              <a:r>
-                <a:rPr lang="fr-FR" sz="2200">
-                  <a:latin typeface="IBM Plex Sans"/>
-                  <a:ea typeface="IBM Plex Sans"/>
-                  <a:cs typeface="IBM Plex Sans"/>
-                </a:rPr>
-                <a:t>Centralisation</a:t>
-              </a:r>
-              <a:endParaRPr sz="2200">
-                <a:latin typeface="IBM Plex Sans"/>
-                <a:cs typeface="IBM Plex Sans"/>
-              </a:endParaRPr>
-            </a:p>
-          </p:txBody>
-        </p:sp>
-        <p:sp>
-          <p:nvSpPr>
-            <p:cNvPr id="404160760" name=""/>
-            <p:cNvSpPr txBox="1"/>
-            <p:nvPr/>
-          </p:nvSpPr>
-          <p:spPr bwMode="auto">
-            <a:xfrm rot="0" flipH="0" flipV="0">
-              <a:off x="2961370" y="5642172"/>
-              <a:ext cx="2851953" cy="427079"/>
-            </a:xfrm>
-            <a:prstGeom prst="rect">
-              <a:avLst/>
-            </a:prstGeom>
-            <a:noFill/>
-          </p:spPr>
-          <p:txBody>
-            <a:bodyPr vertOverflow="overflow" horzOverflow="overflow" vert="horz" wrap="square" lIns="91440" tIns="45720" rIns="91440" bIns="45720" numCol="1" spcCol="0" rtlCol="0" fromWordArt="0" anchor="t" anchorCtr="0" forceAA="0" upright="0" compatLnSpc="0">
-              <a:spAutoFit/>
-            </a:bodyPr>
-            <a:p>
-              <a:pPr algn="ctr">
-                <a:defRPr/>
-              </a:pPr>
-              <a:r>
-                <a:rPr lang="fr-FR" sz="2200">
-                  <a:latin typeface="IBM Plex Sans"/>
-                  <a:ea typeface="IBM Plex Sans"/>
-                  <a:cs typeface="IBM Plex Sans"/>
-                </a:rPr>
-                <a:t>Decentralized</a:t>
-              </a:r>
-              <a:endParaRPr sz="2200">
-                <a:latin typeface="IBM Plex Sans"/>
-                <a:cs typeface="IBM Plex Sans"/>
-              </a:endParaRPr>
-            </a:p>
-          </p:txBody>
-        </p:sp>
-      </p:grpSp>
+              </a:rPr>
+              <a:t>Decentralized</a:t>
+            </a:r>
+            <a:endParaRPr sz="2200">
+              <a:latin typeface="IBM Plex Sans"/>
+              <a:cs typeface="IBM Plex Sans"/>
+            </a:endParaRPr>
+          </a:p>
+        </p:txBody>
+      </p:sp>
     </p:spTree>
   </p:cSld>
   <p:clrMapOvr>
@@ -10378,7 +11514,7 @@
       </p:grpSpPr>
       <p:pic>
         <p:nvPicPr>
-          <p:cNvPr id="136313493" name=""/>
+          <p:cNvPr id="1696692171" name=""/>
           <p:cNvPicPr>
             <a:picLocks noChangeAspect="1"/>
           </p:cNvPicPr>
@@ -10400,7 +11536,7 @@
       </p:pic>
       <p:sp>
         <p:nvSpPr>
-          <p:cNvPr id="2005467936" name=""/>
+          <p:cNvPr id="1604701722" name=""/>
           <p:cNvSpPr/>
           <p:nvPr/>
         </p:nvSpPr>
@@ -10444,7 +11580,7 @@
       </p:sp>
       <p:sp>
         <p:nvSpPr>
-          <p:cNvPr id="748996341" name=""/>
+          <p:cNvPr id="1585018793" name=""/>
           <p:cNvSpPr/>
           <p:nvPr/>
         </p:nvSpPr>
@@ -10493,7 +11629,7 @@
       </p:sp>
       <p:sp>
         <p:nvSpPr>
-          <p:cNvPr id="1669766253" name=""/>
+          <p:cNvPr id="1078221400" name=""/>
           <p:cNvSpPr/>
           <p:nvPr/>
         </p:nvSpPr>
@@ -10537,7 +11673,7 @@
       </p:sp>
       <p:sp>
         <p:nvSpPr>
-          <p:cNvPr id="1911610207" name=""/>
+          <p:cNvPr id="217931922" name=""/>
           <p:cNvSpPr/>
           <p:nvPr/>
         </p:nvSpPr>
@@ -10586,7 +11722,7 @@
       </p:sp>
       <p:sp>
         <p:nvSpPr>
-          <p:cNvPr id="2127702951" name=""/>
+          <p:cNvPr id="2047620786" name=""/>
           <p:cNvSpPr txBox="1"/>
           <p:nvPr/>
         </p:nvSpPr>
@@ -10623,7 +11759,7 @@
       </p:sp>
       <p:sp>
         <p:nvSpPr>
-          <p:cNvPr id="1125654073" name=""/>
+          <p:cNvPr id="1951448218" name=""/>
           <p:cNvSpPr txBox="1"/>
           <p:nvPr/>
         </p:nvSpPr>
@@ -10666,7 +11802,7 @@
       </p:sp>
       <p:sp>
         <p:nvSpPr>
-          <p:cNvPr id="1822932628" name=""/>
+          <p:cNvPr id="1415045215" name=""/>
           <p:cNvSpPr txBox="1"/>
           <p:nvPr/>
         </p:nvSpPr>
@@ -10703,7 +11839,7 @@
       </p:sp>
       <p:sp>
         <p:nvSpPr>
-          <p:cNvPr id="1486106265" name=""/>
+          <p:cNvPr id="1155593188" name=""/>
           <p:cNvSpPr txBox="1"/>
           <p:nvPr/>
         </p:nvSpPr>
@@ -10773,7 +11909,7 @@
       </p:grpSpPr>
       <p:pic>
         <p:nvPicPr>
-          <p:cNvPr id="300977976" name=""/>
+          <p:cNvPr id="68684526" name=""/>
           <p:cNvPicPr>
             <a:picLocks noChangeAspect="1"/>
           </p:cNvPicPr>
@@ -10785,22 +11921,1056 @@
         </p:blipFill>
         <p:spPr bwMode="auto">
           <a:xfrm>
-            <a:off x="1406297" y="415698"/>
+            <a:off x="1338262" y="538162"/>
             <a:ext cx="9515475" cy="5781674"/>
           </a:xfrm>
           <a:prstGeom prst="rect">
             <a:avLst/>
           </a:prstGeom>
-          <a:ln w="6349">
-            <a:solidFill>
-              <a:schemeClr val="accent1">
-                <a:lumMod val="50196"/>
-              </a:schemeClr>
-            </a:solidFill>
+        </p:spPr>
+      </p:pic>
+      <p:sp>
+        <p:nvSpPr>
+          <p:cNvPr id="1435555748" name=""/>
+          <p:cNvSpPr/>
+          <p:nvPr/>
+        </p:nvSpPr>
+        <p:spPr bwMode="auto">
+          <a:xfrm flipH="0" flipV="0">
+            <a:off x="7200124" y="1254124"/>
+            <a:ext cx="3017836" cy="317498"/>
+          </a:xfrm>
+          <a:prstGeom prst="rect">
+            <a:avLst/>
+          </a:prstGeom>
+          <a:solidFill>
+            <a:srgbClr val="FDE9D4"/>
+          </a:solidFill>
+          <a:ln w="12700" cap="flat" cmpd="sng" algn="ctr">
+            <a:noFill/>
             <a:prstDash val="solid"/>
+            <a:miter lim="800000"/>
           </a:ln>
         </p:spPr>
-      </p:pic>
+        <p:style>
+          <a:lnRef idx="2">
+            <a:schemeClr val="accent1">
+              <a:shade val="50000"/>
+            </a:schemeClr>
+          </a:lnRef>
+          <a:fillRef idx="1">
+            <a:schemeClr val="accent1"/>
+          </a:fillRef>
+          <a:effectRef idx="0">
+            <a:schemeClr val="accent1"/>
+          </a:effectRef>
+          <a:fontRef idx="minor">
+            <a:schemeClr val="lt1"/>
+          </a:fontRef>
+        </p:style>
+        <p:txBody>
+          <a:bodyPr/>
+          <a:p/>
+        </p:txBody>
+      </p:sp>
+      <p:sp>
+        <p:nvSpPr>
+          <p:cNvPr id="855654714" name=""/>
+          <p:cNvSpPr/>
+          <p:nvPr/>
+        </p:nvSpPr>
+        <p:spPr bwMode="auto">
+          <a:xfrm flipH="0" flipV="0">
+            <a:off x="4048937" y="436562"/>
+            <a:ext cx="4476749" cy="571500"/>
+          </a:xfrm>
+          <a:prstGeom prst="rect">
+            <a:avLst/>
+          </a:prstGeom>
+          <a:solidFill>
+            <a:srgbClr val="FFFFFF"/>
+          </a:solidFill>
+          <a:ln w="12700" cap="flat" cmpd="sng" algn="ctr">
+            <a:noFill/>
+            <a:prstDash val="solid"/>
+            <a:miter lim="800000"/>
+          </a:ln>
+        </p:spPr>
+        <p:style>
+          <a:lnRef idx="2">
+            <a:schemeClr val="accent1">
+              <a:shade val="50000"/>
+            </a:schemeClr>
+          </a:lnRef>
+          <a:fillRef idx="1">
+            <a:schemeClr val="accent1"/>
+          </a:fillRef>
+          <a:effectRef idx="0">
+            <a:schemeClr val="accent1"/>
+          </a:effectRef>
+          <a:fontRef idx="minor">
+            <a:schemeClr val="lt1"/>
+          </a:fontRef>
+        </p:style>
+        <p:txBody>
+          <a:bodyPr/>
+          <a:p/>
+        </p:txBody>
+      </p:sp>
+      <p:sp>
+        <p:nvSpPr>
+          <p:cNvPr id="739019711" name=""/>
+          <p:cNvSpPr/>
+          <p:nvPr/>
+        </p:nvSpPr>
+        <p:spPr bwMode="auto">
+          <a:xfrm flipH="0" flipV="0">
+            <a:off x="1620062" y="2016124"/>
+            <a:ext cx="571500" cy="515937"/>
+          </a:xfrm>
+          <a:prstGeom prst="rect">
+            <a:avLst/>
+          </a:prstGeom>
+          <a:solidFill>
+            <a:srgbClr val="FEFF98"/>
+          </a:solidFill>
+          <a:ln w="12700" cap="flat" cmpd="sng" algn="ctr">
+            <a:noFill/>
+            <a:prstDash val="solid"/>
+            <a:miter lim="800000"/>
+          </a:ln>
+        </p:spPr>
+        <p:style>
+          <a:lnRef idx="2">
+            <a:schemeClr val="accent1">
+              <a:shade val="50000"/>
+            </a:schemeClr>
+          </a:lnRef>
+          <a:fillRef idx="1">
+            <a:schemeClr val="accent1"/>
+          </a:fillRef>
+          <a:effectRef idx="0">
+            <a:schemeClr val="accent1"/>
+          </a:effectRef>
+          <a:fontRef idx="minor">
+            <a:schemeClr val="lt1"/>
+          </a:fontRef>
+        </p:style>
+        <p:txBody>
+          <a:bodyPr/>
+          <a:p/>
+        </p:txBody>
+      </p:sp>
+      <p:sp>
+        <p:nvSpPr>
+          <p:cNvPr id="1362170388" name=""/>
+          <p:cNvSpPr/>
+          <p:nvPr/>
+        </p:nvSpPr>
+        <p:spPr bwMode="auto">
+          <a:xfrm flipH="0" flipV="0">
+            <a:off x="1486711" y="5200650"/>
+            <a:ext cx="571500" cy="515936"/>
+          </a:xfrm>
+          <a:prstGeom prst="rect">
+            <a:avLst/>
+          </a:prstGeom>
+          <a:solidFill>
+            <a:srgbClr val="FEFF98"/>
+          </a:solidFill>
+          <a:ln w="12700" cap="flat" cmpd="sng" algn="ctr">
+            <a:noFill/>
+            <a:prstDash val="solid"/>
+            <a:miter lim="800000"/>
+          </a:ln>
+        </p:spPr>
+        <p:style>
+          <a:lnRef idx="2">
+            <a:schemeClr val="accent1">
+              <a:shade val="50000"/>
+            </a:schemeClr>
+          </a:lnRef>
+          <a:fillRef idx="1">
+            <a:schemeClr val="accent1"/>
+          </a:fillRef>
+          <a:effectRef idx="0">
+            <a:schemeClr val="accent1"/>
+          </a:effectRef>
+          <a:fontRef idx="minor">
+            <a:schemeClr val="lt1"/>
+          </a:fontRef>
+        </p:style>
+        <p:txBody>
+          <a:bodyPr/>
+          <a:p/>
+        </p:txBody>
+      </p:sp>
+      <p:sp>
+        <p:nvSpPr>
+          <p:cNvPr id="121166664" name=""/>
+          <p:cNvSpPr/>
+          <p:nvPr/>
+        </p:nvSpPr>
+        <p:spPr bwMode="auto">
+          <a:xfrm flipH="0" flipV="0">
+            <a:off x="2366187" y="1738312"/>
+            <a:ext cx="1627187" cy="222249"/>
+          </a:xfrm>
+          <a:prstGeom prst="rect">
+            <a:avLst/>
+          </a:prstGeom>
+          <a:solidFill>
+            <a:srgbClr val="FFFFFF"/>
+          </a:solidFill>
+          <a:ln w="12700" cap="flat" cmpd="sng" algn="ctr">
+            <a:noFill/>
+            <a:prstDash val="solid"/>
+            <a:miter lim="800000"/>
+          </a:ln>
+        </p:spPr>
+        <p:style>
+          <a:lnRef idx="2">
+            <a:schemeClr val="accent1">
+              <a:shade val="50000"/>
+            </a:schemeClr>
+          </a:lnRef>
+          <a:fillRef idx="1">
+            <a:schemeClr val="accent1"/>
+          </a:fillRef>
+          <a:effectRef idx="0">
+            <a:schemeClr val="accent1"/>
+          </a:effectRef>
+          <a:fontRef idx="minor">
+            <a:schemeClr val="lt1"/>
+          </a:fontRef>
+        </p:style>
+        <p:txBody>
+          <a:bodyPr/>
+          <a:p/>
+        </p:txBody>
+      </p:sp>
+      <p:sp>
+        <p:nvSpPr>
+          <p:cNvPr id="37375027" name=""/>
+          <p:cNvSpPr/>
+          <p:nvPr/>
+        </p:nvSpPr>
+        <p:spPr bwMode="auto">
+          <a:xfrm flipH="0" flipV="0">
+            <a:off x="4255312" y="3833812"/>
+            <a:ext cx="1817687" cy="809624"/>
+          </a:xfrm>
+          <a:prstGeom prst="rect">
+            <a:avLst/>
+          </a:prstGeom>
+          <a:solidFill>
+            <a:srgbClr val="FFFFFF"/>
+          </a:solidFill>
+          <a:ln w="12700" cap="flat" cmpd="sng" algn="ctr">
+            <a:noFill/>
+            <a:prstDash val="solid"/>
+            <a:miter lim="800000"/>
+          </a:ln>
+        </p:spPr>
+        <p:style>
+          <a:lnRef idx="2">
+            <a:schemeClr val="accent1">
+              <a:shade val="50000"/>
+            </a:schemeClr>
+          </a:lnRef>
+          <a:fillRef idx="1">
+            <a:schemeClr val="accent1"/>
+          </a:fillRef>
+          <a:effectRef idx="0">
+            <a:schemeClr val="accent1"/>
+          </a:effectRef>
+          <a:fontRef idx="minor">
+            <a:schemeClr val="lt1"/>
+          </a:fontRef>
+        </p:style>
+        <p:txBody>
+          <a:bodyPr/>
+          <a:p/>
+        </p:txBody>
+      </p:sp>
+      <p:sp>
+        <p:nvSpPr>
+          <p:cNvPr id="199712142" name=""/>
+          <p:cNvSpPr/>
+          <p:nvPr/>
+        </p:nvSpPr>
+        <p:spPr bwMode="auto">
+          <a:xfrm flipH="0" flipV="0">
+            <a:off x="9406749" y="3040062"/>
+            <a:ext cx="1904999" cy="896937"/>
+          </a:xfrm>
+          <a:prstGeom prst="rect">
+            <a:avLst/>
+          </a:prstGeom>
+          <a:solidFill>
+            <a:srgbClr val="FFFFFF"/>
+          </a:solidFill>
+          <a:ln w="12700" cap="flat" cmpd="sng" algn="ctr">
+            <a:noFill/>
+            <a:prstDash val="solid"/>
+            <a:miter lim="800000"/>
+          </a:ln>
+        </p:spPr>
+        <p:style>
+          <a:lnRef idx="2">
+            <a:schemeClr val="accent1">
+              <a:shade val="50000"/>
+            </a:schemeClr>
+          </a:lnRef>
+          <a:fillRef idx="1">
+            <a:schemeClr val="accent1"/>
+          </a:fillRef>
+          <a:effectRef idx="0">
+            <a:schemeClr val="accent1"/>
+          </a:effectRef>
+          <a:fontRef idx="minor">
+            <a:schemeClr val="lt1"/>
+          </a:fontRef>
+        </p:style>
+        <p:txBody>
+          <a:bodyPr/>
+          <a:p/>
+        </p:txBody>
+      </p:sp>
+      <p:sp>
+        <p:nvSpPr>
+          <p:cNvPr id="745983159" name=""/>
+          <p:cNvSpPr/>
+          <p:nvPr/>
+        </p:nvSpPr>
+        <p:spPr bwMode="auto">
+          <a:xfrm flipH="0" flipV="0">
+            <a:off x="6446062" y="3603624"/>
+            <a:ext cx="1690687" cy="492124"/>
+          </a:xfrm>
+          <a:prstGeom prst="rect">
+            <a:avLst/>
+          </a:prstGeom>
+          <a:solidFill>
+            <a:srgbClr val="FFFFFF"/>
+          </a:solidFill>
+          <a:ln w="12700" cap="flat" cmpd="sng" algn="ctr">
+            <a:noFill/>
+            <a:prstDash val="solid"/>
+            <a:miter lim="800000"/>
+          </a:ln>
+        </p:spPr>
+        <p:style>
+          <a:lnRef idx="2">
+            <a:schemeClr val="accent1">
+              <a:shade val="50000"/>
+            </a:schemeClr>
+          </a:lnRef>
+          <a:fillRef idx="1">
+            <a:schemeClr val="accent1"/>
+          </a:fillRef>
+          <a:effectRef idx="0">
+            <a:schemeClr val="accent1"/>
+          </a:effectRef>
+          <a:fontRef idx="minor">
+            <a:schemeClr val="lt1"/>
+          </a:fontRef>
+        </p:style>
+        <p:txBody>
+          <a:bodyPr/>
+          <a:p/>
+        </p:txBody>
+      </p:sp>
+      <p:sp>
+        <p:nvSpPr>
+          <p:cNvPr id="1997111734" name=""/>
+          <p:cNvSpPr/>
+          <p:nvPr/>
+        </p:nvSpPr>
+        <p:spPr bwMode="auto">
+          <a:xfrm flipH="0" flipV="0">
+            <a:off x="2866249" y="6095999"/>
+            <a:ext cx="1674812" cy="373062"/>
+          </a:xfrm>
+          <a:prstGeom prst="rect">
+            <a:avLst/>
+          </a:prstGeom>
+          <a:solidFill>
+            <a:srgbClr val="FFFFFF"/>
+          </a:solidFill>
+          <a:ln w="12700" cap="flat" cmpd="sng" algn="ctr">
+            <a:noFill/>
+            <a:prstDash val="solid"/>
+            <a:miter lim="800000"/>
+          </a:ln>
+        </p:spPr>
+        <p:style>
+          <a:lnRef idx="2">
+            <a:schemeClr val="accent1">
+              <a:shade val="50000"/>
+            </a:schemeClr>
+          </a:lnRef>
+          <a:fillRef idx="1">
+            <a:schemeClr val="accent1"/>
+          </a:fillRef>
+          <a:effectRef idx="0">
+            <a:schemeClr val="accent1"/>
+          </a:effectRef>
+          <a:fontRef idx="minor">
+            <a:schemeClr val="lt1"/>
+          </a:fontRef>
+        </p:style>
+        <p:txBody>
+          <a:bodyPr/>
+          <a:p/>
+        </p:txBody>
+      </p:sp>
+      <p:sp>
+        <p:nvSpPr>
+          <p:cNvPr id="1732067337" name=""/>
+          <p:cNvSpPr txBox="1"/>
+          <p:nvPr/>
+        </p:nvSpPr>
+        <p:spPr bwMode="auto">
+          <a:xfrm flipH="0" flipV="0">
+            <a:off x="2366185" y="436560"/>
+            <a:ext cx="7427207" cy="518519"/>
+          </a:xfrm>
+          <a:prstGeom prst="rect">
+            <a:avLst/>
+          </a:prstGeom>
+          <a:noFill/>
+        </p:spPr>
+        <p:txBody>
+          <a:bodyPr vertOverflow="overflow" horzOverflow="overflow" vert="horz" wrap="square" lIns="91440" tIns="45720" rIns="91440" bIns="45720" numCol="1" spcCol="0" rtlCol="0" fromWordArt="0" anchor="t" anchorCtr="0" forceAA="0" upright="0" compatLnSpc="0">
+            <a:spAutoFit/>
+          </a:bodyPr>
+          <a:p>
+            <a:pPr algn="ctr">
+              <a:defRPr/>
+            </a:pPr>
+            <a:r>
+              <a:rPr sz="2800" b="1">
+                <a:solidFill>
+                  <a:srgbClr val="850009"/>
+                </a:solidFill>
+                <a:latin typeface="IBM Plex Sans"/>
+              </a:rPr>
+              <a:t>Trusted timestamping</a:t>
+            </a:r>
+            <a:endParaRPr sz="2800" b="1">
+              <a:solidFill>
+                <a:srgbClr val="850009"/>
+              </a:solidFill>
+              <a:latin typeface="IBM Plex Sans"/>
+              <a:cs typeface="IBM Plex Sans"/>
+            </a:endParaRPr>
+          </a:p>
+        </p:txBody>
+      </p:sp>
+      <p:sp>
+        <p:nvSpPr>
+          <p:cNvPr id="666728493" name=""/>
+          <p:cNvSpPr txBox="1"/>
+          <p:nvPr/>
+        </p:nvSpPr>
+        <p:spPr bwMode="auto">
+          <a:xfrm flipH="0" flipV="0">
+            <a:off x="2267924" y="1640939"/>
+            <a:ext cx="1726168" cy="244199"/>
+          </a:xfrm>
+          <a:prstGeom prst="rect">
+            <a:avLst/>
+          </a:prstGeom>
+          <a:noFill/>
+        </p:spPr>
+        <p:txBody>
+          <a:bodyPr vertOverflow="overflow" horzOverflow="overflow" vert="horz" wrap="square" lIns="91440" tIns="45720" rIns="91440" bIns="45720" numCol="1" spcCol="0" rtlCol="0" fromWordArt="0" anchor="t" anchorCtr="0" forceAA="0" upright="0" compatLnSpc="0">
+            <a:spAutoFit/>
+          </a:bodyPr>
+          <a:p>
+            <a:pPr algn="ctr">
+              <a:defRPr/>
+            </a:pPr>
+            <a:r>
+              <a:rPr sz="1000">
+                <a:latin typeface="IBM Plex Sans"/>
+              </a:rPr>
+              <a:t>Calculate hash</a:t>
+            </a:r>
+            <a:endParaRPr sz="1000">
+              <a:latin typeface="IBM Plex Sans"/>
+              <a:cs typeface="IBM Plex Sans"/>
+            </a:endParaRPr>
+          </a:p>
+        </p:txBody>
+      </p:sp>
+      <p:sp>
+        <p:nvSpPr>
+          <p:cNvPr id="386261133" name=""/>
+          <p:cNvSpPr txBox="1"/>
+          <p:nvPr/>
+        </p:nvSpPr>
+        <p:spPr bwMode="auto">
+          <a:xfrm flipH="0" flipV="0">
+            <a:off x="4998760" y="1701120"/>
+            <a:ext cx="2052513" cy="259439"/>
+          </a:xfrm>
+          <a:prstGeom prst="rect">
+            <a:avLst/>
+          </a:prstGeom>
+          <a:solidFill>
+            <a:srgbClr val="FFFFFF"/>
+          </a:solidFill>
+        </p:spPr>
+        <p:txBody>
+          <a:bodyPr vertOverflow="overflow" horzOverflow="overflow" vert="horz" wrap="square" lIns="91440" tIns="45720" rIns="91440" bIns="45720" numCol="1" spcCol="0" rtlCol="0" fromWordArt="0" anchor="t" anchorCtr="0" forceAA="0" upright="0" compatLnSpc="0">
+            <a:spAutoFit/>
+          </a:bodyPr>
+          <a:p>
+            <a:pPr algn="ctr">
+              <a:defRPr/>
+            </a:pPr>
+            <a:r>
+              <a:rPr sz="1100">
+                <a:latin typeface="IBM Plex Sans"/>
+              </a:rPr>
+              <a:t>Send hash to TSA</a:t>
+            </a:r>
+            <a:endParaRPr sz="1100">
+              <a:latin typeface="IBM Plex Sans"/>
+              <a:cs typeface="IBM Plex Sans"/>
+            </a:endParaRPr>
+          </a:p>
+        </p:txBody>
+      </p:sp>
+      <p:sp>
+        <p:nvSpPr>
+          <p:cNvPr id="1826628945" name=""/>
+          <p:cNvSpPr txBox="1"/>
+          <p:nvPr/>
+        </p:nvSpPr>
+        <p:spPr bwMode="auto">
+          <a:xfrm flipH="0" flipV="0">
+            <a:off x="1486710" y="1254123"/>
+            <a:ext cx="2973763" cy="305159"/>
+          </a:xfrm>
+          <a:prstGeom prst="rect">
+            <a:avLst/>
+          </a:prstGeom>
+          <a:solidFill>
+            <a:srgbClr val="FFCE9C"/>
+          </a:solidFill>
+        </p:spPr>
+        <p:txBody>
+          <a:bodyPr vertOverflow="overflow" horzOverflow="overflow" vert="horz" wrap="square" lIns="91440" tIns="45720" rIns="91440" bIns="45720" numCol="1" spcCol="0" rtlCol="0" fromWordArt="0" anchor="t" anchorCtr="0" forceAA="0" upright="0" compatLnSpc="0">
+            <a:spAutoFit/>
+          </a:bodyPr>
+          <a:p>
+            <a:pPr algn="ctr">
+              <a:defRPr/>
+            </a:pPr>
+            <a:r>
+              <a:rPr sz="1400">
+                <a:latin typeface="IBM Plex Sans"/>
+              </a:rPr>
+              <a:t>Within a company</a:t>
+            </a:r>
+            <a:endParaRPr sz="1400">
+              <a:latin typeface="IBM Plex Sans"/>
+              <a:cs typeface="IBM Plex Sans"/>
+            </a:endParaRPr>
+          </a:p>
+        </p:txBody>
+      </p:sp>
+      <p:sp>
+        <p:nvSpPr>
+          <p:cNvPr id="1513745464" name=""/>
+          <p:cNvSpPr txBox="1"/>
+          <p:nvPr/>
+        </p:nvSpPr>
+        <p:spPr bwMode="auto">
+          <a:xfrm flipH="0" flipV="0">
+            <a:off x="1486710" y="2179838"/>
+            <a:ext cx="706650" cy="396599"/>
+          </a:xfrm>
+          <a:prstGeom prst="rect">
+            <a:avLst/>
+          </a:prstGeom>
+          <a:solidFill>
+            <a:srgbClr val="FEFF98"/>
+          </a:solidFill>
+        </p:spPr>
+        <p:txBody>
+          <a:bodyPr vertOverflow="overflow" horzOverflow="overflow" vert="horz" wrap="square" lIns="91440" tIns="45720" rIns="91440" bIns="45720" numCol="1" spcCol="0" rtlCol="0" fromWordArt="0" anchor="t" anchorCtr="0" forceAA="0" upright="0" compatLnSpc="0">
+            <a:spAutoFit/>
+          </a:bodyPr>
+          <a:p>
+            <a:pPr algn="ctr">
+              <a:defRPr/>
+            </a:pPr>
+            <a:r>
+              <a:rPr sz="1000">
+                <a:latin typeface="IBM Plex Sans"/>
+              </a:rPr>
+              <a:t>Data</a:t>
+            </a:r>
+            <a:endParaRPr sz="1000">
+              <a:latin typeface="IBM Plex Sans"/>
+              <a:ea typeface="IBM Plex Sans"/>
+              <a:cs typeface="IBM Plex Sans"/>
+            </a:endParaRPr>
+          </a:p>
+          <a:p>
+            <a:pPr/>
+          </a:p>
+        </p:txBody>
+      </p:sp>
+      <p:sp>
+        <p:nvSpPr>
+          <p:cNvPr id="11887285" name=""/>
+          <p:cNvSpPr txBox="1"/>
+          <p:nvPr/>
+        </p:nvSpPr>
+        <p:spPr bwMode="auto">
+          <a:xfrm flipH="0" flipV="0">
+            <a:off x="1411649" y="5311773"/>
+            <a:ext cx="644081" cy="396599"/>
+          </a:xfrm>
+          <a:prstGeom prst="rect">
+            <a:avLst/>
+          </a:prstGeom>
+          <a:solidFill>
+            <a:srgbClr val="FEFF98"/>
+          </a:solidFill>
+        </p:spPr>
+        <p:txBody>
+          <a:bodyPr vertOverflow="overflow" horzOverflow="overflow" vert="horz" wrap="square" lIns="91440" tIns="45720" rIns="91440" bIns="45720" numCol="1" spcCol="0" rtlCol="0" fromWordArt="0" anchor="t" anchorCtr="0" forceAA="0" upright="0" compatLnSpc="0">
+            <a:spAutoFit/>
+          </a:bodyPr>
+          <a:p>
+            <a:pPr algn="ctr">
+              <a:defRPr/>
+            </a:pPr>
+            <a:r>
+              <a:rPr sz="1000">
+                <a:latin typeface="IBM Plex Sans"/>
+              </a:rPr>
+              <a:t>Data</a:t>
+            </a:r>
+            <a:endParaRPr sz="1000">
+              <a:latin typeface="IBM Plex Sans"/>
+              <a:ea typeface="IBM Plex Sans"/>
+              <a:cs typeface="IBM Plex Sans"/>
+            </a:endParaRPr>
+          </a:p>
+          <a:p>
+            <a:pPr algn="ctr"/>
+          </a:p>
+        </p:txBody>
+      </p:sp>
+      <p:sp>
+        <p:nvSpPr>
+          <p:cNvPr id="1458164772" name=""/>
+          <p:cNvSpPr txBox="1"/>
+          <p:nvPr/>
+        </p:nvSpPr>
+        <p:spPr bwMode="auto">
+          <a:xfrm flipH="0" flipV="0">
+            <a:off x="1486710" y="6129950"/>
+            <a:ext cx="4211293" cy="305159"/>
+          </a:xfrm>
+          <a:prstGeom prst="rect">
+            <a:avLst/>
+          </a:prstGeom>
+          <a:noFill/>
+        </p:spPr>
+        <p:txBody>
+          <a:bodyPr vertOverflow="overflow" horzOverflow="overflow" vert="horz" wrap="square" lIns="91440" tIns="45720" rIns="91440" bIns="45720" numCol="1" spcCol="0" rtlCol="0" fromWordArt="0" anchor="t" anchorCtr="0" forceAA="0" upright="0" compatLnSpc="0">
+            <a:spAutoFit/>
+          </a:bodyPr>
+          <a:p>
+            <a:pPr algn="ctr">
+              <a:defRPr/>
+            </a:pPr>
+            <a:r>
+              <a:rPr sz="1400">
+                <a:latin typeface="IBM Plex Sans"/>
+              </a:rPr>
+              <a:t>Store together</a:t>
+            </a:r>
+            <a:endParaRPr sz="1400">
+              <a:latin typeface="IBM Plex Sans"/>
+              <a:cs typeface="IBM Plex Sans"/>
+            </a:endParaRPr>
+          </a:p>
+        </p:txBody>
+      </p:sp>
+      <p:sp>
+        <p:nvSpPr>
+          <p:cNvPr id="413664644" name=""/>
+          <p:cNvSpPr txBox="1"/>
+          <p:nvPr/>
+        </p:nvSpPr>
+        <p:spPr bwMode="auto">
+          <a:xfrm flipH="0" flipV="0">
+            <a:off x="3756939" y="4095747"/>
+            <a:ext cx="2268077" cy="594720"/>
+          </a:xfrm>
+          <a:prstGeom prst="rect">
+            <a:avLst/>
+          </a:prstGeom>
+          <a:noFill/>
+        </p:spPr>
+        <p:txBody>
+          <a:bodyPr vertOverflow="overflow" horzOverflow="overflow" vert="horz" wrap="square" lIns="91440" tIns="45720" rIns="91440" bIns="45720" numCol="1" spcCol="0" rtlCol="0" fromWordArt="0" anchor="t" anchorCtr="0" forceAA="0" upright="0" compatLnSpc="0">
+            <a:spAutoFit/>
+          </a:bodyPr>
+          <a:p>
+            <a:pPr algn="ctr">
+              <a:defRPr/>
+            </a:pPr>
+            <a:r>
+              <a:rPr sz="1100">
+                <a:latin typeface="IBM Plex Sans"/>
+              </a:rPr>
+              <a:t>Signed timestamp and </a:t>
+            </a:r>
+            <a:r>
+              <a:rPr sz="1100">
+                <a:latin typeface="IBM Plex Sans"/>
+              </a:rPr>
+              <a:t>hash are returned </a:t>
+            </a:r>
+            <a:r>
+              <a:rPr sz="1100">
+                <a:latin typeface="IBM Plex Sans"/>
+              </a:rPr>
+              <a:t>to requester</a:t>
+            </a:r>
+            <a:endParaRPr sz="1100">
+              <a:latin typeface="IBM Plex Sans"/>
+              <a:cs typeface="IBM Plex Sans"/>
+            </a:endParaRPr>
+          </a:p>
+        </p:txBody>
+      </p:sp>
+      <p:sp>
+        <p:nvSpPr>
+          <p:cNvPr id="1988364204" name=""/>
+          <p:cNvSpPr txBox="1"/>
+          <p:nvPr/>
+        </p:nvSpPr>
+        <p:spPr bwMode="auto">
+          <a:xfrm flipH="0" flipV="0">
+            <a:off x="8468534" y="2027259"/>
+            <a:ext cx="1968051" cy="305159"/>
+          </a:xfrm>
+          <a:prstGeom prst="rect">
+            <a:avLst/>
+          </a:prstGeom>
+          <a:solidFill>
+            <a:srgbClr val="FEFF98"/>
+          </a:solidFill>
+        </p:spPr>
+        <p:txBody>
+          <a:bodyPr vertOverflow="overflow" horzOverflow="overflow" vert="horz" wrap="square" lIns="91440" tIns="45720" rIns="91440" bIns="45720" numCol="1" spcCol="0" rtlCol="0" fromWordArt="0" anchor="t" anchorCtr="0" forceAA="0" upright="0" compatLnSpc="0">
+            <a:spAutoFit/>
+          </a:bodyPr>
+          <a:p>
+            <a:pPr algn="l">
+              <a:defRPr/>
+            </a:pPr>
+            <a:r>
+              <a:rPr sz="1400">
+                <a:latin typeface="IBM Plex Sans"/>
+              </a:rPr>
+              <a:t>Timestamp</a:t>
+            </a:r>
+            <a:endParaRPr sz="1400">
+              <a:latin typeface="IBM Plex Sans"/>
+              <a:cs typeface="IBM Plex Sans"/>
+            </a:endParaRPr>
+          </a:p>
+        </p:txBody>
+      </p:sp>
+      <p:sp>
+        <p:nvSpPr>
+          <p:cNvPr id="1417755538" name=""/>
+          <p:cNvSpPr txBox="1"/>
+          <p:nvPr/>
+        </p:nvSpPr>
+        <p:spPr bwMode="auto">
+          <a:xfrm flipH="0" flipV="0">
+            <a:off x="7051275" y="1254123"/>
+            <a:ext cx="3384592" cy="274679"/>
+          </a:xfrm>
+          <a:prstGeom prst="rect">
+            <a:avLst/>
+          </a:prstGeom>
+          <a:solidFill>
+            <a:srgbClr val="FFCE9C"/>
+          </a:solidFill>
+        </p:spPr>
+        <p:txBody>
+          <a:bodyPr vertOverflow="overflow" horzOverflow="overflow" vert="horz" wrap="square" lIns="91440" tIns="45720" rIns="91440" bIns="45720" numCol="1" spcCol="0" rtlCol="0" fromWordArt="0" anchor="t" anchorCtr="0" forceAA="0" upright="0" compatLnSpc="0">
+            <a:spAutoFit/>
+          </a:bodyPr>
+          <a:p>
+            <a:pPr algn="ctr">
+              <a:defRPr/>
+            </a:pPr>
+            <a:r>
+              <a:rPr sz="1200">
+                <a:latin typeface="IBM Plex Sans"/>
+              </a:rPr>
+              <a:t>Timestamping Authority (TSA)</a:t>
+            </a:r>
+            <a:endParaRPr sz="1200">
+              <a:latin typeface="IBM Plex Sans"/>
+              <a:cs typeface="IBM Plex Sans"/>
+            </a:endParaRPr>
+          </a:p>
+        </p:txBody>
+      </p:sp>
+      <p:sp>
+        <p:nvSpPr>
+          <p:cNvPr id="686659638" name=""/>
+          <p:cNvSpPr txBox="1"/>
+          <p:nvPr/>
+        </p:nvSpPr>
+        <p:spPr bwMode="auto">
+          <a:xfrm flipH="0" flipV="0">
+            <a:off x="7051272" y="2568211"/>
+            <a:ext cx="2171596" cy="259439"/>
+          </a:xfrm>
+          <a:prstGeom prst="rect">
+            <a:avLst/>
+          </a:prstGeom>
+          <a:solidFill>
+            <a:schemeClr val="bg1"/>
+          </a:solidFill>
+        </p:spPr>
+        <p:txBody>
+          <a:bodyPr vertOverflow="overflow" horzOverflow="overflow" vert="horz" wrap="square" lIns="91440" tIns="45720" rIns="91440" bIns="45720" numCol="1" spcCol="0" rtlCol="0" fromWordArt="0" anchor="t" anchorCtr="0" forceAA="0" upright="0" compatLnSpc="0">
+            <a:spAutoFit/>
+          </a:bodyPr>
+          <a:p>
+            <a:pPr algn="ctr">
+              <a:defRPr/>
+            </a:pPr>
+            <a:r>
+              <a:rPr sz="1100">
+                <a:latin typeface="IBM Plex Sans"/>
+              </a:rPr>
+              <a:t>Calculate hash</a:t>
+            </a:r>
+            <a:endParaRPr sz="1100">
+              <a:latin typeface="IBM Plex Sans"/>
+              <a:cs typeface="IBM Plex Sans"/>
+            </a:endParaRPr>
+          </a:p>
+        </p:txBody>
+      </p:sp>
+      <p:sp>
+        <p:nvSpPr>
+          <p:cNvPr id="1042183151" name=""/>
+          <p:cNvSpPr txBox="1"/>
+          <p:nvPr/>
+        </p:nvSpPr>
+        <p:spPr bwMode="auto">
+          <a:xfrm flipH="0" flipV="0">
+            <a:off x="9406748" y="3131637"/>
+            <a:ext cx="2334618" cy="762359"/>
+          </a:xfrm>
+          <a:prstGeom prst="rect">
+            <a:avLst/>
+          </a:prstGeom>
+          <a:noFill/>
+        </p:spPr>
+        <p:txBody>
+          <a:bodyPr vertOverflow="overflow" horzOverflow="overflow" vert="horz" wrap="square" lIns="91440" tIns="45720" rIns="91440" bIns="45720" numCol="1" spcCol="0" rtlCol="0" fromWordArt="0" anchor="t" anchorCtr="0" forceAA="0" upright="0" compatLnSpc="0">
+            <a:spAutoFit/>
+          </a:bodyPr>
+          <a:p>
+            <a:pPr algn="ctr">
+              <a:defRPr/>
+            </a:pPr>
+            <a:r>
+              <a:rPr sz="1100">
+                <a:latin typeface="IBM Plex Sans"/>
+              </a:rPr>
+              <a:t>This is </a:t>
+            </a:r>
+            <a:r>
+              <a:rPr sz="1100" lang="fr-FR">
+                <a:latin typeface="IBM Plex Sans"/>
+              </a:rPr>
+              <a:t>a digital </a:t>
+            </a:r>
+            <a:r>
+              <a:rPr sz="1100">
+                <a:latin typeface="IBM Plex Sans"/>
+              </a:rPr>
+              <a:t>signature of </a:t>
+            </a:r>
+            <a:r>
+              <a:rPr sz="1100" lang="fr-FR">
+                <a:latin typeface="IBM Plex Sans"/>
+              </a:rPr>
+              <a:t>the hash </a:t>
+            </a:r>
+            <a:r>
+              <a:rPr sz="1100">
+                <a:latin typeface="IBM Plex Sans"/>
+              </a:rPr>
+              <a:t>concatenated to </a:t>
+            </a:r>
+            <a:r>
+              <a:rPr sz="1100" lang="fr-FR">
+                <a:latin typeface="IBM Plex Sans"/>
+              </a:rPr>
+              <a:t>the </a:t>
+            </a:r>
+            <a:r>
+              <a:rPr sz="1100">
+                <a:latin typeface="IBM Plex Sans"/>
+              </a:rPr>
+              <a:t>timestamp</a:t>
+            </a:r>
+            <a:endParaRPr sz="1100">
+              <a:latin typeface="IBM Plex Sans"/>
+              <a:cs typeface="IBM Plex Sans"/>
+            </a:endParaRPr>
+          </a:p>
+          <a:p>
+            <a:pPr algn="ctr"/>
+          </a:p>
+        </p:txBody>
+      </p:sp>
+      <p:sp>
+        <p:nvSpPr>
+          <p:cNvPr id="1856247728" name=""/>
+          <p:cNvSpPr txBox="1"/>
+          <p:nvPr/>
+        </p:nvSpPr>
+        <p:spPr bwMode="auto">
+          <a:xfrm flipH="0" flipV="0">
+            <a:off x="6446061" y="3699144"/>
+            <a:ext cx="1616558" cy="396599"/>
+          </a:xfrm>
+          <a:prstGeom prst="rect">
+            <a:avLst/>
+          </a:prstGeom>
+          <a:solidFill>
+            <a:srgbClr val="FFFFFF"/>
+          </a:solidFill>
+        </p:spPr>
+        <p:txBody>
+          <a:bodyPr vertOverflow="overflow" horzOverflow="overflow" vert="horz" wrap="square" lIns="91440" tIns="45720" rIns="91440" bIns="45720" numCol="1" spcCol="0" rtlCol="0" fromWordArt="0" anchor="t" anchorCtr="0" forceAA="0" upright="0" compatLnSpc="0">
+            <a:spAutoFit/>
+          </a:bodyPr>
+          <a:p>
+            <a:pPr algn="r">
+              <a:defRPr/>
+            </a:pPr>
+            <a:r>
+              <a:rPr sz="1000">
+                <a:latin typeface="IBM Plex Sans"/>
+              </a:rPr>
+              <a:t>Apply private key </a:t>
+            </a:r>
+            <a:r>
+              <a:rPr sz="1000">
+                <a:latin typeface="IBM Plex Sans"/>
+              </a:rPr>
+              <a:t>of the TSA</a:t>
+            </a:r>
+            <a:endParaRPr sz="1000">
+              <a:latin typeface="IBM Plex Sans"/>
+              <a:cs typeface="IBM Plex Sans"/>
+            </a:endParaRPr>
+          </a:p>
+        </p:txBody>
+      </p:sp>
+      <p:sp>
+        <p:nvSpPr>
+          <p:cNvPr id="1631696941" name=""/>
+          <p:cNvSpPr txBox="1"/>
+          <p:nvPr/>
+        </p:nvSpPr>
+        <p:spPr bwMode="auto">
+          <a:xfrm flipH="0" flipV="0">
+            <a:off x="9743962" y="4516295"/>
+            <a:ext cx="1996686" cy="305159"/>
+          </a:xfrm>
+          <a:prstGeom prst="rect">
+            <a:avLst/>
+          </a:prstGeom>
+          <a:solidFill>
+            <a:srgbClr val="FEFF98"/>
+          </a:solidFill>
+        </p:spPr>
+        <p:txBody>
+          <a:bodyPr vertOverflow="overflow" horzOverflow="overflow" vert="horz" wrap="square" lIns="91440" tIns="45720" rIns="91440" bIns="45720" numCol="1" spcCol="0" rtlCol="0" fromWordArt="0" anchor="t" anchorCtr="0" forceAA="0" upright="0" compatLnSpc="0">
+            <a:spAutoFit/>
+          </a:bodyPr>
+          <a:p>
+            <a:pPr algn="l">
+              <a:defRPr/>
+            </a:pPr>
+            <a:r>
+              <a:rPr sz="1400">
+                <a:latin typeface="IBM Plex Sans"/>
+              </a:rPr>
+              <a:t>Timestamp</a:t>
+            </a:r>
+            <a:endParaRPr sz="1400">
+              <a:latin typeface="IBM Plex Sans"/>
+              <a:cs typeface="IBM Plex Sans"/>
+            </a:endParaRPr>
+          </a:p>
+        </p:txBody>
+      </p:sp>
+      <p:sp>
+        <p:nvSpPr>
+          <p:cNvPr id="2133654291" name=""/>
+          <p:cNvSpPr txBox="1"/>
+          <p:nvPr/>
+        </p:nvSpPr>
+        <p:spPr bwMode="auto">
+          <a:xfrm flipH="0" flipV="0">
+            <a:off x="4814896" y="5306036"/>
+            <a:ext cx="2069344" cy="305159"/>
+          </a:xfrm>
+          <a:prstGeom prst="rect">
+            <a:avLst/>
+          </a:prstGeom>
+          <a:solidFill>
+            <a:srgbClr val="FEFF98"/>
+          </a:solidFill>
+        </p:spPr>
+        <p:txBody>
+          <a:bodyPr vertOverflow="overflow" horzOverflow="overflow" vert="horz" wrap="square" lIns="91440" tIns="45720" rIns="91440" bIns="45720" numCol="1" spcCol="0" rtlCol="0" fromWordArt="0" anchor="t" anchorCtr="0" forceAA="0" upright="0" compatLnSpc="0">
+            <a:spAutoFit/>
+          </a:bodyPr>
+          <a:p>
+            <a:pPr algn="l">
+              <a:defRPr/>
+            </a:pPr>
+            <a:r>
+              <a:rPr sz="1400">
+                <a:latin typeface="IBM Plex Sans"/>
+              </a:rPr>
+              <a:t>Timestamp</a:t>
+            </a:r>
+            <a:endParaRPr sz="1400">
+              <a:latin typeface="IBM Plex Sans"/>
+              <a:cs typeface="IBM Plex Sans"/>
+            </a:endParaRPr>
+          </a:p>
+        </p:txBody>
+      </p:sp>
     </p:spTree>
   </p:cSld>
   <p:clrMapOvr>
@@ -10836,7 +13006,7 @@
       </p:grpSpPr>
       <p:pic>
         <p:nvPicPr>
-          <p:cNvPr id="1170543569" name=""/>
+          <p:cNvPr id="365012937" name=""/>
           <p:cNvPicPr>
             <a:picLocks noChangeAspect="1"/>
           </p:cNvPicPr>
@@ -10891,7 +13061,7 @@
       </p:grpSpPr>
       <p:pic>
         <p:nvPicPr>
-          <p:cNvPr id="674647340" name=""/>
+          <p:cNvPr id="1239477945" name=""/>
           <p:cNvPicPr>
             <a:picLocks noChangeAspect="1"/>
           </p:cNvPicPr>
@@ -10903,22 +13073,95 @@
         </p:blipFill>
         <p:spPr bwMode="auto">
           <a:xfrm flipH="0" flipV="0">
-            <a:off x="1143000" y="2234293"/>
+            <a:off x="1142998" y="2438399"/>
             <a:ext cx="9905999" cy="1981199"/>
           </a:xfrm>
           <a:prstGeom prst="rect">
             <a:avLst/>
           </a:prstGeom>
-          <a:ln w="6349">
-            <a:solidFill>
-              <a:schemeClr val="accent1">
-                <a:lumMod val="50196"/>
-              </a:schemeClr>
-            </a:solidFill>
+        </p:spPr>
+      </p:pic>
+      <p:sp>
+        <p:nvSpPr>
+          <p:cNvPr id="659609761" name=""/>
+          <p:cNvSpPr/>
+          <p:nvPr/>
+        </p:nvSpPr>
+        <p:spPr bwMode="auto">
+          <a:xfrm flipH="0" flipV="0">
+            <a:off x="1437994" y="2703967"/>
+            <a:ext cx="2628900" cy="809624"/>
+          </a:xfrm>
+          <a:prstGeom prst="rect">
+            <a:avLst/>
+          </a:prstGeom>
+          <a:solidFill>
+            <a:srgbClr val="FFFFFF"/>
+          </a:solidFill>
+          <a:ln w="12700" cap="flat" cmpd="sng" algn="ctr">
+            <a:noFill/>
             <a:prstDash val="solid"/>
+            <a:miter lim="800000"/>
           </a:ln>
         </p:spPr>
-      </p:pic>
+        <p:style>
+          <a:lnRef idx="2">
+            <a:schemeClr val="accent1">
+              <a:shade val="50000"/>
+            </a:schemeClr>
+          </a:lnRef>
+          <a:fillRef idx="1">
+            <a:schemeClr val="accent1"/>
+          </a:fillRef>
+          <a:effectRef idx="0">
+            <a:schemeClr val="accent1"/>
+          </a:effectRef>
+          <a:fontRef idx="minor">
+            <a:schemeClr val="lt1"/>
+          </a:fontRef>
+        </p:style>
+        <p:txBody>
+          <a:bodyPr/>
+          <a:p/>
+        </p:txBody>
+      </p:sp>
+      <p:sp>
+        <p:nvSpPr>
+          <p:cNvPr id="1904420992" name=""/>
+          <p:cNvSpPr txBox="1"/>
+          <p:nvPr/>
+        </p:nvSpPr>
+        <p:spPr bwMode="auto">
+          <a:xfrm flipH="0" flipV="0">
+            <a:off x="1458298" y="2788560"/>
+            <a:ext cx="5401395" cy="640440"/>
+          </a:xfrm>
+          <a:prstGeom prst="rect">
+            <a:avLst/>
+          </a:prstGeom>
+          <a:noFill/>
+        </p:spPr>
+        <p:txBody>
+          <a:bodyPr vertOverflow="overflow" horzOverflow="overflow" vert="horz" wrap="square" lIns="91440" tIns="45720" rIns="91440" bIns="45720" numCol="1" spcCol="0" rtlCol="0" fromWordArt="0" anchor="t" anchorCtr="0" forceAA="0" upright="0" compatLnSpc="0">
+            <a:spAutoFit/>
+          </a:bodyPr>
+          <a:p>
+            <a:pPr>
+              <a:defRPr/>
+            </a:pPr>
+            <a:r>
+              <a:rPr sz="3600" b="1">
+                <a:latin typeface="IBM Plex Sans"/>
+              </a:rPr>
+              <a:t>References</a:t>
+            </a:r>
+            <a:endParaRPr sz="10000" b="1">
+              <a:latin typeface="IBM Plex Sans"/>
+              <a:cs typeface="IBM Plex Sans"/>
+            </a:endParaRPr>
+          </a:p>
+        </p:txBody>
+      </p:sp>
     </p:spTree>
   </p:cSld>
   <p:clrMapOvr>
@@ -10954,7 +13197,7 @@
       </p:grpSpPr>
       <p:pic>
         <p:nvPicPr>
-          <p:cNvPr id="1697770434" name=""/>
+          <p:cNvPr id="646580494" name=""/>
           <p:cNvPicPr>
             <a:picLocks noChangeAspect="1"/>
           </p:cNvPicPr>
@@ -11009,7 +13252,7 @@
       </p:grpSpPr>
       <p:pic>
         <p:nvPicPr>
-          <p:cNvPr id="1861223140" name=""/>
+          <p:cNvPr id="1840777128" name=""/>
           <p:cNvPicPr>
             <a:picLocks noChangeAspect="1"/>
           </p:cNvPicPr>
@@ -11021,7 +13264,7 @@
         </p:blipFill>
         <p:spPr bwMode="auto">
           <a:xfrm flipH="0" flipV="0">
-            <a:off x="2028440" y="201313"/>
+            <a:off x="2096474" y="282956"/>
             <a:ext cx="7999047" cy="6292083"/>
           </a:xfrm>
           <a:prstGeom prst="rect">
@@ -11064,7 +13307,7 @@
       </p:grpSpPr>
       <p:pic>
         <p:nvPicPr>
-          <p:cNvPr id="1409522132" name=""/>
+          <p:cNvPr id="29265030" name=""/>
           <p:cNvPicPr>
             <a:picLocks noChangeAspect="1"/>
           </p:cNvPicPr>
@@ -11119,7 +13362,7 @@
       </p:grpSpPr>
       <p:pic>
         <p:nvPicPr>
-          <p:cNvPr id="518445211" name=""/>
+          <p:cNvPr id="338095972" name=""/>
           <p:cNvPicPr>
             <a:picLocks noChangeAspect="1"/>
           </p:cNvPicPr>
@@ -11131,22 +13374,554 @@
         </p:blipFill>
         <p:spPr bwMode="auto">
           <a:xfrm flipH="0" flipV="0">
-            <a:off x="3217793" y="270792"/>
-            <a:ext cx="6390241" cy="6177232"/>
-          </a:xfrm>
-          <a:prstGeom prst="rect">
-            <a:avLst/>
-          </a:prstGeom>
-          <a:ln w="6349">
-            <a:solidFill>
-              <a:schemeClr val="accent1">
-                <a:lumMod val="50196"/>
-              </a:schemeClr>
-            </a:solidFill>
+            <a:off x="2564651" y="15362"/>
+            <a:ext cx="7062695" cy="6827270"/>
+          </a:xfrm>
+          <a:prstGeom prst="rect">
+            <a:avLst/>
+          </a:prstGeom>
+        </p:spPr>
+      </p:pic>
+      <p:sp>
+        <p:nvSpPr>
+          <p:cNvPr id="618278120" name=""/>
+          <p:cNvSpPr/>
+          <p:nvPr/>
+        </p:nvSpPr>
+        <p:spPr bwMode="auto">
+          <a:xfrm flipH="0" flipV="0">
+            <a:off x="6940687" y="215079"/>
+            <a:ext cx="2186448" cy="430159"/>
+          </a:xfrm>
+          <a:prstGeom prst="rect">
+            <a:avLst/>
+          </a:prstGeom>
+          <a:solidFill>
+            <a:srgbClr val="FFFFFF"/>
+          </a:solidFill>
+          <a:ln w="12700" cap="flat" cmpd="sng" algn="ctr">
+            <a:noFill/>
             <a:prstDash val="solid"/>
+            <a:miter lim="800000"/>
           </a:ln>
         </p:spPr>
-      </p:pic>
+        <p:style>
+          <a:lnRef idx="2">
+            <a:schemeClr val="accent1">
+              <a:shade val="50000"/>
+            </a:schemeClr>
+          </a:lnRef>
+          <a:fillRef idx="1">
+            <a:schemeClr val="accent1"/>
+          </a:fillRef>
+          <a:effectRef idx="0">
+            <a:schemeClr val="accent1"/>
+          </a:effectRef>
+          <a:fontRef idx="minor">
+            <a:schemeClr val="lt1"/>
+          </a:fontRef>
+        </p:style>
+        <p:txBody>
+          <a:bodyPr/>
+          <a:p/>
+        </p:txBody>
+      </p:sp>
+      <p:sp>
+        <p:nvSpPr>
+          <p:cNvPr id="577510310" name=""/>
+          <p:cNvSpPr/>
+          <p:nvPr/>
+        </p:nvSpPr>
+        <p:spPr bwMode="auto">
+          <a:xfrm flipH="0" flipV="0">
+            <a:off x="8154516" y="2881839"/>
+            <a:ext cx="2444482" cy="501068"/>
+          </a:xfrm>
+          <a:prstGeom prst="rect">
+            <a:avLst/>
+          </a:prstGeom>
+          <a:solidFill>
+            <a:srgbClr val="FFFFFF"/>
+          </a:solidFill>
+          <a:ln w="12700" cap="flat" cmpd="sng" algn="ctr">
+            <a:noFill/>
+            <a:prstDash val="solid"/>
+            <a:miter lim="800000"/>
+          </a:ln>
+        </p:spPr>
+        <p:style>
+          <a:lnRef idx="2">
+            <a:schemeClr val="accent1">
+              <a:shade val="50000"/>
+            </a:schemeClr>
+          </a:lnRef>
+          <a:fillRef idx="1">
+            <a:schemeClr val="accent1"/>
+          </a:fillRef>
+          <a:effectRef idx="0">
+            <a:schemeClr val="accent1"/>
+          </a:effectRef>
+          <a:fontRef idx="minor">
+            <a:schemeClr val="lt1"/>
+          </a:fontRef>
+        </p:style>
+        <p:txBody>
+          <a:bodyPr/>
+          <a:p/>
+        </p:txBody>
+      </p:sp>
+      <p:sp>
+        <p:nvSpPr>
+          <p:cNvPr id="1124416130" name=""/>
+          <p:cNvSpPr/>
+          <p:nvPr/>
+        </p:nvSpPr>
+        <p:spPr bwMode="auto">
+          <a:xfrm flipH="0" flipV="0">
+            <a:off x="4486317" y="5688146"/>
+            <a:ext cx="1786852" cy="1004168"/>
+          </a:xfrm>
+          <a:prstGeom prst="rect">
+            <a:avLst/>
+          </a:prstGeom>
+          <a:solidFill>
+            <a:srgbClr val="FFFFFF"/>
+          </a:solidFill>
+          <a:ln w="12700" cap="flat" cmpd="sng" algn="ctr">
+            <a:noFill/>
+            <a:prstDash val="solid"/>
+            <a:miter lim="800000"/>
+          </a:ln>
+        </p:spPr>
+        <p:style>
+          <a:lnRef idx="2">
+            <a:schemeClr val="accent1">
+              <a:shade val="50000"/>
+            </a:schemeClr>
+          </a:lnRef>
+          <a:fillRef idx="1">
+            <a:schemeClr val="accent1"/>
+          </a:fillRef>
+          <a:effectRef idx="0">
+            <a:schemeClr val="accent1"/>
+          </a:effectRef>
+          <a:fontRef idx="minor">
+            <a:schemeClr val="lt1"/>
+          </a:fontRef>
+        </p:style>
+        <p:txBody>
+          <a:bodyPr/>
+          <a:p/>
+        </p:txBody>
+      </p:sp>
+      <p:sp>
+        <p:nvSpPr>
+          <p:cNvPr id="1163204435" name=""/>
+          <p:cNvSpPr/>
+          <p:nvPr/>
+        </p:nvSpPr>
+        <p:spPr bwMode="auto">
+          <a:xfrm flipH="0" flipV="0">
+            <a:off x="4533302" y="1541392"/>
+            <a:ext cx="1786852" cy="1004168"/>
+          </a:xfrm>
+          <a:prstGeom prst="rect">
+            <a:avLst/>
+          </a:prstGeom>
+          <a:solidFill>
+            <a:srgbClr val="FFFFFF"/>
+          </a:solidFill>
+          <a:ln w="12700" cap="flat" cmpd="sng" algn="ctr">
+            <a:noFill/>
+            <a:prstDash val="solid"/>
+            <a:miter lim="800000"/>
+          </a:ln>
+        </p:spPr>
+        <p:style>
+          <a:lnRef idx="2">
+            <a:schemeClr val="accent1">
+              <a:shade val="50000"/>
+            </a:schemeClr>
+          </a:lnRef>
+          <a:fillRef idx="1">
+            <a:schemeClr val="accent1"/>
+          </a:fillRef>
+          <a:effectRef idx="0">
+            <a:schemeClr val="accent1"/>
+          </a:effectRef>
+          <a:fontRef idx="minor">
+            <a:schemeClr val="lt1"/>
+          </a:fontRef>
+        </p:style>
+        <p:txBody>
+          <a:bodyPr/>
+          <a:p/>
+        </p:txBody>
+      </p:sp>
+      <p:sp>
+        <p:nvSpPr>
+          <p:cNvPr id="1017404936" name=""/>
+          <p:cNvSpPr/>
+          <p:nvPr/>
+        </p:nvSpPr>
+        <p:spPr bwMode="auto">
+          <a:xfrm flipH="0" flipV="0">
+            <a:off x="2751531" y="5082559"/>
+            <a:ext cx="1614461" cy="402796"/>
+          </a:xfrm>
+          <a:prstGeom prst="rect">
+            <a:avLst/>
+          </a:prstGeom>
+          <a:solidFill>
+            <a:srgbClr val="FFFFFF"/>
+          </a:solidFill>
+          <a:ln w="12700" cap="flat" cmpd="sng" algn="ctr">
+            <a:noFill/>
+            <a:prstDash val="solid"/>
+            <a:miter lim="800000"/>
+          </a:ln>
+        </p:spPr>
+        <p:style>
+          <a:lnRef idx="2">
+            <a:schemeClr val="accent1">
+              <a:shade val="50000"/>
+            </a:schemeClr>
+          </a:lnRef>
+          <a:fillRef idx="1">
+            <a:schemeClr val="accent1"/>
+          </a:fillRef>
+          <a:effectRef idx="0">
+            <a:schemeClr val="accent1"/>
+          </a:effectRef>
+          <a:fontRef idx="minor">
+            <a:schemeClr val="lt1"/>
+          </a:fontRef>
+        </p:style>
+        <p:txBody>
+          <a:bodyPr/>
+          <a:p/>
+        </p:txBody>
+      </p:sp>
+      <p:sp>
+        <p:nvSpPr>
+          <p:cNvPr id="1774341121" name=""/>
+          <p:cNvSpPr/>
+          <p:nvPr/>
+        </p:nvSpPr>
+        <p:spPr bwMode="auto">
+          <a:xfrm flipH="0" flipV="0">
+            <a:off x="2736169" y="215079"/>
+            <a:ext cx="1321209" cy="430161"/>
+          </a:xfrm>
+          <a:prstGeom prst="rect">
+            <a:avLst/>
+          </a:prstGeom>
+          <a:solidFill>
+            <a:srgbClr val="FFFFFF"/>
+          </a:solidFill>
+          <a:ln w="12700" cap="flat" cmpd="sng" algn="ctr">
+            <a:noFill/>
+            <a:prstDash val="solid"/>
+            <a:miter lim="800000"/>
+          </a:ln>
+        </p:spPr>
+        <p:style>
+          <a:lnRef idx="2">
+            <a:schemeClr val="accent1">
+              <a:shade val="50000"/>
+            </a:schemeClr>
+          </a:lnRef>
+          <a:fillRef idx="1">
+            <a:schemeClr val="accent1"/>
+          </a:fillRef>
+          <a:effectRef idx="0">
+            <a:schemeClr val="accent1"/>
+          </a:effectRef>
+          <a:fontRef idx="minor">
+            <a:schemeClr val="lt1"/>
+          </a:fontRef>
+        </p:style>
+        <p:txBody>
+          <a:bodyPr/>
+          <a:p/>
+        </p:txBody>
+      </p:sp>
+      <p:sp>
+        <p:nvSpPr>
+          <p:cNvPr id="728966252" name=""/>
+          <p:cNvSpPr txBox="1"/>
+          <p:nvPr/>
+        </p:nvSpPr>
+        <p:spPr bwMode="auto">
+          <a:xfrm flipH="0" flipV="0">
+            <a:off x="1784658" y="215078"/>
+            <a:ext cx="3109693" cy="396599"/>
+          </a:xfrm>
+          <a:prstGeom prst="rect">
+            <a:avLst/>
+          </a:prstGeom>
+          <a:noFill/>
+        </p:spPr>
+        <p:txBody>
+          <a:bodyPr vertOverflow="overflow" horzOverflow="overflow" vert="horz" wrap="square" lIns="91440" tIns="45720" rIns="91440" bIns="45720" numCol="1" spcCol="0" rtlCol="0" fromWordArt="0" anchor="t" anchorCtr="0" forceAA="0" upright="0" compatLnSpc="0">
+            <a:spAutoFit/>
+          </a:bodyPr>
+          <a:p>
+            <a:pPr algn="ctr">
+              <a:defRPr/>
+            </a:pPr>
+            <a:r>
+              <a:rPr sz="2000" b="1">
+                <a:latin typeface="IBM Plex Sans"/>
+              </a:rPr>
+              <a:t>Message</a:t>
+            </a:r>
+            <a:endParaRPr sz="2000" b="1">
+              <a:latin typeface="IBM Plex Sans"/>
+              <a:cs typeface="IBM Plex Sans"/>
+            </a:endParaRPr>
+          </a:p>
+        </p:txBody>
+      </p:sp>
+      <p:sp>
+        <p:nvSpPr>
+          <p:cNvPr id="1134818737" name=""/>
+          <p:cNvSpPr txBox="1"/>
+          <p:nvPr/>
+        </p:nvSpPr>
+        <p:spPr bwMode="auto">
+          <a:xfrm flipH="0" flipV="0">
+            <a:off x="6893522" y="215078"/>
+            <a:ext cx="2734903" cy="396599"/>
+          </a:xfrm>
+          <a:prstGeom prst="rect">
+            <a:avLst/>
+          </a:prstGeom>
+          <a:noFill/>
+        </p:spPr>
+        <p:txBody>
+          <a:bodyPr vertOverflow="overflow" horzOverflow="overflow" vert="horz" wrap="square" lIns="91440" tIns="45720" rIns="91440" bIns="45720" numCol="1" spcCol="0" rtlCol="0" fromWordArt="0" anchor="t" anchorCtr="0" forceAA="0" upright="0" compatLnSpc="0">
+            <a:spAutoFit/>
+          </a:bodyPr>
+          <a:p>
+            <a:pPr algn="ctr">
+              <a:defRPr/>
+            </a:pPr>
+            <a:r>
+              <a:rPr sz="2000" b="1">
+                <a:latin typeface="IBM Plex Sans"/>
+              </a:rPr>
+              <a:t>Signature</a:t>
+            </a:r>
+            <a:endParaRPr sz="2000" b="1">
+              <a:latin typeface="IBM Plex Sans"/>
+              <a:cs typeface="IBM Plex Sans"/>
+            </a:endParaRPr>
+          </a:p>
+        </p:txBody>
+      </p:sp>
+      <p:sp>
+        <p:nvSpPr>
+          <p:cNvPr id="2021760122" name=""/>
+          <p:cNvSpPr txBox="1"/>
+          <p:nvPr/>
+        </p:nvSpPr>
+        <p:spPr bwMode="auto">
+          <a:xfrm flipH="0" flipV="0">
+            <a:off x="8202903" y="2986308"/>
+            <a:ext cx="3194065" cy="396599"/>
+          </a:xfrm>
+          <a:prstGeom prst="rect">
+            <a:avLst/>
+          </a:prstGeom>
+          <a:noFill/>
+        </p:spPr>
+        <p:txBody>
+          <a:bodyPr vertOverflow="overflow" horzOverflow="overflow" vert="horz" wrap="square" lIns="91440" tIns="45720" rIns="91440" bIns="45720" numCol="1" spcCol="0" rtlCol="0" fromWordArt="0" anchor="t" anchorCtr="0" forceAA="0" upright="0" compatLnSpc="0">
+            <a:spAutoFit/>
+          </a:bodyPr>
+          <a:p>
+            <a:pPr>
+              <a:defRPr/>
+            </a:pPr>
+            <a:r>
+              <a:rPr sz="2000" b="0">
+                <a:latin typeface="IBM Plex Sans"/>
+              </a:rPr>
+              <a:t>Sending</a:t>
+            </a:r>
+            <a:endParaRPr sz="2000" b="0">
+              <a:latin typeface="IBM Plex Sans"/>
+              <a:cs typeface="IBM Plex Sans"/>
+            </a:endParaRPr>
+          </a:p>
+        </p:txBody>
+      </p:sp>
+      <p:sp>
+        <p:nvSpPr>
+          <p:cNvPr id="1091897644" name=""/>
+          <p:cNvSpPr txBox="1"/>
+          <p:nvPr/>
+        </p:nvSpPr>
+        <p:spPr bwMode="auto">
+          <a:xfrm flipH="0" flipV="0">
+            <a:off x="2113704" y="5088755"/>
+            <a:ext cx="1956099" cy="396599"/>
+          </a:xfrm>
+          <a:prstGeom prst="rect">
+            <a:avLst/>
+          </a:prstGeom>
+          <a:noFill/>
+        </p:spPr>
+        <p:txBody>
+          <a:bodyPr vertOverflow="overflow" horzOverflow="overflow" vert="horz" wrap="square" lIns="91440" tIns="45720" rIns="91440" bIns="45720" numCol="1" spcCol="0" rtlCol="0" fromWordArt="0" anchor="t" anchorCtr="0" forceAA="0" upright="0" compatLnSpc="0">
+            <a:spAutoFit/>
+          </a:bodyPr>
+          <a:p>
+            <a:pPr algn="r">
+              <a:defRPr/>
+            </a:pPr>
+            <a:r>
+              <a:rPr sz="2000" b="0">
+                <a:latin typeface="IBM Plex Sans"/>
+              </a:rPr>
+              <a:t>OK</a:t>
+            </a:r>
+            <a:endParaRPr sz="2000" b="0">
+              <a:latin typeface="IBM Plex Sans"/>
+              <a:cs typeface="IBM Plex Sans"/>
+            </a:endParaRPr>
+          </a:p>
+        </p:txBody>
+      </p:sp>
+      <p:sp>
+        <p:nvSpPr>
+          <p:cNvPr id="1632395688" name=""/>
+          <p:cNvSpPr txBox="1"/>
+          <p:nvPr/>
+        </p:nvSpPr>
+        <p:spPr bwMode="auto">
+          <a:xfrm flipH="0" flipV="0">
+            <a:off x="3896720" y="1539360"/>
+            <a:ext cx="2662335" cy="579479"/>
+          </a:xfrm>
+          <a:prstGeom prst="rect">
+            <a:avLst/>
+          </a:prstGeom>
+          <a:noFill/>
+        </p:spPr>
+        <p:txBody>
+          <a:bodyPr vertOverflow="overflow" horzOverflow="overflow" vert="horz" wrap="square" lIns="91440" tIns="45720" rIns="91440" bIns="45720" numCol="1" spcCol="0" rtlCol="0" fromWordArt="0" anchor="t" anchorCtr="0" forceAA="0" upright="0" compatLnSpc="0">
+            <a:spAutoFit/>
+          </a:bodyPr>
+          <a:p>
+            <a:pPr algn="ctr">
+              <a:defRPr/>
+            </a:pPr>
+            <a:r>
+              <a:rPr sz="1600" b="0">
+                <a:latin typeface="IBM Plex Sans"/>
+              </a:rPr>
+              <a:t>Signing </a:t>
+            </a:r>
+            <a:r>
+              <a:rPr sz="1600" b="0" lang="fr-FR">
+                <a:latin typeface="IBM Plex Sans"/>
+              </a:rPr>
+              <a:t>with </a:t>
+            </a:r>
+            <a:r>
+              <a:rPr sz="1600" b="0">
+                <a:latin typeface="IBM Plex Sans"/>
+              </a:rPr>
+              <a:t>private </a:t>
+            </a:r>
+            <a:r>
+              <a:rPr sz="1600" b="0" lang="fr-FR">
+                <a:latin typeface="IBM Plex Sans"/>
+              </a:rPr>
+              <a:t>key </a:t>
+            </a:r>
+            <a:r>
+              <a:rPr sz="1600" b="0">
+                <a:latin typeface="IBM Plex Sans"/>
+              </a:rPr>
+              <a:t/>
+            </a:r>
+            <a:endParaRPr sz="1600" b="0">
+              <a:latin typeface="IBM Plex Sans"/>
+              <a:cs typeface="IBM Plex Sans"/>
+            </a:endParaRPr>
+          </a:p>
+          <a:p>
+            <a:pPr algn="ctr"/>
+          </a:p>
+        </p:txBody>
+      </p:sp>
+      <p:sp>
+        <p:nvSpPr>
+          <p:cNvPr id="1469490840" name=""/>
+          <p:cNvSpPr txBox="1"/>
+          <p:nvPr/>
+        </p:nvSpPr>
+        <p:spPr bwMode="auto">
+          <a:xfrm flipH="0" flipV="0">
+            <a:off x="3621937" y="5686113"/>
+            <a:ext cx="3015771" cy="579479"/>
+          </a:xfrm>
+          <a:prstGeom prst="rect">
+            <a:avLst/>
+          </a:prstGeom>
+          <a:noFill/>
+        </p:spPr>
+        <p:txBody>
+          <a:bodyPr vertOverflow="overflow" horzOverflow="overflow" vert="horz" wrap="square" lIns="91440" tIns="45720" rIns="91440" bIns="45720" numCol="1" spcCol="0" rtlCol="0" fromWordArt="0" anchor="t" anchorCtr="0" forceAA="0" upright="0" compatLnSpc="0">
+            <a:spAutoFit/>
+          </a:bodyPr>
+          <a:p>
+            <a:pPr algn="ctr">
+              <a:defRPr/>
+            </a:pPr>
+            <a:r>
+              <a:rPr sz="1600" b="0">
+                <a:latin typeface="IBM Plex Sans"/>
+              </a:rPr>
+              <a:t>Verifying </a:t>
+            </a:r>
+            <a:r>
+              <a:rPr sz="1600" b="0" lang="fr-FR">
+                <a:latin typeface="IBM Plex Sans"/>
+              </a:rPr>
+              <a:t>with </a:t>
+            </a:r>
+            <a:r>
+              <a:rPr sz="1600" b="0">
+                <a:latin typeface="IBM Plex Sans"/>
+              </a:rPr>
+              <a:t>public </a:t>
+            </a:r>
+            <a:r>
+              <a:rPr sz="1600" b="0" lang="fr-FR">
+                <a:latin typeface="IBM Plex Sans"/>
+              </a:rPr>
+              <a:t>key </a:t>
+            </a:r>
+            <a:r>
+              <a:rPr sz="1600" b="0">
+                <a:latin typeface="IBM Plex Sans"/>
+              </a:rPr>
+              <a:t/>
+            </a:r>
+            <a:endParaRPr sz="1600" b="0">
+              <a:latin typeface="IBM Plex Sans"/>
+              <a:cs typeface="IBM Plex Sans"/>
+            </a:endParaRPr>
+          </a:p>
+          <a:p>
+            <a:pPr algn="ctr"/>
+          </a:p>
+        </p:txBody>
+      </p:sp>
     </p:spTree>
   </p:cSld>
   <p:clrMapOvr>
@@ -11182,7 +13957,7 @@
       </p:grpSpPr>
       <p:pic>
         <p:nvPicPr>
-          <p:cNvPr id="753851699" name=""/>
+          <p:cNvPr id="2003422597" name=""/>
           <p:cNvPicPr>
             <a:picLocks noChangeAspect="1"/>
           </p:cNvPicPr>
@@ -11237,7 +14012,7 @@
       </p:grpSpPr>
       <p:pic>
         <p:nvPicPr>
-          <p:cNvPr id="1214095973" name=""/>
+          <p:cNvPr id="1352813179" name=""/>
           <p:cNvPicPr>
             <a:picLocks noChangeAspect="1"/>
           </p:cNvPicPr>
@@ -11292,7 +14067,7 @@
       </p:grpSpPr>
       <p:pic>
         <p:nvPicPr>
-          <p:cNvPr id="1470953209" name=""/>
+          <p:cNvPr id="1524021545" name=""/>
           <p:cNvPicPr>
             <a:picLocks noChangeAspect="1"/>
           </p:cNvPicPr>
@@ -11347,7 +14122,7 @@
       </p:grpSpPr>
       <p:pic>
         <p:nvPicPr>
-          <p:cNvPr id="1711206469" name=""/>
+          <p:cNvPr id="1220464501" name=""/>
           <p:cNvPicPr>
             <a:picLocks noChangeAspect="1"/>
           </p:cNvPicPr>
@@ -11402,7 +14177,7 @@
       </p:grpSpPr>
       <p:pic>
         <p:nvPicPr>
-          <p:cNvPr id="2049465964" name=""/>
+          <p:cNvPr id="837248353" name=""/>
           <p:cNvPicPr>
             <a:picLocks noChangeAspect="1"/>
           </p:cNvPicPr>
@@ -11457,7 +14232,7 @@
       </p:grpSpPr>
       <p:pic>
         <p:nvPicPr>
-          <p:cNvPr id="1167844053" name=""/>
+          <p:cNvPr id="693169742" name=""/>
           <p:cNvPicPr>
             <a:picLocks noChangeAspect="1"/>
           </p:cNvPicPr>
@@ -11512,7 +14287,7 @@
       </p:grpSpPr>
       <p:pic>
         <p:nvPicPr>
-          <p:cNvPr id="2088438888" name=""/>
+          <p:cNvPr id="1895377865" name=""/>
           <p:cNvPicPr>
             <a:picLocks noChangeAspect="1"/>
           </p:cNvPicPr>
@@ -11524,8 +14299,8 @@
         </p:blipFill>
         <p:spPr bwMode="auto">
           <a:xfrm flipH="0" flipV="0">
-            <a:off x="1967131" y="1152363"/>
-            <a:ext cx="8430118" cy="4417200"/>
+            <a:off x="1069060" y="609600"/>
+            <a:ext cx="9925305" cy="5200646"/>
           </a:xfrm>
           <a:prstGeom prst="rect">
             <a:avLst/>
@@ -11540,6 +14315,49 @@
           </a:ln>
         </p:spPr>
       </p:pic>
+      <p:sp>
+        <p:nvSpPr>
+          <p:cNvPr id="812837255" name=""/>
+          <p:cNvSpPr txBox="1"/>
+          <p:nvPr/>
+        </p:nvSpPr>
+        <p:spPr bwMode="auto">
+          <a:xfrm rot="0" flipH="0" flipV="0">
+            <a:off x="2755485" y="5941694"/>
+            <a:ext cx="7268309" cy="305159"/>
+          </a:xfrm>
+          <a:prstGeom prst="rect">
+            <a:avLst/>
+          </a:prstGeom>
+          <a:noFill/>
+        </p:spPr>
+        <p:txBody>
+          <a:bodyPr vertOverflow="overflow" horzOverflow="overflow" vert="horz" wrap="square" lIns="91440" tIns="45720" rIns="91440" bIns="45720" numCol="1" spcCol="0" rtlCol="0" fromWordArt="0" anchor="t" anchorCtr="0" forceAA="0" upright="0" compatLnSpc="0">
+            <a:spAutoFit/>
+          </a:bodyPr>
+          <a:p>
+            <a:pPr algn="ctr">
+              <a:defRPr/>
+            </a:pPr>
+            <a:r>
+              <a:rPr sz="1400" b="0" i="1">
+                <a:latin typeface="IBM Plex Sans"/>
+              </a:rPr>
+              <a:t>Satoshi Nakamoto’s Page - </a:t>
+            </a:r>
+            <a:r>
+              <a:rPr sz="1400" b="0" i="1" lang="fr-FR">
+                <a:latin typeface="IBM Plex Sans"/>
+              </a:rPr>
+              <a:t>Never received any gift</a:t>
+            </a:r>
+            <a:endParaRPr sz="2800" b="0" i="1">
+              <a:latin typeface="IBM Plex Sans"/>
+              <a:cs typeface="IBM Plex Sans"/>
+            </a:endParaRPr>
+          </a:p>
+        </p:txBody>
+      </p:sp>
     </p:spTree>
   </p:cSld>
   <p:clrMapOvr>
@@ -11575,7 +14393,7 @@
       </p:grpSpPr>
       <p:pic>
         <p:nvPicPr>
-          <p:cNvPr id="1677102229" name=""/>
+          <p:cNvPr id="990356153" name=""/>
           <p:cNvPicPr>
             <a:picLocks noChangeAspect="1"/>
           </p:cNvPicPr>
@@ -11630,7 +14448,7 @@
       </p:grpSpPr>
       <p:pic>
         <p:nvPicPr>
-          <p:cNvPr id="56936338" name=""/>
+          <p:cNvPr id="1106743524" name=""/>
           <p:cNvPicPr>
             <a:picLocks noChangeAspect="1"/>
           </p:cNvPicPr>
@@ -11685,7 +14503,7 @@
       </p:grpSpPr>
       <p:pic>
         <p:nvPicPr>
-          <p:cNvPr id="1916927415" name=""/>
+          <p:cNvPr id="1731644631" name=""/>
           <p:cNvPicPr>
             <a:picLocks noChangeAspect="1"/>
           </p:cNvPicPr>
@@ -11697,8 +14515,8 @@
         </p:blipFill>
         <p:spPr bwMode="auto">
           <a:xfrm flipH="0" flipV="0">
-            <a:off x="1715892" y="1105701"/>
-            <a:ext cx="8939279" cy="4646597"/>
+            <a:off x="1441575" y="1009649"/>
+            <a:ext cx="9308848" cy="4838697"/>
           </a:xfrm>
           <a:prstGeom prst="rect">
             <a:avLst/>
@@ -11707,13 +14525,13 @@
       </p:pic>
       <p:sp>
         <p:nvSpPr>
-          <p:cNvPr id="1218447333" name=""/>
+          <p:cNvPr id="342911670" name=""/>
           <p:cNvSpPr txBox="1"/>
           <p:nvPr/>
         </p:nvSpPr>
         <p:spPr bwMode="auto">
           <a:xfrm flipH="0" flipV="0">
-            <a:off x="2164000" y="5833321"/>
+            <a:off x="1933203" y="5985901"/>
             <a:ext cx="7863998" cy="305159"/>
           </a:xfrm>
           <a:prstGeom prst="rect">
@@ -11777,7 +14595,7 @@
       </p:grpSpPr>
       <p:pic>
         <p:nvPicPr>
-          <p:cNvPr id="76356950" name=""/>
+          <p:cNvPr id="1050526696" name=""/>
           <p:cNvPicPr>
             <a:picLocks noChangeAspect="1"/>
           </p:cNvPicPr>
@@ -11788,9 +14606,31 @@
           <a:stretch/>
         </p:blipFill>
         <p:spPr bwMode="auto">
-          <a:xfrm flipH="0" flipV="0">
-            <a:off x="4022271" y="571498"/>
-            <a:ext cx="4659084" cy="5823856"/>
+          <a:xfrm>
+            <a:off x="3238499" y="666749"/>
+            <a:ext cx="5715000" cy="5524499"/>
+          </a:xfrm>
+          <a:prstGeom prst="rect">
+            <a:avLst/>
+          </a:prstGeom>
+        </p:spPr>
+      </p:pic>
+      <p:pic>
+        <p:nvPicPr>
+          <p:cNvPr id="1775366303" name=""/>
+          <p:cNvPicPr>
+            <a:picLocks noChangeAspect="1"/>
+          </p:cNvPicPr>
+          <p:nvPr/>
+        </p:nvPicPr>
+        <p:blipFill>
+          <a:blip r:embed="rId4"/>
+          <a:stretch/>
+        </p:blipFill>
+        <p:spPr bwMode="auto">
+          <a:xfrm>
+            <a:off x="3352799" y="0"/>
+            <a:ext cx="5486399" cy="6857999"/>
           </a:xfrm>
           <a:prstGeom prst="rect">
             <a:avLst/>
@@ -11832,7 +14672,7 @@
       </p:grpSpPr>
       <p:pic>
         <p:nvPicPr>
-          <p:cNvPr id="402566123" name=""/>
+          <p:cNvPr id="759069393" name=""/>
           <p:cNvPicPr>
             <a:picLocks noChangeAspect="1"/>
           </p:cNvPicPr>
@@ -11887,7 +14727,7 @@
       </p:grpSpPr>
       <p:pic>
         <p:nvPicPr>
-          <p:cNvPr id="2017179169" name=""/>
+          <p:cNvPr id="2132540410" name=""/>
           <p:cNvPicPr>
             <a:picLocks noChangeAspect="1"/>
           </p:cNvPicPr>
@@ -11942,7 +14782,7 @@
       </p:grpSpPr>
       <p:pic>
         <p:nvPicPr>
-          <p:cNvPr id="366969068" name=""/>
+          <p:cNvPr id="1517286389" name=""/>
           <p:cNvPicPr>
             <a:picLocks noChangeAspect="1"/>
           </p:cNvPicPr>
@@ -11954,8 +14794,8 @@
         </p:blipFill>
         <p:spPr bwMode="auto">
           <a:xfrm flipH="0" flipV="0">
-            <a:off x="4637395" y="1764923"/>
-            <a:ext cx="3624779" cy="3597423"/>
+            <a:off x="3928577" y="1277935"/>
+            <a:ext cx="4334842" cy="4302126"/>
           </a:xfrm>
           <a:prstGeom prst="rect">
             <a:avLst/>
@@ -11997,7 +14837,7 @@
       </p:grpSpPr>
       <p:pic>
         <p:nvPicPr>
-          <p:cNvPr id="199791247" name=""/>
+          <p:cNvPr id="1457864823" name=""/>
           <p:cNvPicPr>
             <a:picLocks noChangeAspect="1"/>
           </p:cNvPicPr>
@@ -12009,20 +14849,12 @@
         </p:blipFill>
         <p:spPr bwMode="auto">
           <a:xfrm flipH="0" flipV="0">
-            <a:off x="190659" y="457198"/>
+            <a:off x="245088" y="457199"/>
             <a:ext cx="11701821" cy="5943597"/>
           </a:xfrm>
           <a:prstGeom prst="rect">
             <a:avLst/>
           </a:prstGeom>
-          <a:ln w="6349">
-            <a:solidFill>
-              <a:schemeClr val="accent1">
-                <a:lumMod val="50196"/>
-              </a:schemeClr>
-            </a:solidFill>
-            <a:prstDash val="solid"/>
-          </a:ln>
         </p:spPr>
       </p:pic>
     </p:spTree>
@@ -12060,7 +14892,7 @@
       </p:grpSpPr>
       <p:pic>
         <p:nvPicPr>
-          <p:cNvPr id="417404604" name=""/>
+          <p:cNvPr id="1592298888" name=""/>
           <p:cNvPicPr>
             <a:picLocks noChangeAspect="1"/>
           </p:cNvPicPr>
@@ -12115,7 +14947,7 @@
       </p:grpSpPr>
       <p:pic>
         <p:nvPicPr>
-          <p:cNvPr id="1944261120" name=""/>
+          <p:cNvPr id="768273817" name=""/>
           <p:cNvPicPr>
             <a:picLocks noChangeAspect="1"/>
           </p:cNvPicPr>
@@ -12170,7 +15002,7 @@
       </p:grpSpPr>
       <p:pic>
         <p:nvPicPr>
-          <p:cNvPr id="463699615" name=""/>
+          <p:cNvPr id="212559532" name=""/>
           <p:cNvPicPr>
             <a:picLocks noChangeAspect="1"/>
           </p:cNvPicPr>
@@ -12225,7 +15057,7 @@
       </p:grpSpPr>
       <p:pic>
         <p:nvPicPr>
-          <p:cNvPr id="1701335651" name=""/>
+          <p:cNvPr id="597214529" name=""/>
           <p:cNvPicPr>
             <a:picLocks noChangeAspect="1"/>
           </p:cNvPicPr>
@@ -12243,16 +15075,89 @@
           <a:prstGeom prst="rect">
             <a:avLst/>
           </a:prstGeom>
-          <a:ln w="6349">
-            <a:solidFill>
-              <a:schemeClr val="accent1">
-                <a:lumMod val="50196"/>
-              </a:schemeClr>
-            </a:solidFill>
+        </p:spPr>
+      </p:pic>
+      <p:sp>
+        <p:nvSpPr>
+          <p:cNvPr id="136547751" name=""/>
+          <p:cNvSpPr/>
+          <p:nvPr/>
+        </p:nvSpPr>
+        <p:spPr bwMode="auto">
+          <a:xfrm flipH="0" flipV="0">
+            <a:off x="3420449" y="1381124"/>
+            <a:ext cx="6781799" cy="409574"/>
+          </a:xfrm>
+          <a:prstGeom prst="rect">
+            <a:avLst/>
+          </a:prstGeom>
+          <a:solidFill>
+            <a:schemeClr val="bg1"/>
+          </a:solidFill>
+          <a:ln w="12700" cap="flat" cmpd="sng" algn="ctr">
+            <a:noFill/>
             <a:prstDash val="solid"/>
+            <a:miter lim="800000"/>
           </a:ln>
         </p:spPr>
-      </p:pic>
+        <p:style>
+          <a:lnRef idx="2">
+            <a:schemeClr val="accent1">
+              <a:shade val="50000"/>
+            </a:schemeClr>
+          </a:lnRef>
+          <a:fillRef idx="1">
+            <a:schemeClr val="accent1"/>
+          </a:fillRef>
+          <a:effectRef idx="0">
+            <a:schemeClr val="accent1"/>
+          </a:effectRef>
+          <a:fontRef idx="minor">
+            <a:schemeClr val="lt1"/>
+          </a:fontRef>
+        </p:style>
+        <p:txBody>
+          <a:bodyPr/>
+          <a:p/>
+        </p:txBody>
+      </p:sp>
+      <p:sp>
+        <p:nvSpPr>
+          <p:cNvPr id="1780372163" name=""/>
+          <p:cNvSpPr txBox="1"/>
+          <p:nvPr/>
+        </p:nvSpPr>
+        <p:spPr bwMode="auto">
+          <a:xfrm flipH="0" flipV="0">
+            <a:off x="572474" y="1155371"/>
+            <a:ext cx="11183069" cy="335639"/>
+          </a:xfrm>
+          <a:prstGeom prst="rect">
+            <a:avLst/>
+          </a:prstGeom>
+          <a:noFill/>
+        </p:spPr>
+        <p:txBody>
+          <a:bodyPr vertOverflow="overflow" horzOverflow="overflow" vert="horz" wrap="square" lIns="91440" tIns="45720" rIns="91440" bIns="45720" numCol="1" spcCol="0" rtlCol="0" fromWordArt="0" anchor="t" anchorCtr="0" forceAA="0" upright="0" compatLnSpc="0">
+            <a:spAutoFit/>
+          </a:bodyPr>
+          <a:p>
+            <a:pPr algn="ctr">
+              <a:defRPr/>
+            </a:pPr>
+            <a:r>
+              <a:rPr sz="1600">
+                <a:latin typeface="IBM Plex Sans"/>
+              </a:rPr>
+              <a:t>Patoshi Blocks &amp; Inverted Timestamps (Block number/ExtraNonce)</a:t>
+            </a:r>
+            <a:endParaRPr sz="1800">
+              <a:latin typeface="IBM Plex Sans"/>
+              <a:cs typeface="IBM Plex Sans"/>
+            </a:endParaRPr>
+          </a:p>
+        </p:txBody>
+      </p:sp>
     </p:spTree>
   </p:cSld>
   <p:clrMapOvr>
@@ -12288,7 +15193,7 @@
       </p:grpSpPr>
       <p:pic>
         <p:nvPicPr>
-          <p:cNvPr id="596097044" name=""/>
+          <p:cNvPr id="638849796" name=""/>
           <p:cNvPicPr>
             <a:picLocks noChangeAspect="1"/>
           </p:cNvPicPr>
@@ -12306,16 +15211,170 @@
           <a:prstGeom prst="rect">
             <a:avLst/>
           </a:prstGeom>
-          <a:ln w="6349">
-            <a:solidFill>
-              <a:schemeClr val="accent1">
-                <a:lumMod val="50196"/>
-              </a:schemeClr>
-            </a:solidFill>
+        </p:spPr>
+      </p:pic>
+      <p:sp>
+        <p:nvSpPr>
+          <p:cNvPr id="1446829500" name=""/>
+          <p:cNvSpPr/>
+          <p:nvPr/>
+        </p:nvSpPr>
+        <p:spPr bwMode="auto">
+          <a:xfrm flipH="0" flipV="0">
+            <a:off x="3963375" y="419099"/>
+            <a:ext cx="6353174" cy="276224"/>
+          </a:xfrm>
+          <a:prstGeom prst="rect">
+            <a:avLst/>
+          </a:prstGeom>
+          <a:solidFill>
+            <a:srgbClr val="FFFFFF"/>
+          </a:solidFill>
+          <a:ln w="12700" cap="flat" cmpd="sng" algn="ctr">
+            <a:noFill/>
             <a:prstDash val="solid"/>
+            <a:miter lim="800000"/>
           </a:ln>
         </p:spPr>
-      </p:pic>
+        <p:style>
+          <a:lnRef idx="2">
+            <a:schemeClr val="accent1">
+              <a:shade val="50000"/>
+            </a:schemeClr>
+          </a:lnRef>
+          <a:fillRef idx="1">
+            <a:schemeClr val="accent1"/>
+          </a:fillRef>
+          <a:effectRef idx="0">
+            <a:schemeClr val="accent1"/>
+          </a:effectRef>
+          <a:fontRef idx="minor">
+            <a:schemeClr val="lt1"/>
+          </a:fontRef>
+        </p:style>
+        <p:txBody>
+          <a:bodyPr/>
+          <a:p/>
+        </p:txBody>
+      </p:sp>
+      <p:sp>
+        <p:nvSpPr>
+          <p:cNvPr id="299163990" name=""/>
+          <p:cNvSpPr/>
+          <p:nvPr/>
+        </p:nvSpPr>
+        <p:spPr bwMode="auto">
+          <a:xfrm flipH="0" flipV="0">
+            <a:off x="848699" y="1847849"/>
+            <a:ext cx="276224" cy="2543175"/>
+          </a:xfrm>
+          <a:prstGeom prst="rect">
+            <a:avLst/>
+          </a:prstGeom>
+          <a:solidFill>
+            <a:srgbClr val="FFFFFF"/>
+          </a:solidFill>
+          <a:ln w="12700" cap="flat" cmpd="sng" algn="ctr">
+            <a:noFill/>
+            <a:prstDash val="solid"/>
+            <a:miter lim="800000"/>
+          </a:ln>
+        </p:spPr>
+        <p:style>
+          <a:lnRef idx="2">
+            <a:schemeClr val="accent1">
+              <a:shade val="50000"/>
+            </a:schemeClr>
+          </a:lnRef>
+          <a:fillRef idx="1">
+            <a:schemeClr val="accent1"/>
+          </a:fillRef>
+          <a:effectRef idx="0">
+            <a:schemeClr val="accent1"/>
+          </a:effectRef>
+          <a:fontRef idx="minor">
+            <a:schemeClr val="lt1"/>
+          </a:fontRef>
+        </p:style>
+        <p:txBody>
+          <a:bodyPr/>
+          <a:p/>
+        </p:txBody>
+      </p:sp>
+      <p:sp>
+        <p:nvSpPr>
+          <p:cNvPr id="2067220978" name=""/>
+          <p:cNvSpPr txBox="1"/>
+          <p:nvPr/>
+        </p:nvSpPr>
+        <p:spPr bwMode="auto">
+          <a:xfrm flipH="0" flipV="0">
+            <a:off x="1439249" y="228599"/>
+            <a:ext cx="10582993" cy="335639"/>
+          </a:xfrm>
+          <a:prstGeom prst="rect">
+            <a:avLst/>
+          </a:prstGeom>
+          <a:noFill/>
+        </p:spPr>
+        <p:txBody>
+          <a:bodyPr vertOverflow="overflow" horzOverflow="overflow" vert="horz" wrap="square" lIns="91440" tIns="45720" rIns="91440" bIns="45720" numCol="1" spcCol="0" rtlCol="0" fromWordArt="0" anchor="t" anchorCtr="0" forceAA="0" upright="0" compatLnSpc="0">
+            <a:spAutoFit/>
+          </a:bodyPr>
+          <a:p>
+            <a:pPr algn="ctr">
+              <a:defRPr/>
+            </a:pPr>
+            <a:r>
+              <a:rPr sz="1600">
+                <a:latin typeface="IBM Plex Sans"/>
+              </a:rPr>
+              <a:t>Estimate of Satoshi’s percentage of the network</a:t>
+            </a:r>
+            <a:endParaRPr sz="1600">
+              <a:latin typeface="IBM Plex Sans"/>
+              <a:cs typeface="IBM Plex Sans"/>
+            </a:endParaRPr>
+          </a:p>
+        </p:txBody>
+      </p:sp>
+      <p:sp>
+        <p:nvSpPr>
+          <p:cNvPr id="36166462" name=""/>
+          <p:cNvSpPr txBox="1"/>
+          <p:nvPr/>
+        </p:nvSpPr>
+        <p:spPr bwMode="auto">
+          <a:xfrm rot="16199969" flipH="0" flipV="0">
+            <a:off x="-21773" y="2867636"/>
+            <a:ext cx="1988233" cy="305159"/>
+          </a:xfrm>
+          <a:prstGeom prst="rect">
+            <a:avLst/>
+          </a:prstGeom>
+          <a:noFill/>
+        </p:spPr>
+        <p:txBody>
+          <a:bodyPr vertOverflow="overflow" horzOverflow="overflow" vert="horz" wrap="none" lIns="91440" tIns="45720" rIns="91440" bIns="45720" numCol="1" spcCol="0" rtlCol="0" fromWordArt="0" anchor="t" anchorCtr="0" forceAA="0" upright="0" compatLnSpc="0">
+            <a:spAutoFit/>
+          </a:bodyPr>
+          <a:p>
+            <a:pPr algn="ctr">
+              <a:defRPr/>
+            </a:pPr>
+            <a:r>
+              <a:rPr sz="1400">
+                <a:latin typeface="IBM Plex Sans"/>
+              </a:rPr>
+              <a:t>Percentage of network</a:t>
+            </a:r>
+            <a:endParaRPr sz="1400">
+              <a:latin typeface="IBM Plex Sans"/>
+              <a:cs typeface="IBM Plex Sans"/>
+            </a:endParaRPr>
+          </a:p>
+        </p:txBody>
+      </p:sp>
     </p:spTree>
   </p:cSld>
   <p:clrMapOvr>
@@ -12351,7 +15410,7 @@
       </p:grpSpPr>
       <p:pic>
         <p:nvPicPr>
-          <p:cNvPr id="1142862465" name=""/>
+          <p:cNvPr id="1648874058" name=""/>
           <p:cNvPicPr>
             <a:picLocks noChangeAspect="1"/>
           </p:cNvPicPr>
@@ -12369,16 +15428,338 @@
           <a:prstGeom prst="rect">
             <a:avLst/>
           </a:prstGeom>
-          <a:ln w="6349">
-            <a:solidFill>
-              <a:schemeClr val="accent1">
-                <a:lumMod val="50196"/>
-              </a:schemeClr>
-            </a:solidFill>
+        </p:spPr>
+      </p:pic>
+      <p:sp>
+        <p:nvSpPr>
+          <p:cNvPr id="1513896667" name=""/>
+          <p:cNvSpPr/>
+          <p:nvPr/>
+        </p:nvSpPr>
+        <p:spPr bwMode="auto">
+          <a:xfrm flipH="0" flipV="0">
+            <a:off x="745567" y="2441863"/>
+            <a:ext cx="329045" cy="1203613"/>
+          </a:xfrm>
+          <a:prstGeom prst="rect">
+            <a:avLst/>
+          </a:prstGeom>
+          <a:solidFill>
+            <a:srgbClr val="FFFFFF"/>
+          </a:solidFill>
+          <a:ln w="12700" cap="flat" cmpd="sng" algn="ctr">
+            <a:noFill/>
             <a:prstDash val="solid"/>
+            <a:miter lim="800000"/>
           </a:ln>
         </p:spPr>
-      </p:pic>
+        <p:style>
+          <a:lnRef idx="2">
+            <a:schemeClr val="accent1">
+              <a:shade val="50000"/>
+            </a:schemeClr>
+          </a:lnRef>
+          <a:fillRef idx="1">
+            <a:schemeClr val="accent1"/>
+          </a:fillRef>
+          <a:effectRef idx="0">
+            <a:schemeClr val="accent1"/>
+          </a:effectRef>
+          <a:fontRef idx="minor">
+            <a:schemeClr val="lt1"/>
+          </a:fontRef>
+        </p:style>
+        <p:txBody>
+          <a:bodyPr/>
+          <a:p/>
+        </p:txBody>
+      </p:sp>
+      <p:sp>
+        <p:nvSpPr>
+          <p:cNvPr id="1790721780" name=""/>
+          <p:cNvSpPr/>
+          <p:nvPr/>
+        </p:nvSpPr>
+        <p:spPr bwMode="auto">
+          <a:xfrm flipH="0" flipV="0">
+            <a:off x="4877775" y="333374"/>
+            <a:ext cx="4610099" cy="304799"/>
+          </a:xfrm>
+          <a:prstGeom prst="rect">
+            <a:avLst/>
+          </a:prstGeom>
+          <a:solidFill>
+            <a:srgbClr val="FFFFFF"/>
+          </a:solidFill>
+          <a:ln w="12700" cap="flat" cmpd="sng" algn="ctr">
+            <a:noFill/>
+            <a:prstDash val="solid"/>
+            <a:miter lim="800000"/>
+          </a:ln>
+        </p:spPr>
+        <p:style>
+          <a:lnRef idx="2">
+            <a:schemeClr val="accent1">
+              <a:shade val="50000"/>
+            </a:schemeClr>
+          </a:lnRef>
+          <a:fillRef idx="1">
+            <a:schemeClr val="accent1"/>
+          </a:fillRef>
+          <a:effectRef idx="0">
+            <a:schemeClr val="accent1"/>
+          </a:effectRef>
+          <a:fontRef idx="minor">
+            <a:schemeClr val="lt1"/>
+          </a:fontRef>
+        </p:style>
+        <p:txBody>
+          <a:bodyPr/>
+          <a:p/>
+        </p:txBody>
+      </p:sp>
+      <p:sp>
+        <p:nvSpPr>
+          <p:cNvPr id="646389776" name=""/>
+          <p:cNvSpPr/>
+          <p:nvPr/>
+        </p:nvSpPr>
+        <p:spPr bwMode="auto">
+          <a:xfrm flipH="0" flipV="0">
+            <a:off x="4925399" y="6095999"/>
+            <a:ext cx="1571625" cy="438149"/>
+          </a:xfrm>
+          <a:prstGeom prst="rect">
+            <a:avLst/>
+          </a:prstGeom>
+          <a:solidFill>
+            <a:srgbClr val="FFFFFF"/>
+          </a:solidFill>
+          <a:ln w="12700" cap="flat" cmpd="sng" algn="ctr">
+            <a:noFill/>
+            <a:prstDash val="solid"/>
+            <a:miter lim="800000"/>
+          </a:ln>
+        </p:spPr>
+        <p:style>
+          <a:lnRef idx="2">
+            <a:schemeClr val="accent1">
+              <a:shade val="50000"/>
+            </a:schemeClr>
+          </a:lnRef>
+          <a:fillRef idx="1">
+            <a:schemeClr val="accent1"/>
+          </a:fillRef>
+          <a:effectRef idx="0">
+            <a:schemeClr val="accent1"/>
+          </a:effectRef>
+          <a:fontRef idx="minor">
+            <a:schemeClr val="lt1"/>
+          </a:fontRef>
+        </p:style>
+        <p:txBody>
+          <a:bodyPr/>
+          <a:p/>
+        </p:txBody>
+      </p:sp>
+      <p:sp>
+        <p:nvSpPr>
+          <p:cNvPr id="654449911" name=""/>
+          <p:cNvSpPr/>
+          <p:nvPr/>
+        </p:nvSpPr>
+        <p:spPr bwMode="auto">
+          <a:xfrm flipH="0" flipV="0">
+            <a:off x="6811349" y="6095999"/>
+            <a:ext cx="1571625" cy="438148"/>
+          </a:xfrm>
+          <a:prstGeom prst="rect">
+            <a:avLst/>
+          </a:prstGeom>
+          <a:solidFill>
+            <a:srgbClr val="FFFFFF"/>
+          </a:solidFill>
+          <a:ln w="12700" cap="flat" cmpd="sng" algn="ctr">
+            <a:noFill/>
+            <a:prstDash val="solid"/>
+            <a:miter lim="800000"/>
+          </a:ln>
+        </p:spPr>
+        <p:style>
+          <a:lnRef idx="2">
+            <a:schemeClr val="accent1">
+              <a:shade val="50000"/>
+            </a:schemeClr>
+          </a:lnRef>
+          <a:fillRef idx="1">
+            <a:schemeClr val="accent1"/>
+          </a:fillRef>
+          <a:effectRef idx="0">
+            <a:schemeClr val="accent1"/>
+          </a:effectRef>
+          <a:fontRef idx="minor">
+            <a:schemeClr val="lt1"/>
+          </a:fontRef>
+        </p:style>
+        <p:txBody>
+          <a:bodyPr/>
+          <a:p/>
+        </p:txBody>
+      </p:sp>
+      <p:sp>
+        <p:nvSpPr>
+          <p:cNvPr id="1270840435" name=""/>
+          <p:cNvSpPr txBox="1"/>
+          <p:nvPr/>
+        </p:nvSpPr>
+        <p:spPr bwMode="auto">
+          <a:xfrm flipH="0" flipV="0">
+            <a:off x="1639274" y="170862"/>
+            <a:ext cx="9582868" cy="366120"/>
+          </a:xfrm>
+          <a:prstGeom prst="rect">
+            <a:avLst/>
+          </a:prstGeom>
+          <a:noFill/>
+        </p:spPr>
+        <p:txBody>
+          <a:bodyPr vertOverflow="overflow" horzOverflow="overflow" vert="horz" wrap="square" lIns="91440" tIns="45720" rIns="91440" bIns="45720" numCol="1" spcCol="0" rtlCol="0" fromWordArt="0" anchor="t" anchorCtr="0" forceAA="0" upright="0" compatLnSpc="0">
+            <a:spAutoFit/>
+          </a:bodyPr>
+          <a:p>
+            <a:pPr algn="ctr">
+              <a:defRPr/>
+            </a:pPr>
+            <a:r>
+              <a:rPr sz="1800">
+                <a:latin typeface="IBM Plex Sans"/>
+              </a:rPr>
+              <a:t>Estimate of </a:t>
+            </a:r>
+            <a:r>
+              <a:rPr sz="1800">
+                <a:latin typeface="IBM Plex Sans"/>
+              </a:rPr>
+              <a:t>Satoshi’s hashrate</a:t>
+            </a:r>
+            <a:endParaRPr sz="2000">
+              <a:latin typeface="IBM Plex Sans"/>
+              <a:cs typeface="IBM Plex Sans"/>
+            </a:endParaRPr>
+          </a:p>
+        </p:txBody>
+      </p:sp>
+      <p:sp>
+        <p:nvSpPr>
+          <p:cNvPr id="992520675" name=""/>
+          <p:cNvSpPr txBox="1"/>
+          <p:nvPr/>
+        </p:nvSpPr>
+        <p:spPr bwMode="auto">
+          <a:xfrm rot="16199969" flipH="0" flipV="0">
+            <a:off x="433819" y="2876295"/>
+            <a:ext cx="912028" cy="305159"/>
+          </a:xfrm>
+          <a:prstGeom prst="rect">
+            <a:avLst/>
+          </a:prstGeom>
+          <a:noFill/>
+        </p:spPr>
+        <p:txBody>
+          <a:bodyPr vertOverflow="overflow" horzOverflow="overflow" vert="horz" wrap="none" lIns="91440" tIns="45720" rIns="91440" bIns="45720" numCol="1" spcCol="0" rtlCol="0" fromWordArt="0" anchor="t" anchorCtr="0" forceAA="0" upright="0" compatLnSpc="0">
+            <a:spAutoFit/>
+          </a:bodyPr>
+          <a:p>
+            <a:pPr algn="ctr">
+              <a:defRPr/>
+            </a:pPr>
+            <a:r>
+              <a:rPr sz="1400">
+                <a:latin typeface="IBM Plex Sans"/>
+              </a:rPr>
+              <a:t>Hashrate</a:t>
+            </a:r>
+            <a:endParaRPr sz="1400">
+              <a:latin typeface="IBM Plex Sans"/>
+              <a:cs typeface="IBM Plex Sans"/>
+            </a:endParaRPr>
+          </a:p>
+        </p:txBody>
+      </p:sp>
+      <p:sp>
+        <p:nvSpPr>
+          <p:cNvPr id="410757163" name=""/>
+          <p:cNvSpPr txBox="1"/>
+          <p:nvPr/>
+        </p:nvSpPr>
+        <p:spPr bwMode="auto">
+          <a:xfrm flipH="0" flipV="0">
+            <a:off x="4925398" y="6095998"/>
+            <a:ext cx="1351535" cy="228960"/>
+          </a:xfrm>
+          <a:prstGeom prst="rect">
+            <a:avLst/>
+          </a:prstGeom>
+          <a:noFill/>
+        </p:spPr>
+        <p:txBody>
+          <a:bodyPr vertOverflow="overflow" horzOverflow="overflow" vert="horz" wrap="square" lIns="91440" tIns="45720" rIns="91440" bIns="45720" numCol="1" spcCol="0" rtlCol="0" fromWordArt="0" anchor="t" anchorCtr="0" forceAA="0" upright="0" compatLnSpc="0">
+            <a:spAutoFit/>
+          </a:bodyPr>
+          <a:p>
+            <a:pPr algn="l">
+              <a:defRPr/>
+            </a:pPr>
+            <a:r>
+              <a:rPr sz="900">
+                <a:latin typeface="IBM Plex Sans"/>
+              </a:rPr>
+              <a:t>Daily average hashrate</a:t>
+            </a:r>
+            <a:endParaRPr sz="900">
+              <a:latin typeface="IBM Plex Sans"/>
+              <a:cs typeface="IBM Plex Sans"/>
+            </a:endParaRPr>
+          </a:p>
+        </p:txBody>
+      </p:sp>
+      <p:sp>
+        <p:nvSpPr>
+          <p:cNvPr id="641046973" name=""/>
+          <p:cNvSpPr txBox="1"/>
+          <p:nvPr/>
+        </p:nvSpPr>
+        <p:spPr bwMode="auto">
+          <a:xfrm flipH="0" flipV="0">
+            <a:off x="6932529" y="6095997"/>
+            <a:ext cx="2127800" cy="228960"/>
+          </a:xfrm>
+          <a:prstGeom prst="rect">
+            <a:avLst/>
+          </a:prstGeom>
+          <a:noFill/>
+        </p:spPr>
+        <p:txBody>
+          <a:bodyPr vertOverflow="overflow" horzOverflow="overflow" vert="horz" wrap="square" lIns="91440" tIns="45720" rIns="91440" bIns="45720" numCol="1" spcCol="0" rtlCol="0" fromWordArt="0" anchor="t" anchorCtr="0" forceAA="0" upright="0" compatLnSpc="0">
+            <a:spAutoFit/>
+          </a:bodyPr>
+          <a:p>
+            <a:pPr algn="l">
+              <a:defRPr/>
+            </a:pPr>
+            <a:r>
+              <a:rPr sz="900">
+                <a:latin typeface="IBM Plex Sans"/>
+              </a:rPr>
+              <a:t>Linear hashrate model</a:t>
+            </a:r>
+            <a:endParaRPr sz="900">
+              <a:latin typeface="IBM Plex Sans"/>
+              <a:cs typeface="IBM Plex Sans"/>
+            </a:endParaRPr>
+          </a:p>
+        </p:txBody>
+      </p:sp>
     </p:spTree>
   </p:cSld>
   <p:clrMapOvr>
@@ -12414,7 +15795,7 @@
       </p:grpSpPr>
       <p:pic>
         <p:nvPicPr>
-          <p:cNvPr id="2067401880" name=""/>
+          <p:cNvPr id="20279581" name=""/>
           <p:cNvPicPr>
             <a:picLocks noChangeAspect="1"/>
           </p:cNvPicPr>
@@ -12425,9 +15806,9 @@
           <a:stretch/>
         </p:blipFill>
         <p:spPr bwMode="auto">
-          <a:xfrm flipH="0" flipV="0">
-            <a:off x="2741142" y="1123431"/>
-            <a:ext cx="6709714" cy="4705187"/>
+          <a:xfrm>
+            <a:off x="2286000" y="757237"/>
+            <a:ext cx="7619999" cy="5343525"/>
           </a:xfrm>
           <a:prstGeom prst="rect">
             <a:avLst/>
@@ -12469,7 +15850,7 @@
       </p:grpSpPr>
       <p:pic>
         <p:nvPicPr>
-          <p:cNvPr id="1451523773" name=""/>
+          <p:cNvPr id="1540727786" name=""/>
           <p:cNvPicPr>
             <a:picLocks noChangeAspect="1"/>
           </p:cNvPicPr>
@@ -12524,7 +15905,7 @@
       </p:grpSpPr>
       <p:pic>
         <p:nvPicPr>
-          <p:cNvPr id="1411079085" name=""/>
+          <p:cNvPr id="1179218067" name=""/>
           <p:cNvPicPr>
             <a:picLocks noChangeAspect="1"/>
           </p:cNvPicPr>
@@ -12536,8 +15917,8 @@
         </p:blipFill>
         <p:spPr bwMode="auto">
           <a:xfrm flipH="0" flipV="0">
-            <a:off x="2321884" y="1030535"/>
-            <a:ext cx="7548231" cy="5032154"/>
+            <a:off x="1839299" y="591199"/>
+            <a:ext cx="8513397" cy="5675598"/>
           </a:xfrm>
           <a:prstGeom prst="rect">
             <a:avLst/>
@@ -12579,7 +15960,7 @@
       </p:grpSpPr>
       <p:pic>
         <p:nvPicPr>
-          <p:cNvPr id="1490636446" name=""/>
+          <p:cNvPr id="1260765851" name=""/>
           <p:cNvPicPr>
             <a:picLocks noChangeAspect="1"/>
           </p:cNvPicPr>
@@ -12634,7 +16015,7 @@
       </p:grpSpPr>
       <p:pic>
         <p:nvPicPr>
-          <p:cNvPr id="1177762867" name=""/>
+          <p:cNvPr id="485999250" name=""/>
           <p:cNvPicPr>
             <a:picLocks noChangeAspect="1"/>
           </p:cNvPicPr>
@@ -12689,7 +16070,7 @@
       </p:grpSpPr>
       <p:pic>
         <p:nvPicPr>
-          <p:cNvPr id="1321872826" name=""/>
+          <p:cNvPr id="906998247" name=""/>
           <p:cNvPicPr>
             <a:picLocks noChangeAspect="1"/>
           </p:cNvPicPr>
@@ -12744,7 +16125,7 @@
       </p:grpSpPr>
       <p:pic>
         <p:nvPicPr>
-          <p:cNvPr id="1063630022" name=""/>
+          <p:cNvPr id="1561344134" name=""/>
           <p:cNvPicPr>
             <a:picLocks noChangeAspect="1"/>
           </p:cNvPicPr>
@@ -12762,14 +16143,6 @@
           <a:prstGeom prst="rect">
             <a:avLst/>
           </a:prstGeom>
-          <a:ln w="6349">
-            <a:solidFill>
-              <a:schemeClr val="accent1">
-                <a:lumMod val="50196"/>
-              </a:schemeClr>
-            </a:solidFill>
-            <a:prstDash val="solid"/>
-          </a:ln>
         </p:spPr>
       </p:pic>
     </p:spTree>
@@ -12807,7 +16180,7 @@
       </p:grpSpPr>
       <p:pic>
         <p:nvPicPr>
-          <p:cNvPr id="202531428" name=""/>
+          <p:cNvPr id="581097339" name=""/>
           <p:cNvPicPr>
             <a:picLocks noChangeAspect="1"/>
           </p:cNvPicPr>
@@ -12862,7 +16235,7 @@
       </p:grpSpPr>
       <p:pic>
         <p:nvPicPr>
-          <p:cNvPr id="1896970716" name=""/>
+          <p:cNvPr id="749710203" name=""/>
           <p:cNvPicPr>
             <a:picLocks noChangeAspect="1"/>
           </p:cNvPicPr>
@@ -12874,20 +16247,12 @@
         </p:blipFill>
         <p:spPr bwMode="auto">
           <a:xfrm flipH="0" flipV="0">
-            <a:off x="631179" y="1577066"/>
+            <a:off x="685608" y="1971674"/>
             <a:ext cx="10820781" cy="2914647"/>
           </a:xfrm>
           <a:prstGeom prst="rect">
             <a:avLst/>
           </a:prstGeom>
-          <a:ln w="6349">
-            <a:solidFill>
-              <a:schemeClr val="accent1">
-                <a:lumMod val="50196"/>
-              </a:schemeClr>
-            </a:solidFill>
-            <a:prstDash val="solid"/>
-          </a:ln>
         </p:spPr>
       </p:pic>
     </p:spTree>
@@ -12925,7 +16290,7 @@
       </p:grpSpPr>
       <p:pic>
         <p:nvPicPr>
-          <p:cNvPr id="275478429" name=""/>
+          <p:cNvPr id="1933984400" name=""/>
           <p:cNvPicPr>
             <a:picLocks noChangeAspect="1"/>
           </p:cNvPicPr>
@@ -12943,14 +16308,6 @@
           <a:prstGeom prst="rect">
             <a:avLst/>
           </a:prstGeom>
-          <a:ln w="6349">
-            <a:solidFill>
-              <a:schemeClr val="accent1">
-                <a:lumMod val="50196"/>
-              </a:schemeClr>
-            </a:solidFill>
-            <a:prstDash val="solid"/>
-          </a:ln>
         </p:spPr>
       </p:pic>
     </p:spTree>
@@ -12988,7 +16345,7 @@
       </p:grpSpPr>
       <p:pic>
         <p:nvPicPr>
-          <p:cNvPr id="274406218" name=""/>
+          <p:cNvPr id="196548448" name=""/>
           <p:cNvPicPr>
             <a:picLocks noChangeAspect="1"/>
           </p:cNvPicPr>
@@ -13000,25 +16357,17 @@
         </p:blipFill>
         <p:spPr bwMode="auto">
           <a:xfrm flipH="0" flipV="0">
-            <a:off x="801531" y="531783"/>
-            <a:ext cx="10694295" cy="5961541"/>
-          </a:xfrm>
-          <a:prstGeom prst="rect">
-            <a:avLst/>
-          </a:prstGeom>
-          <a:ln w="6349">
-            <a:solidFill>
-              <a:schemeClr val="accent1">
-                <a:lumMod val="50196"/>
-              </a:schemeClr>
-            </a:solidFill>
-            <a:prstDash val="solid"/>
-          </a:ln>
+            <a:off x="13129" y="38099"/>
+            <a:ext cx="12165738" cy="6781798"/>
+          </a:xfrm>
+          <a:prstGeom prst="rect">
+            <a:avLst/>
+          </a:prstGeom>
         </p:spPr>
       </p:pic>
       <p:sp>
         <p:nvSpPr>
-          <p:cNvPr id="2114294973" name=""/>
+          <p:cNvPr id="323316966" name=""/>
           <p:cNvSpPr/>
           <p:nvPr/>
         </p:nvSpPr>
@@ -13062,7 +16411,7 @@
       </p:sp>
       <p:sp>
         <p:nvSpPr>
-          <p:cNvPr id="888825421" name=""/>
+          <p:cNvPr id="788304490" name=""/>
           <p:cNvSpPr/>
           <p:nvPr/>
         </p:nvSpPr>
@@ -13102,6 +16451,92 @@
         <p:txBody>
           <a:bodyPr/>
           <a:p/>
+        </p:txBody>
+      </p:sp>
+      <p:sp>
+        <p:nvSpPr>
+          <p:cNvPr id="1037384418" name=""/>
+          <p:cNvSpPr txBox="1"/>
+          <p:nvPr/>
+        </p:nvSpPr>
+        <p:spPr bwMode="auto">
+          <a:xfrm rot="16199969" flipH="0" flipV="0">
+            <a:off x="-275045" y="3247818"/>
+            <a:ext cx="834339" cy="244199"/>
+          </a:xfrm>
+          <a:prstGeom prst="rect">
+            <a:avLst/>
+          </a:prstGeom>
+          <a:noFill/>
+        </p:spPr>
+        <p:txBody>
+          <a:bodyPr vertOverflow="overflow" horzOverflow="overflow" vert="horz" wrap="none" lIns="91440" tIns="45720" rIns="91440" bIns="45720" numCol="1" spcCol="0" rtlCol="0" fromWordArt="0" anchor="t" anchorCtr="0" forceAA="0" upright="0" compatLnSpc="0">
+            <a:spAutoFit/>
+          </a:bodyPr>
+          <a:p>
+            <a:pPr algn="ctr">
+              <a:defRPr/>
+            </a:pPr>
+            <a:r>
+              <a:rPr sz="1000" b="0" i="1">
+                <a:solidFill>
+                  <a:schemeClr val="tx1"/>
+                </a:solidFill>
+                <a:latin typeface="IBM Plex Sans"/>
+              </a:rPr>
+              <a:t>ExtraNonce</a:t>
+            </a:r>
+            <a:endParaRPr sz="1000" b="0" i="1">
+              <a:solidFill>
+                <a:schemeClr val="tx1"/>
+              </a:solidFill>
+              <a:latin typeface="IBM Plex Sans"/>
+              <a:cs typeface="IBM Plex Sans"/>
+            </a:endParaRPr>
+          </a:p>
+        </p:txBody>
+      </p:sp>
+      <p:sp>
+        <p:nvSpPr>
+          <p:cNvPr id="1453161468" name=""/>
+          <p:cNvSpPr txBox="1"/>
+          <p:nvPr/>
+        </p:nvSpPr>
+        <p:spPr bwMode="auto">
+          <a:xfrm flipH="0" flipV="0">
+            <a:off x="6039822" y="6583498"/>
+            <a:ext cx="445977" cy="244199"/>
+          </a:xfrm>
+          <a:prstGeom prst="rect">
+            <a:avLst/>
+          </a:prstGeom>
+          <a:noFill/>
+        </p:spPr>
+        <p:txBody>
+          <a:bodyPr vertOverflow="overflow" horzOverflow="overflow" vert="horz" wrap="none" lIns="91440" tIns="45720" rIns="91440" bIns="45720" numCol="1" spcCol="0" rtlCol="0" fromWordArt="0" anchor="t" anchorCtr="0" forceAA="0" upright="0" compatLnSpc="0">
+            <a:spAutoFit/>
+          </a:bodyPr>
+          <a:p>
+            <a:pPr algn="ctr">
+              <a:defRPr/>
+            </a:pPr>
+            <a:r>
+              <a:rPr sz="1000" b="0" i="1">
+                <a:solidFill>
+                  <a:schemeClr val="tx1"/>
+                </a:solidFill>
+                <a:latin typeface="IBM Plex Sans"/>
+              </a:rPr>
+              <a:t>Date</a:t>
+            </a:r>
+            <a:endParaRPr sz="1000" b="0" i="1">
+              <a:solidFill>
+                <a:schemeClr val="tx1"/>
+              </a:solidFill>
+              <a:latin typeface="IBM Plex Sans"/>
+              <a:cs typeface="IBM Plex Sans"/>
+            </a:endParaRPr>
+          </a:p>
         </p:txBody>
       </p:sp>
     </p:spTree>
@@ -13123,6 +16558,13 @@
 <file path=ppt/slides/slide5.xml><?xml version="1.0" encoding="utf-8"?>
 <p:sld xmlns:a="http://schemas.openxmlformats.org/drawingml/2006/main" xmlns:r="http://schemas.openxmlformats.org/officeDocument/2006/relationships" xmlns:p="http://schemas.openxmlformats.org/presentationml/2006/main" xmlns:m="http://schemas.openxmlformats.org/officeDocument/2006/math" xmlns:w="http://schemas.openxmlformats.org/wordprocessingml/2006/main" xmlns:mc="http://schemas.openxmlformats.org/markup-compatibility/2006" showMasterPhAnim="0" showMasterSp="1" show="1">
   <p:cSld name="">
+    <p:bg>
+      <p:bgPr shadeToTitle="0">
+        <a:solidFill>
+          <a:schemeClr val="bg1"/>
+        </a:solidFill>
+      </p:bgPr>
+    </p:bg>
     <p:spTree>
       <p:nvGrpSpPr>
         <p:cNvPr id="1" name=""/>
@@ -13139,7 +16581,7 @@
       </p:grpSpPr>
       <p:pic>
         <p:nvPicPr>
-          <p:cNvPr id="822304227" name=""/>
+          <p:cNvPr id="1969355696" name=""/>
           <p:cNvPicPr>
             <a:picLocks noChangeAspect="1"/>
           </p:cNvPicPr>
@@ -13161,7 +16603,7 @@
       </p:pic>
       <p:sp>
         <p:nvSpPr>
-          <p:cNvPr id="264101256" name=""/>
+          <p:cNvPr id="958143399" name=""/>
           <p:cNvSpPr/>
           <p:nvPr/>
         </p:nvSpPr>
@@ -13205,7 +16647,7 @@
       </p:sp>
       <p:sp>
         <p:nvSpPr>
-          <p:cNvPr id="1300185752" name=""/>
+          <p:cNvPr id="40051190" name=""/>
           <p:cNvSpPr txBox="1"/>
           <p:nvPr/>
         </p:nvSpPr>
@@ -13236,7 +16678,7 @@
       </p:sp>
       <p:sp>
         <p:nvSpPr>
-          <p:cNvPr id="1565352303" name=""/>
+          <p:cNvPr id="72791010" name=""/>
           <p:cNvSpPr txBox="1"/>
           <p:nvPr/>
         </p:nvSpPr>
@@ -13275,14 +16717,14 @@
       </p:sp>
       <p:sp>
         <p:nvSpPr>
-          <p:cNvPr id="1342269199" name=""/>
+          <p:cNvPr id="1709900016" name=""/>
           <p:cNvSpPr txBox="1"/>
           <p:nvPr/>
         </p:nvSpPr>
         <p:spPr bwMode="auto">
           <a:xfrm flipH="0" flipV="0">
-            <a:off x="6161815" y="877671"/>
-            <a:ext cx="685737" cy="274679"/>
+            <a:off x="5812687" y="877671"/>
+            <a:ext cx="1035944" cy="274679"/>
           </a:xfrm>
           <a:prstGeom prst="rect">
             <a:avLst/>
@@ -13296,7 +16738,7 @@
             <a:spAutoFit/>
           </a:bodyPr>
           <a:p>
-            <a:pPr algn="l">
+            <a:pPr algn="ctr">
               <a:defRPr/>
             </a:pPr>
             <a:r>
@@ -13314,7 +16756,7 @@
       </p:sp>
       <p:sp>
         <p:nvSpPr>
-          <p:cNvPr id="159395381" name=""/>
+          <p:cNvPr id="626557778" name=""/>
           <p:cNvSpPr txBox="1"/>
           <p:nvPr/>
         </p:nvSpPr>
@@ -13353,14 +16795,138 @@
       </p:sp>
       <p:sp>
         <p:nvSpPr>
-          <p:cNvPr id="1738239503" name=""/>
+          <p:cNvPr id="566308975" name=""/>
           <p:cNvSpPr txBox="1"/>
           <p:nvPr/>
         </p:nvSpPr>
         <p:spPr bwMode="auto">
           <a:xfrm flipH="0" flipV="0">
-            <a:off x="5169888" y="5618479"/>
-            <a:ext cx="2143333" cy="518519"/>
+            <a:off x="2629117" y="5192732"/>
+            <a:ext cx="2642102" cy="488039"/>
+          </a:xfrm>
+          <a:prstGeom prst="rect">
+            <a:avLst/>
+          </a:prstGeom>
+          <a:solidFill>
+            <a:srgbClr val="FFFFFF"/>
+          </a:solidFill>
+        </p:spPr>
+        <p:txBody>
+          <a:bodyPr vertOverflow="overflow" horzOverflow="overflow" vert="horz" wrap="square" lIns="91440" tIns="45720" rIns="91440" bIns="45720" numCol="1" spcCol="0" rtlCol="0" fromWordArt="0" anchor="t" anchorCtr="0" forceAA="0" upright="0" compatLnSpc="0">
+            <a:spAutoFit/>
+          </a:bodyPr>
+          <a:p>
+            <a:pPr algn="ctr">
+              <a:defRPr/>
+            </a:pPr>
+            <a:r>
+              <a:rPr sz="2600" b="1">
+                <a:latin typeface="IBM Plex Sans"/>
+              </a:rPr>
+              <a:t>Bank 1</a:t>
+            </a:r>
+            <a:endParaRPr sz="2600" b="1">
+              <a:latin typeface="IBM Plex Sans"/>
+              <a:cs typeface="IBM Plex Sans"/>
+            </a:endParaRPr>
+          </a:p>
+        </p:txBody>
+      </p:sp>
+      <p:sp>
+        <p:nvSpPr>
+          <p:cNvPr id="466514468" name=""/>
+          <p:cNvSpPr txBox="1"/>
+          <p:nvPr/>
+        </p:nvSpPr>
+        <p:spPr bwMode="auto">
+          <a:xfrm flipH="0" flipV="0">
+            <a:off x="7185916" y="5192732"/>
+            <a:ext cx="2326650" cy="488039"/>
+          </a:xfrm>
+          <a:prstGeom prst="rect">
+            <a:avLst/>
+          </a:prstGeom>
+          <a:solidFill>
+            <a:srgbClr val="FFFFFF"/>
+          </a:solidFill>
+        </p:spPr>
+        <p:txBody>
+          <a:bodyPr vertOverflow="overflow" horzOverflow="overflow" vert="horz" wrap="square" lIns="91440" tIns="45720" rIns="91440" bIns="45720" numCol="1" spcCol="0" rtlCol="0" fromWordArt="0" anchor="t" anchorCtr="0" forceAA="0" upright="0" compatLnSpc="0">
+            <a:spAutoFit/>
+          </a:bodyPr>
+          <a:p>
+            <a:pPr algn="ctr">
+              <a:defRPr/>
+            </a:pPr>
+            <a:r>
+              <a:rPr sz="2600" b="1">
+                <a:latin typeface="IBM Plex Sans"/>
+              </a:rPr>
+              <a:t>Bank 2</a:t>
+            </a:r>
+            <a:endParaRPr sz="2600" b="1">
+              <a:latin typeface="IBM Plex Sans"/>
+              <a:cs typeface="IBM Plex Sans"/>
+            </a:endParaRPr>
+          </a:p>
+        </p:txBody>
+      </p:sp>
+      <p:sp>
+        <p:nvSpPr>
+          <p:cNvPr id="1355621069" name=""/>
+          <p:cNvSpPr/>
+          <p:nvPr/>
+        </p:nvSpPr>
+        <p:spPr bwMode="auto">
+          <a:xfrm rot="0" flipH="0" flipV="0">
+            <a:off x="5097499" y="5572125"/>
+            <a:ext cx="2524124" cy="746124"/>
+          </a:xfrm>
+          <a:prstGeom prst="rect">
+            <a:avLst/>
+          </a:prstGeom>
+          <a:solidFill>
+            <a:schemeClr val="bg1"/>
+          </a:solidFill>
+          <a:ln w="12699" cap="flat" cmpd="sng" algn="ctr">
+            <a:solidFill>
+              <a:schemeClr val="bg1"/>
+            </a:solidFill>
+            <a:prstDash val="solid"/>
+            <a:miter lim="800000"/>
+          </a:ln>
+        </p:spPr>
+        <p:style>
+          <a:lnRef idx="2">
+            <a:schemeClr val="accent1">
+              <a:shade val="50000"/>
+            </a:schemeClr>
+          </a:lnRef>
+          <a:fillRef idx="1">
+            <a:schemeClr val="accent1"/>
+          </a:fillRef>
+          <a:effectRef idx="0">
+            <a:schemeClr val="accent1"/>
+          </a:effectRef>
+          <a:fontRef idx="minor">
+            <a:schemeClr val="lt1"/>
+          </a:fontRef>
+        </p:style>
+        <p:txBody>
+          <a:bodyPr/>
+          <a:p/>
+        </p:txBody>
+      </p:sp>
+      <p:sp>
+        <p:nvSpPr>
+          <p:cNvPr id="1740523157" name=""/>
+          <p:cNvSpPr txBox="1"/>
+          <p:nvPr/>
+        </p:nvSpPr>
+        <p:spPr bwMode="auto">
+          <a:xfrm flipH="0" flipV="0">
+            <a:off x="4651612" y="5680770"/>
+            <a:ext cx="3216127" cy="945239"/>
           </a:xfrm>
           <a:prstGeom prst="rect">
             <a:avLst/>
@@ -13391,86 +16957,15 @@
             </a:r>
             <a:endParaRPr sz="1400">
               <a:latin typeface="IBM Plex Sans"/>
+              <a:ea typeface="IBM Plex Sans"/>
               <a:cs typeface="IBM Plex Sans"/>
             </a:endParaRPr>
           </a:p>
-        </p:txBody>
-      </p:sp>
-      <p:sp>
-        <p:nvSpPr>
-          <p:cNvPr id="451416547" name=""/>
-          <p:cNvSpPr txBox="1"/>
-          <p:nvPr/>
-        </p:nvSpPr>
-        <p:spPr bwMode="auto">
-          <a:xfrm flipH="0" flipV="0">
-            <a:off x="2629117" y="5192732"/>
-            <a:ext cx="2642102" cy="488039"/>
-          </a:xfrm>
-          <a:prstGeom prst="rect">
-            <a:avLst/>
-          </a:prstGeom>
-          <a:solidFill>
-            <a:srgbClr val="FFFFFF"/>
-          </a:solidFill>
-        </p:spPr>
-        <p:txBody>
-          <a:bodyPr vertOverflow="overflow" horzOverflow="overflow" vert="horz" wrap="square" lIns="91440" tIns="45720" rIns="91440" bIns="45720" numCol="1" spcCol="0" rtlCol="0" fromWordArt="0" anchor="t" anchorCtr="0" forceAA="0" upright="0" compatLnSpc="0">
-            <a:spAutoFit/>
-          </a:bodyPr>
-          <a:p>
-            <a:pPr algn="ctr">
-              <a:defRPr/>
-            </a:pPr>
-            <a:r>
-              <a:rPr sz="2600" b="1">
-                <a:latin typeface="IBM Plex Sans"/>
-              </a:rPr>
-              <a:t>Bank 1</a:t>
-            </a:r>
-            <a:endParaRPr sz="2600" b="1">
-              <a:latin typeface="IBM Plex Sans"/>
-              <a:cs typeface="IBM Plex Sans"/>
-            </a:endParaRPr>
-          </a:p>
-        </p:txBody>
-      </p:sp>
-      <p:sp>
-        <p:nvSpPr>
-          <p:cNvPr id="1391912751" name=""/>
-          <p:cNvSpPr txBox="1"/>
-          <p:nvPr/>
-        </p:nvSpPr>
-        <p:spPr bwMode="auto">
-          <a:xfrm flipH="0" flipV="0">
-            <a:off x="7185916" y="5192732"/>
-            <a:ext cx="2326650" cy="488039"/>
-          </a:xfrm>
-          <a:prstGeom prst="rect">
-            <a:avLst/>
-          </a:prstGeom>
-          <a:solidFill>
-            <a:srgbClr val="FFFFFF"/>
-          </a:solidFill>
-        </p:spPr>
-        <p:txBody>
-          <a:bodyPr vertOverflow="overflow" horzOverflow="overflow" vert="horz" wrap="square" lIns="91440" tIns="45720" rIns="91440" bIns="45720" numCol="1" spcCol="0" rtlCol="0" fromWordArt="0" anchor="t" anchorCtr="0" forceAA="0" upright="0" compatLnSpc="0">
-            <a:spAutoFit/>
-          </a:bodyPr>
-          <a:p>
-            <a:pPr algn="ctr">
-              <a:defRPr/>
-            </a:pPr>
-            <a:r>
-              <a:rPr sz="2600" b="1">
-                <a:latin typeface="IBM Plex Sans"/>
-              </a:rPr>
-              <a:t>Bank 2</a:t>
-            </a:r>
-            <a:endParaRPr sz="2600" b="1">
-              <a:latin typeface="IBM Plex Sans"/>
-              <a:cs typeface="IBM Plex Sans"/>
-            </a:endParaRPr>
+          <a:p>
+            <a:pPr algn="ctr"/>
+          </a:p>
+          <a:p>
+            <a:pPr algn="ctr"/>
           </a:p>
         </p:txBody>
       </p:sp>
@@ -13509,7 +17004,7 @@
       </p:grpSpPr>
       <p:pic>
         <p:nvPicPr>
-          <p:cNvPr id="1103512485" name=""/>
+          <p:cNvPr id="1183008502" name=""/>
           <p:cNvPicPr>
             <a:picLocks noChangeAspect="1"/>
           </p:cNvPicPr>
@@ -13564,7 +17059,7 @@
       </p:grpSpPr>
       <p:pic>
         <p:nvPicPr>
-          <p:cNvPr id="1294624431" name=""/>
+          <p:cNvPr id="1806602942" name=""/>
           <p:cNvPicPr>
             <a:picLocks noChangeAspect="1"/>
           </p:cNvPicPr>
@@ -13619,7 +17114,7 @@
       </p:grpSpPr>
       <p:pic>
         <p:nvPicPr>
-          <p:cNvPr id="1864334245" name=""/>
+          <p:cNvPr id="793715016" name=""/>
           <p:cNvPicPr>
             <a:picLocks noChangeAspect="1"/>
           </p:cNvPicPr>
@@ -13631,8 +17126,8 @@
         </p:blipFill>
         <p:spPr bwMode="auto">
           <a:xfrm flipH="0" flipV="0">
-            <a:off x="1457357" y="1900862"/>
-            <a:ext cx="9842334" cy="2322789"/>
+            <a:off x="647379" y="1543048"/>
+            <a:ext cx="10897241" cy="2571747"/>
           </a:xfrm>
           <a:prstGeom prst="rect">
             <a:avLst/>
@@ -13647,6 +17142,107 @@
           </a:ln>
         </p:spPr>
       </p:pic>
+      <p:sp>
+        <p:nvSpPr>
+          <p:cNvPr id="641417221" name=""/>
+          <p:cNvSpPr txBox="1"/>
+          <p:nvPr/>
+        </p:nvSpPr>
+        <p:spPr bwMode="auto">
+          <a:xfrm rot="0" flipH="0" flipV="0">
+            <a:off x="782023" y="4581703"/>
+            <a:ext cx="2861100" cy="579479"/>
+          </a:xfrm>
+          <a:prstGeom prst="rect">
+            <a:avLst/>
+          </a:prstGeom>
+          <a:noFill/>
+        </p:spPr>
+        <p:txBody>
+          <a:bodyPr vertOverflow="overflow" horzOverflow="overflow" vert="horz" wrap="square" lIns="91440" tIns="45720" rIns="91440" bIns="45720" numCol="1" spcCol="0" rtlCol="0" fromWordArt="0" anchor="t" anchorCtr="0" forceAA="0" upright="0" compatLnSpc="0">
+            <a:spAutoFit/>
+          </a:bodyPr>
+          <a:p>
+            <a:pPr algn="ctr">
+              <a:defRPr/>
+            </a:pPr>
+            <a:r>
+              <a:rPr sz="1600" b="1" i="0" u="none" lang="en-US">
+                <a:solidFill>
+                  <a:srgbClr val="2D2593"/>
+                </a:solidFill>
+                <a:latin typeface="IBM Plex Sans"/>
+              </a:rPr>
+              <a:t>"Article: Do you </a:t>
+            </a:r>
+            <a:r>
+              <a:rPr sz="1600" b="0" i="0" u="none" lang="en-US">
+                <a:solidFill>
+                  <a:schemeClr val="tx1"/>
+                </a:solidFill>
+                <a:latin typeface="IBM Plex Sans"/>
+              </a:rPr>
+              <a:t>know about bitcoins?"</a:t>
+            </a:r>
+            <a:endParaRPr sz="1600" b="0">
+              <a:solidFill>
+                <a:schemeClr val="tx1"/>
+              </a:solidFill>
+              <a:latin typeface="IBM Plex Sans"/>
+              <a:cs typeface="IBM Plex Sans"/>
+            </a:endParaRPr>
+          </a:p>
+        </p:txBody>
+      </p:sp>
+      <p:sp>
+        <p:nvSpPr>
+          <p:cNvPr id="1755272410" name=""/>
+          <p:cNvSpPr txBox="1"/>
+          <p:nvPr/>
+        </p:nvSpPr>
+        <p:spPr bwMode="auto">
+          <a:xfrm rot="0" flipH="0" flipV="0">
+            <a:off x="3640603" y="4515029"/>
+            <a:ext cx="7907255" cy="945239"/>
+          </a:xfrm>
+          <a:prstGeom prst="rect">
+            <a:avLst/>
+          </a:prstGeom>
+          <a:noFill/>
+        </p:spPr>
+        <p:txBody>
+          <a:bodyPr vertOverflow="overflow" horzOverflow="overflow" vert="horz" wrap="square" lIns="91440" tIns="45720" rIns="91440" bIns="45720" numCol="1" spcCol="0" rtlCol="0" fromWordArt="0" anchor="t" anchorCtr="0" forceAA="0" upright="0" compatLnSpc="0">
+            <a:spAutoFit/>
+          </a:bodyPr>
+          <a:p>
+            <a:pPr algn="l">
+              <a:defRPr/>
+            </a:pPr>
+            <a:r>
+              <a:rPr sz="1200" b="0" i="0" u="none" lang="en-US">
+                <a:solidFill>
+                  <a:schemeClr val="tx1"/>
+                </a:solidFill>
+                <a:latin typeface="IBM Plex Sans"/>
+              </a:rPr>
+              <a:t>Bitcoin is an electronic currency designed in 2009 by someone named Satoshi Nakamoto. This currency stands out from other electronic currencies due to its fully decentralized peer-to-peer nature and its clever use of basic cryptographic concepts. It relies on software written in C++ and published under the MIT open-source license.</a:t>
+            </a:r>
+            <a:endParaRPr sz="1000" b="0" i="0" u="none" strike="noStrike" cap="none" spc="0">
+              <a:solidFill>
+                <a:schemeClr val="tx1"/>
+              </a:solidFill>
+              <a:latin typeface="IBM Plex Sans"/>
+              <a:cs typeface="IBM Plex Sans"/>
+            </a:endParaRPr>
+          </a:p>
+          <a:p>
+            <a:pPr algn="l"/>
+          </a:p>
+          <a:p>
+            <a:pPr algn="l"/>
+          </a:p>
+        </p:txBody>
+      </p:sp>
     </p:spTree>
   </p:cSld>
   <p:clrMapOvr>
@@ -13682,7 +17278,7 @@
       </p:grpSpPr>
       <p:pic>
         <p:nvPicPr>
-          <p:cNvPr id="826428035" name=""/>
+          <p:cNvPr id="27314482" name=""/>
           <p:cNvPicPr>
             <a:picLocks noChangeAspect="1"/>
           </p:cNvPicPr>
@@ -13737,7 +17333,7 @@
       </p:grpSpPr>
       <p:pic>
         <p:nvPicPr>
-          <p:cNvPr id="1739142392" name=""/>
+          <p:cNvPr id="1083458884" name=""/>
           <p:cNvPicPr>
             <a:picLocks noChangeAspect="1"/>
           </p:cNvPicPr>
@@ -13757,6 +17353,49 @@
           </a:prstGeom>
         </p:spPr>
       </p:pic>
+      <p:sp>
+        <p:nvSpPr>
+          <p:cNvPr id="564352030" name=""/>
+          <p:cNvSpPr txBox="1"/>
+          <p:nvPr/>
+        </p:nvSpPr>
+        <p:spPr bwMode="auto">
+          <a:xfrm rot="0" flipH="0" flipV="0">
+            <a:off x="2896574" y="5886449"/>
+            <a:ext cx="6974099" cy="335639"/>
+          </a:xfrm>
+          <a:prstGeom prst="rect">
+            <a:avLst/>
+          </a:prstGeom>
+          <a:noFill/>
+        </p:spPr>
+        <p:txBody>
+          <a:bodyPr vertOverflow="overflow" horzOverflow="overflow" vert="horz" wrap="square" lIns="91440" tIns="45720" rIns="91440" bIns="45720" numCol="1" spcCol="0" rtlCol="0" fromWordArt="0" anchor="t" anchorCtr="0" forceAA="0" upright="0" compatLnSpc="0">
+            <a:spAutoFit/>
+          </a:bodyPr>
+          <a:p>
+            <a:pPr algn="ctr">
+              <a:defRPr/>
+            </a:pPr>
+            <a:r>
+              <a:rPr sz="1600" b="0" i="1" u="none" lang="en-US">
+                <a:solidFill>
+                  <a:schemeClr val="tx1"/>
+                </a:solidFill>
+                <a:latin typeface="IBM Plex Sans"/>
+              </a:rPr>
+              <a:t>Bitcoin the rise of the machines.</a:t>
+            </a:r>
+            <a:endParaRPr sz="1600" b="0" i="1">
+              <a:solidFill>
+                <a:schemeClr val="tx1"/>
+              </a:solidFill>
+              <a:latin typeface="IBM Plex Sans"/>
+              <a:cs typeface="IBM Plex Sans"/>
+            </a:endParaRPr>
+          </a:p>
+        </p:txBody>
+      </p:sp>
     </p:spTree>
   </p:cSld>
   <p:clrMapOvr>
@@ -13792,7 +17431,7 @@
       </p:grpSpPr>
       <p:pic>
         <p:nvPicPr>
-          <p:cNvPr id="371376164" name=""/>
+          <p:cNvPr id="1188543452" name=""/>
           <p:cNvPicPr>
             <a:picLocks noChangeAspect="1"/>
           </p:cNvPicPr>
@@ -13847,7 +17486,7 @@
       </p:grpSpPr>
       <p:pic>
         <p:nvPicPr>
-          <p:cNvPr id="910347836" name=""/>
+          <p:cNvPr id="246817777" name=""/>
           <p:cNvPicPr>
             <a:picLocks noChangeAspect="1"/>
           </p:cNvPicPr>
@@ -13902,7 +17541,7 @@
       </p:grpSpPr>
       <p:pic>
         <p:nvPicPr>
-          <p:cNvPr id="1879948176" name=""/>
+          <p:cNvPr id="1168926644" name=""/>
           <p:cNvPicPr>
             <a:picLocks noChangeAspect="1"/>
           </p:cNvPicPr>
@@ -13957,7 +17596,7 @@
       </p:grpSpPr>
       <p:pic>
         <p:nvPicPr>
-          <p:cNvPr id="1957678804" name=""/>
+          <p:cNvPr id="1370845565" name=""/>
           <p:cNvPicPr>
             <a:picLocks noChangeAspect="1"/>
           </p:cNvPicPr>
@@ -14012,7 +17651,7 @@
       </p:grpSpPr>
       <p:pic>
         <p:nvPicPr>
-          <p:cNvPr id="248906672" name=""/>
+          <p:cNvPr id="2082293856" name=""/>
           <p:cNvPicPr>
             <a:picLocks noChangeAspect="1"/>
           </p:cNvPicPr>
@@ -14067,7 +17706,7 @@
       </p:grpSpPr>
       <p:pic>
         <p:nvPicPr>
-          <p:cNvPr id="879437635" name=""/>
+          <p:cNvPr id="1905315131" name=""/>
           <p:cNvPicPr>
             <a:picLocks noChangeAspect="1"/>
           </p:cNvPicPr>
@@ -14122,7 +17761,7 @@
       </p:grpSpPr>
       <p:pic>
         <p:nvPicPr>
-          <p:cNvPr id="1247703881" name=""/>
+          <p:cNvPr id="1803596265" name=""/>
           <p:cNvPicPr>
             <a:picLocks noChangeAspect="1"/>
           </p:cNvPicPr>
@@ -14177,7 +17816,7 @@
       </p:grpSpPr>
       <p:pic>
         <p:nvPicPr>
-          <p:cNvPr id="438506199" name=""/>
+          <p:cNvPr id="496321143" name=""/>
           <p:cNvPicPr>
             <a:picLocks noChangeAspect="1"/>
           </p:cNvPicPr>
@@ -14207,7 +17846,7 @@
       </p:pic>
       <p:sp>
         <p:nvSpPr>
-          <p:cNvPr id="2120415599" name=""/>
+          <p:cNvPr id="859389808" name=""/>
           <p:cNvSpPr/>
           <p:nvPr/>
         </p:nvSpPr>
@@ -14284,7 +17923,7 @@
       </p:grpSpPr>
       <p:pic>
         <p:nvPicPr>
-          <p:cNvPr id="2016786190" name=""/>
+          <p:cNvPr id="1252414351" name=""/>
           <p:cNvPicPr>
             <a:picLocks noChangeAspect="1"/>
           </p:cNvPicPr>
@@ -14302,14 +17941,6 @@
           <a:prstGeom prst="rect">
             <a:avLst/>
           </a:prstGeom>
-          <a:ln w="6349">
-            <a:solidFill>
-              <a:schemeClr val="accent1">
-                <a:lumMod val="50196"/>
-              </a:schemeClr>
-            </a:solidFill>
-            <a:prstDash val="solid"/>
-          </a:ln>
         </p:spPr>
       </p:pic>
     </p:spTree>
@@ -14347,7 +17978,7 @@
       </p:grpSpPr>
       <p:pic>
         <p:nvPicPr>
-          <p:cNvPr id="843862997" name=""/>
+          <p:cNvPr id="1967213768" name=""/>
           <p:cNvPicPr>
             <a:picLocks noChangeAspect="1"/>
           </p:cNvPicPr>
@@ -14359,20 +17990,12 @@
         </p:blipFill>
         <p:spPr bwMode="auto">
           <a:xfrm flipH="0" flipV="0">
-            <a:off x="1906392" y="353469"/>
-            <a:ext cx="8910778" cy="6151059"/>
-          </a:xfrm>
-          <a:prstGeom prst="rect">
-            <a:avLst/>
-          </a:prstGeom>
-          <a:ln w="6349">
-            <a:solidFill>
-              <a:schemeClr val="accent1">
-                <a:lumMod val="50196"/>
-              </a:schemeClr>
-            </a:solidFill>
-            <a:prstDash val="solid"/>
-          </a:ln>
+            <a:off x="1225144" y="66674"/>
+            <a:ext cx="9741706" cy="6724644"/>
+          </a:xfrm>
+          <a:prstGeom prst="rect">
+            <a:avLst/>
+          </a:prstGeom>
         </p:spPr>
       </p:pic>
     </p:spTree>
@@ -14410,7 +18033,7 @@
       </p:grpSpPr>
       <p:pic>
         <p:nvPicPr>
-          <p:cNvPr id="798250961" name=""/>
+          <p:cNvPr id="1807074737" name=""/>
           <p:cNvPicPr>
             <a:picLocks noChangeAspect="1"/>
           </p:cNvPicPr>
@@ -14465,7 +18088,7 @@
       </p:grpSpPr>
       <p:pic>
         <p:nvPicPr>
-          <p:cNvPr id="374686288" name=""/>
+          <p:cNvPr id="1659502717" name=""/>
           <p:cNvPicPr>
             <a:picLocks noChangeAspect="1"/>
           </p:cNvPicPr>
@@ -14477,20 +18100,12 @@
         </p:blipFill>
         <p:spPr bwMode="auto">
           <a:xfrm flipH="0" flipV="0">
-            <a:off x="400845" y="810985"/>
-            <a:ext cx="11227021" cy="5236028"/>
-          </a:xfrm>
-          <a:prstGeom prst="rect">
-            <a:avLst/>
-          </a:prstGeom>
-          <a:ln w="6349">
-            <a:solidFill>
-              <a:schemeClr val="accent1">
-                <a:lumMod val="50196"/>
-              </a:schemeClr>
-            </a:solidFill>
-            <a:prstDash val="solid"/>
-          </a:ln>
+            <a:off x="91529" y="628650"/>
+            <a:ext cx="12008937" cy="5600696"/>
+          </a:xfrm>
+          <a:prstGeom prst="rect">
+            <a:avLst/>
+          </a:prstGeom>
         </p:spPr>
       </p:pic>
     </p:spTree>
@@ -14528,7 +18143,7 @@
       </p:grpSpPr>
       <p:pic>
         <p:nvPicPr>
-          <p:cNvPr id="670945661" name=""/>
+          <p:cNvPr id="386387210" name=""/>
           <p:cNvPicPr>
             <a:picLocks noChangeAspect="1"/>
           </p:cNvPicPr>
@@ -14583,7 +18198,7 @@
       </p:grpSpPr>
       <p:pic>
         <p:nvPicPr>
-          <p:cNvPr id="794616163" name=""/>
+          <p:cNvPr id="240027598" name=""/>
           <p:cNvPicPr>
             <a:picLocks noChangeAspect="1"/>
           </p:cNvPicPr>
@@ -14638,7 +18253,7 @@
       </p:grpSpPr>
       <p:pic>
         <p:nvPicPr>
-          <p:cNvPr id="2098862905" name=""/>
+          <p:cNvPr id="293194802" name=""/>
           <p:cNvPicPr>
             <a:picLocks noChangeAspect="1"/>
           </p:cNvPicPr>
@@ -14693,7 +18308,7 @@
       </p:grpSpPr>
       <p:pic>
         <p:nvPicPr>
-          <p:cNvPr id="2047731512" name=""/>
+          <p:cNvPr id="1019601163" name=""/>
           <p:cNvPicPr>
             <a:picLocks noChangeAspect="1"/>
           </p:cNvPicPr>
@@ -14748,7 +18363,7 @@
       </p:grpSpPr>
       <p:pic>
         <p:nvPicPr>
-          <p:cNvPr id="1111202050" name=""/>
+          <p:cNvPr id="1919884987" name=""/>
           <p:cNvPicPr>
             <a:picLocks noChangeAspect="1"/>
           </p:cNvPicPr>
@@ -14803,7 +18418,7 @@
       </p:grpSpPr>
       <p:pic>
         <p:nvPicPr>
-          <p:cNvPr id="266997068" name=""/>
+          <p:cNvPr id="1382725908" name=""/>
           <p:cNvPicPr>
             <a:picLocks noChangeAspect="1"/>
           </p:cNvPicPr>
@@ -14821,19 +18436,11 @@
           <a:prstGeom prst="rect">
             <a:avLst/>
           </a:prstGeom>
-          <a:ln w="6349">
-            <a:solidFill>
-              <a:schemeClr val="accent1">
-                <a:lumMod val="50196"/>
-              </a:schemeClr>
-            </a:solidFill>
-            <a:prstDash val="solid"/>
-          </a:ln>
         </p:spPr>
       </p:pic>
       <p:sp>
         <p:nvSpPr>
-          <p:cNvPr id="392784001" name=""/>
+          <p:cNvPr id="493737358" name=""/>
           <p:cNvSpPr/>
           <p:nvPr/>
         </p:nvSpPr>
@@ -14877,14 +18484,14 @@
       </p:sp>
       <p:sp>
         <p:nvSpPr>
-          <p:cNvPr id="1703556793" name=""/>
+          <p:cNvPr id="620085475" name=""/>
           <p:cNvSpPr txBox="1"/>
           <p:nvPr/>
         </p:nvSpPr>
         <p:spPr bwMode="auto">
-          <a:xfrm rot="0" flipH="0" flipV="0">
-            <a:off x="2994964" y="1125626"/>
-            <a:ext cx="6368862" cy="366120"/>
+          <a:xfrm rot="16199969" flipH="0" flipV="0">
+            <a:off x="-1385529" y="3289162"/>
+            <a:ext cx="4829895" cy="366120"/>
           </a:xfrm>
           <a:prstGeom prst="rect">
             <a:avLst/>
@@ -14947,7 +18554,7 @@
       </p:grpSpPr>
       <p:pic>
         <p:nvPicPr>
-          <p:cNvPr id="1413937523" name=""/>
+          <p:cNvPr id="159415751" name=""/>
           <p:cNvPicPr>
             <a:picLocks noChangeAspect="1"/>
           </p:cNvPicPr>
@@ -14959,8 +18566,8 @@
         </p:blipFill>
         <p:spPr bwMode="auto">
           <a:xfrm flipH="0" flipV="0">
-            <a:off x="1413083" y="1087541"/>
-            <a:ext cx="9365833" cy="4682916"/>
+            <a:off x="704845" y="733421"/>
+            <a:ext cx="10782307" cy="5391153"/>
           </a:xfrm>
           <a:prstGeom prst="rect">
             <a:avLst/>
@@ -15002,7 +18609,7 @@
       </p:grpSpPr>
       <p:pic>
         <p:nvPicPr>
-          <p:cNvPr id="756099415" name=""/>
+          <p:cNvPr id="542637588" name=""/>
           <p:cNvPicPr>
             <a:picLocks noChangeAspect="1"/>
           </p:cNvPicPr>
@@ -15014,20 +18621,12 @@
         </p:blipFill>
         <p:spPr bwMode="auto">
           <a:xfrm flipH="0" flipV="0">
-            <a:off x="2359738" y="721178"/>
-            <a:ext cx="7776601" cy="5545170"/>
-          </a:xfrm>
-          <a:prstGeom prst="rect">
-            <a:avLst/>
-          </a:prstGeom>
-          <a:ln w="6349">
-            <a:solidFill>
-              <a:schemeClr val="accent1">
-                <a:lumMod val="50196"/>
-              </a:schemeClr>
-            </a:solidFill>
-            <a:prstDash val="solid"/>
-          </a:ln>
+            <a:off x="1334474" y="33756"/>
+            <a:ext cx="9523045" cy="6790486"/>
+          </a:xfrm>
+          <a:prstGeom prst="rect">
+            <a:avLst/>
+          </a:prstGeom>
         </p:spPr>
       </p:pic>
     </p:spTree>
